--- a/pres/2024APRIL_EGU.pptx
+++ b/pres/2024APRIL_EGU.pptx
@@ -5,7 +5,7 @@
     <p:sldMasterId id="2147483648" r:id="rId1"/>
   </p:sldMasterIdLst>
   <p:notesMasterIdLst>
-    <p:notesMasterId r:id="rId38"/>
+    <p:notesMasterId r:id="rId39"/>
   </p:notesMasterIdLst>
   <p:sldIdLst>
     <p:sldId id="256" r:id="rId2"/>
@@ -15,35 +15,36 @@
     <p:sldId id="294" r:id="rId6"/>
     <p:sldId id="259" r:id="rId7"/>
     <p:sldId id="265" r:id="rId8"/>
-    <p:sldId id="296" r:id="rId9"/>
-    <p:sldId id="297" r:id="rId10"/>
-    <p:sldId id="260" r:id="rId11"/>
-    <p:sldId id="263" r:id="rId12"/>
-    <p:sldId id="301" r:id="rId13"/>
-    <p:sldId id="302" r:id="rId14"/>
-    <p:sldId id="303" r:id="rId15"/>
-    <p:sldId id="266" r:id="rId16"/>
-    <p:sldId id="305" r:id="rId17"/>
-    <p:sldId id="270" r:id="rId18"/>
-    <p:sldId id="277" r:id="rId19"/>
-    <p:sldId id="272" r:id="rId20"/>
-    <p:sldId id="276" r:id="rId21"/>
-    <p:sldId id="306" r:id="rId22"/>
-    <p:sldId id="308" r:id="rId23"/>
-    <p:sldId id="275" r:id="rId24"/>
-    <p:sldId id="307" r:id="rId25"/>
-    <p:sldId id="278" r:id="rId26"/>
-    <p:sldId id="279" r:id="rId27"/>
-    <p:sldId id="304" r:id="rId28"/>
-    <p:sldId id="280" r:id="rId29"/>
-    <p:sldId id="271" r:id="rId30"/>
-    <p:sldId id="288" r:id="rId31"/>
-    <p:sldId id="282" r:id="rId32"/>
-    <p:sldId id="298" r:id="rId33"/>
-    <p:sldId id="269" r:id="rId34"/>
-    <p:sldId id="268" r:id="rId35"/>
-    <p:sldId id="295" r:id="rId36"/>
-    <p:sldId id="257" r:id="rId37"/>
+    <p:sldId id="309" r:id="rId9"/>
+    <p:sldId id="296" r:id="rId10"/>
+    <p:sldId id="297" r:id="rId11"/>
+    <p:sldId id="260" r:id="rId12"/>
+    <p:sldId id="263" r:id="rId13"/>
+    <p:sldId id="301" r:id="rId14"/>
+    <p:sldId id="302" r:id="rId15"/>
+    <p:sldId id="303" r:id="rId16"/>
+    <p:sldId id="266" r:id="rId17"/>
+    <p:sldId id="305" r:id="rId18"/>
+    <p:sldId id="270" r:id="rId19"/>
+    <p:sldId id="277" r:id="rId20"/>
+    <p:sldId id="272" r:id="rId21"/>
+    <p:sldId id="276" r:id="rId22"/>
+    <p:sldId id="306" r:id="rId23"/>
+    <p:sldId id="308" r:id="rId24"/>
+    <p:sldId id="275" r:id="rId25"/>
+    <p:sldId id="307" r:id="rId26"/>
+    <p:sldId id="278" r:id="rId27"/>
+    <p:sldId id="279" r:id="rId28"/>
+    <p:sldId id="304" r:id="rId29"/>
+    <p:sldId id="280" r:id="rId30"/>
+    <p:sldId id="271" r:id="rId31"/>
+    <p:sldId id="288" r:id="rId32"/>
+    <p:sldId id="282" r:id="rId33"/>
+    <p:sldId id="298" r:id="rId34"/>
+    <p:sldId id="269" r:id="rId35"/>
+    <p:sldId id="268" r:id="rId36"/>
+    <p:sldId id="295" r:id="rId37"/>
+    <p:sldId id="257" r:id="rId38"/>
   </p:sldIdLst>
   <p:sldSz cx="12192000" cy="6858000"/>
   <p:notesSz cx="6858000" cy="9144000"/>
@@ -848,7 +849,7 @@
           <a:p>
             <a:fld id="{2533CA3D-6A44-9C48-B95B-957537A8AF11}" type="datetimeFigureOut">
               <a:rPr lang="en-US" smtClean="0"/>
-              <a:t>4/10/24</a:t>
+              <a:t>4/16/24</a:t>
             </a:fld>
             <a:endParaRPr lang="en-US"/>
           </a:p>
@@ -1341,7 +1342,7 @@
     </p:spTree>
     <p:extLst>
       <p:ext uri="{BB962C8B-B14F-4D97-AF65-F5344CB8AC3E}">
-        <p14:creationId xmlns:p14="http://schemas.microsoft.com/office/powerpoint/2010/main" val="532567793"/>
+        <p14:creationId xmlns:p14="http://schemas.microsoft.com/office/powerpoint/2010/main" val="3069057506"/>
       </p:ext>
     </p:extLst>
   </p:cSld>
@@ -1469,7 +1470,7 @@
     </p:spTree>
     <p:extLst>
       <p:ext uri="{BB962C8B-B14F-4D97-AF65-F5344CB8AC3E}">
-        <p14:creationId xmlns:p14="http://schemas.microsoft.com/office/powerpoint/2010/main" val="2259450565"/>
+        <p14:creationId xmlns:p14="http://schemas.microsoft.com/office/powerpoint/2010/main" val="532567793"/>
       </p:ext>
     </p:extLst>
   </p:cSld>
@@ -1597,7 +1598,7 @@
     </p:spTree>
     <p:extLst>
       <p:ext uri="{BB962C8B-B14F-4D97-AF65-F5344CB8AC3E}">
-        <p14:creationId xmlns:p14="http://schemas.microsoft.com/office/powerpoint/2010/main" val="573112075"/>
+        <p14:creationId xmlns:p14="http://schemas.microsoft.com/office/powerpoint/2010/main" val="2259450565"/>
       </p:ext>
     </p:extLst>
   </p:cSld>
@@ -1651,6 +1652,27 @@
           <a:bodyPr/>
           <a:lstStyle/>
           <a:p>
+            <a:pPr marL="0" marR="0" lvl="0" indent="0" algn="l" defTabSz="914400" rtl="0" eaLnBrk="1" fontAlgn="auto" latinLnBrk="0" hangingPunct="1">
+              <a:lnSpc>
+                <a:spcPct val="100000"/>
+              </a:lnSpc>
+              <a:spcBef>
+                <a:spcPts val="0"/>
+              </a:spcBef>
+              <a:spcAft>
+                <a:spcPts val="0"/>
+              </a:spcAft>
+              <a:buClrTx/>
+              <a:buSzTx/>
+              <a:buFontTx/>
+              <a:buNone/>
+              <a:tabLst/>
+              <a:defRPr/>
+            </a:pPr>
+            <a:r>
+              <a:rPr lang="en-US" dirty="0"/>
+              <a:t>SOZONE/</a:t>
+            </a:r>
             <a:r>
               <a:rPr lang="en-US" dirty="0" err="1"/>
               <a:t>windAnalyis</a:t>
@@ -1661,12 +1683,20 @@
             </a:r>
             <a:r>
               <a:rPr lang="en-US" dirty="0" err="1"/>
-              <a:t>oceanFields</a:t>
+              <a:t>wspdComponents</a:t>
             </a:r>
             <a:r>
               <a:rPr lang="en-US" dirty="0"/>
-              <a:t>/bargraph-streamlined-2.ipynb</a:t>
-            </a:r>
+              <a:t>/Fig-line-</a:t>
+            </a:r>
+            <a:r>
+              <a:rPr lang="en-US" dirty="0" err="1"/>
+              <a:t>windeffect.ipynb</a:t>
+            </a:r>
+            <a:endParaRPr lang="en-US" dirty="0"/>
+          </a:p>
+          <a:p>
+            <a:endParaRPr lang="en-US" dirty="0"/>
           </a:p>
         </p:txBody>
       </p:sp>
@@ -1696,7 +1726,7 @@
     </p:spTree>
     <p:extLst>
       <p:ext uri="{BB962C8B-B14F-4D97-AF65-F5344CB8AC3E}">
-        <p14:creationId xmlns:p14="http://schemas.microsoft.com/office/powerpoint/2010/main" val="3018294052"/>
+        <p14:creationId xmlns:p14="http://schemas.microsoft.com/office/powerpoint/2010/main" val="573112075"/>
       </p:ext>
     </p:extLst>
   </p:cSld>
@@ -1795,7 +1825,7 @@
     </p:spTree>
     <p:extLst>
       <p:ext uri="{BB962C8B-B14F-4D97-AF65-F5344CB8AC3E}">
-        <p14:creationId xmlns:p14="http://schemas.microsoft.com/office/powerpoint/2010/main" val="3663408375"/>
+        <p14:creationId xmlns:p14="http://schemas.microsoft.com/office/powerpoint/2010/main" val="3018294052"/>
       </p:ext>
     </p:extLst>
   </p:cSld>
@@ -1894,7 +1924,7 @@
     </p:spTree>
     <p:extLst>
       <p:ext uri="{BB962C8B-B14F-4D97-AF65-F5344CB8AC3E}">
-        <p14:creationId xmlns:p14="http://schemas.microsoft.com/office/powerpoint/2010/main" val="2364683552"/>
+        <p14:creationId xmlns:p14="http://schemas.microsoft.com/office/powerpoint/2010/main" val="3663408375"/>
       </p:ext>
     </p:extLst>
   </p:cSld>
@@ -1949,22 +1979,21 @@
           <a:lstStyle/>
           <a:p>
             <a:r>
+              <a:rPr lang="en-US" dirty="0" err="1"/>
+              <a:t>windAnalyis</a:t>
+            </a:r>
+            <a:r>
               <a:rPr lang="en-US" dirty="0"/>
               <a:t>/</a:t>
             </a:r>
             <a:r>
               <a:rPr lang="en-US" dirty="0" err="1"/>
-              <a:t>wspdComponents</a:t>
+              <a:t>oceanFields</a:t>
             </a:r>
             <a:r>
               <a:rPr lang="en-US" dirty="0"/>
-              <a:t>/</a:t>
-            </a:r>
-            <a:r>
-              <a:rPr lang="en-US" dirty="0" err="1"/>
-              <a:t>FigMAP-HOV.ipynb</a:t>
-            </a:r>
-            <a:endParaRPr lang="en-US" dirty="0"/>
+              <a:t>/bargraph-streamlined-2.ipynb</a:t>
+            </a:r>
           </a:p>
         </p:txBody>
       </p:sp>
@@ -1985,7 +2014,7 @@
           <a:p>
             <a:fld id="{954455C2-984D-C04A-A2F8-0FC076906674}" type="slidenum">
               <a:rPr lang="en-US" smtClean="0"/>
-              <a:t>19</a:t>
+              <a:t>18</a:t>
             </a:fld>
             <a:endParaRPr lang="en-US"/>
           </a:p>
@@ -1994,7 +2023,7 @@
     </p:spTree>
     <p:extLst>
       <p:ext uri="{BB962C8B-B14F-4D97-AF65-F5344CB8AC3E}">
-        <p14:creationId xmlns:p14="http://schemas.microsoft.com/office/powerpoint/2010/main" val="4188126000"/>
+        <p14:creationId xmlns:p14="http://schemas.microsoft.com/office/powerpoint/2010/main" val="2364683552"/>
       </p:ext>
     </p:extLst>
   </p:cSld>
@@ -2050,19 +2079,19 @@
           <a:p>
             <a:r>
               <a:rPr lang="en-US" dirty="0"/>
-              <a:t>notebooks/scratch/BOE-</a:t>
+              <a:t>/</a:t>
             </a:r>
             <a:r>
               <a:rPr lang="en-US" dirty="0" err="1"/>
-              <a:t>SOcarbon</a:t>
+              <a:t>wspdComponents</a:t>
             </a:r>
             <a:r>
               <a:rPr lang="en-US" dirty="0"/>
-              <a:t>/BOE-concentration-</a:t>
+              <a:t>/</a:t>
             </a:r>
             <a:r>
               <a:rPr lang="en-US" dirty="0" err="1"/>
-              <a:t>based.ipynb</a:t>
+              <a:t>FigMAP-HOV.ipynb</a:t>
             </a:r>
             <a:endParaRPr lang="en-US" dirty="0"/>
           </a:p>
@@ -2094,7 +2123,7 @@
     </p:spTree>
     <p:extLst>
       <p:ext uri="{BB962C8B-B14F-4D97-AF65-F5344CB8AC3E}">
-        <p14:creationId xmlns:p14="http://schemas.microsoft.com/office/powerpoint/2010/main" val="319605258"/>
+        <p14:creationId xmlns:p14="http://schemas.microsoft.com/office/powerpoint/2010/main" val="4188126000"/>
       </p:ext>
     </p:extLst>
   </p:cSld>
@@ -2194,7 +2223,7 @@
     </p:spTree>
     <p:extLst>
       <p:ext uri="{BB962C8B-B14F-4D97-AF65-F5344CB8AC3E}">
-        <p14:creationId xmlns:p14="http://schemas.microsoft.com/office/powerpoint/2010/main" val="1093482804"/>
+        <p14:creationId xmlns:p14="http://schemas.microsoft.com/office/powerpoint/2010/main" val="319605258"/>
       </p:ext>
     </p:extLst>
   </p:cSld>
@@ -2294,7 +2323,7 @@
     </p:spTree>
     <p:extLst>
       <p:ext uri="{BB962C8B-B14F-4D97-AF65-F5344CB8AC3E}">
-        <p14:creationId xmlns:p14="http://schemas.microsoft.com/office/powerpoint/2010/main" val="2531600116"/>
+        <p14:creationId xmlns:p14="http://schemas.microsoft.com/office/powerpoint/2010/main" val="1093482804"/>
       </p:ext>
     </p:extLst>
   </p:cSld>
@@ -2469,7 +2498,7 @@
           <a:p>
             <a:fld id="{954455C2-984D-C04A-A2F8-0FC076906674}" type="slidenum">
               <a:rPr lang="en-US" smtClean="0"/>
-              <a:t>24</a:t>
+              <a:t>23</a:t>
             </a:fld>
             <a:endParaRPr lang="en-US"/>
           </a:p>
@@ -2478,7 +2507,7 @@
     </p:spTree>
     <p:extLst>
       <p:ext uri="{BB962C8B-B14F-4D97-AF65-F5344CB8AC3E}">
-        <p14:creationId xmlns:p14="http://schemas.microsoft.com/office/powerpoint/2010/main" val="2112659688"/>
+        <p14:creationId xmlns:p14="http://schemas.microsoft.com/office/powerpoint/2010/main" val="2531600116"/>
       </p:ext>
     </p:extLst>
   </p:cSld>
@@ -2532,6 +2561,22 @@
           <a:bodyPr/>
           <a:lstStyle/>
           <a:p>
+            <a:r>
+              <a:rPr lang="en-US" dirty="0"/>
+              <a:t>notebooks/scratch/BOE-</a:t>
+            </a:r>
+            <a:r>
+              <a:rPr lang="en-US" dirty="0" err="1"/>
+              <a:t>SOcarbon</a:t>
+            </a:r>
+            <a:r>
+              <a:rPr lang="en-US" dirty="0"/>
+              <a:t>/BOE-concentration-</a:t>
+            </a:r>
+            <a:r>
+              <a:rPr lang="en-US" dirty="0" err="1"/>
+              <a:t>based.ipynb</a:t>
+            </a:r>
             <a:endParaRPr lang="en-US" dirty="0"/>
           </a:p>
         </p:txBody>
@@ -2553,7 +2598,7 @@
           <a:p>
             <a:fld id="{954455C2-984D-C04A-A2F8-0FC076906674}" type="slidenum">
               <a:rPr lang="en-US" smtClean="0"/>
-              <a:t>31</a:t>
+              <a:t>25</a:t>
             </a:fld>
             <a:endParaRPr lang="en-US"/>
           </a:p>
@@ -2562,7 +2607,7 @@
     </p:spTree>
     <p:extLst>
       <p:ext uri="{BB962C8B-B14F-4D97-AF65-F5344CB8AC3E}">
-        <p14:creationId xmlns:p14="http://schemas.microsoft.com/office/powerpoint/2010/main" val="2299575353"/>
+        <p14:creationId xmlns:p14="http://schemas.microsoft.com/office/powerpoint/2010/main" val="2112659688"/>
       </p:ext>
     </p:extLst>
   </p:cSld>
@@ -2616,50 +2661,6 @@
           <a:bodyPr/>
           <a:lstStyle/>
           <a:p>
-            <a:pPr marL="0" marR="0" lvl="0" indent="0" algn="l" defTabSz="914400" rtl="0" eaLnBrk="1" fontAlgn="auto" latinLnBrk="0" hangingPunct="1">
-              <a:lnSpc>
-                <a:spcPct val="100000"/>
-              </a:lnSpc>
-              <a:spcBef>
-                <a:spcPts val="0"/>
-              </a:spcBef>
-              <a:spcAft>
-                <a:spcPts val="0"/>
-              </a:spcAft>
-              <a:buClrTx/>
-              <a:buSzTx/>
-              <a:buFontTx/>
-              <a:buNone/>
-              <a:tabLst/>
-              <a:defRPr/>
-            </a:pPr>
-            <a:r>
-              <a:rPr lang="en-US" dirty="0"/>
-              <a:t>SOZONE/</a:t>
-            </a:r>
-            <a:r>
-              <a:rPr lang="en-US" dirty="0" err="1"/>
-              <a:t>windAnalyis</a:t>
-            </a:r>
-            <a:r>
-              <a:rPr lang="en-US" dirty="0"/>
-              <a:t>/</a:t>
-            </a:r>
-            <a:r>
-              <a:rPr lang="en-US" dirty="0" err="1"/>
-              <a:t>wspdComponents</a:t>
-            </a:r>
-            <a:r>
-              <a:rPr lang="en-US" dirty="0"/>
-              <a:t>/Fig-line-</a:t>
-            </a:r>
-            <a:r>
-              <a:rPr lang="en-US" dirty="0" err="1"/>
-              <a:t>windeffect.ipynb</a:t>
-            </a:r>
-            <a:endParaRPr lang="en-US" dirty="0"/>
-          </a:p>
-          <a:p>
             <a:endParaRPr lang="en-US" dirty="0"/>
           </a:p>
         </p:txBody>
@@ -2690,7 +2691,7 @@
     </p:spTree>
     <p:extLst>
       <p:ext uri="{BB962C8B-B14F-4D97-AF65-F5344CB8AC3E}">
-        <p14:creationId xmlns:p14="http://schemas.microsoft.com/office/powerpoint/2010/main" val="1541798928"/>
+        <p14:creationId xmlns:p14="http://schemas.microsoft.com/office/powerpoint/2010/main" val="2299575353"/>
       </p:ext>
     </p:extLst>
   </p:cSld>
@@ -2744,6 +2745,23 @@
           <a:bodyPr/>
           <a:lstStyle/>
           <a:p>
+            <a:pPr marL="0" marR="0" lvl="0" indent="0" algn="l" defTabSz="914400" rtl="0" eaLnBrk="1" fontAlgn="auto" latinLnBrk="0" hangingPunct="1">
+              <a:lnSpc>
+                <a:spcPct val="100000"/>
+              </a:lnSpc>
+              <a:spcBef>
+                <a:spcPts val="0"/>
+              </a:spcBef>
+              <a:spcAft>
+                <a:spcPts val="0"/>
+              </a:spcAft>
+              <a:buClrTx/>
+              <a:buSzTx/>
+              <a:buFontTx/>
+              <a:buNone/>
+              <a:tabLst/>
+              <a:defRPr/>
+            </a:pPr>
             <a:r>
               <a:rPr lang="en-US" dirty="0"/>
               <a:t>SOZONE/</a:t>
@@ -2768,6 +2786,9 @@
               <a:rPr lang="en-US" dirty="0" err="1"/>
               <a:t>windeffect.ipynb</a:t>
             </a:r>
+            <a:endParaRPr lang="en-US" dirty="0"/>
+          </a:p>
+          <a:p>
             <a:endParaRPr lang="en-US" dirty="0"/>
           </a:p>
         </p:txBody>
@@ -2789,7 +2810,7 @@
           <a:p>
             <a:fld id="{954455C2-984D-C04A-A2F8-0FC076906674}" type="slidenum">
               <a:rPr lang="en-US" smtClean="0"/>
-              <a:t>34</a:t>
+              <a:t>33</a:t>
             </a:fld>
             <a:endParaRPr lang="en-US"/>
           </a:p>
@@ -2798,7 +2819,7 @@
     </p:spTree>
     <p:extLst>
       <p:ext uri="{BB962C8B-B14F-4D97-AF65-F5344CB8AC3E}">
-        <p14:creationId xmlns:p14="http://schemas.microsoft.com/office/powerpoint/2010/main" val="1944008448"/>
+        <p14:creationId xmlns:p14="http://schemas.microsoft.com/office/powerpoint/2010/main" val="1541798928"/>
       </p:ext>
     </p:extLst>
   </p:cSld>
@@ -2852,6 +2873,30 @@
           <a:bodyPr/>
           <a:lstStyle/>
           <a:p>
+            <a:r>
+              <a:rPr lang="en-US" dirty="0"/>
+              <a:t>SOZONE/</a:t>
+            </a:r>
+            <a:r>
+              <a:rPr lang="en-US" dirty="0" err="1"/>
+              <a:t>windAnalyis</a:t>
+            </a:r>
+            <a:r>
+              <a:rPr lang="en-US" dirty="0"/>
+              <a:t>/</a:t>
+            </a:r>
+            <a:r>
+              <a:rPr lang="en-US" dirty="0" err="1"/>
+              <a:t>wspdComponents</a:t>
+            </a:r>
+            <a:r>
+              <a:rPr lang="en-US" dirty="0"/>
+              <a:t>/Fig-line-</a:t>
+            </a:r>
+            <a:r>
+              <a:rPr lang="en-US" dirty="0" err="1"/>
+              <a:t>windeffect.ipynb</a:t>
+            </a:r>
             <a:endParaRPr lang="en-US" dirty="0"/>
           </a:p>
         </p:txBody>
@@ -2874,6 +2919,90 @@
             <a:fld id="{954455C2-984D-C04A-A2F8-0FC076906674}" type="slidenum">
               <a:rPr lang="en-US" smtClean="0"/>
               <a:t>35</a:t>
+            </a:fld>
+            <a:endParaRPr lang="en-US"/>
+          </a:p>
+        </p:txBody>
+      </p:sp>
+    </p:spTree>
+    <p:extLst>
+      <p:ext uri="{BB962C8B-B14F-4D97-AF65-F5344CB8AC3E}">
+        <p14:creationId xmlns:p14="http://schemas.microsoft.com/office/powerpoint/2010/main" val="1944008448"/>
+      </p:ext>
+    </p:extLst>
+  </p:cSld>
+  <p:clrMapOvr>
+    <a:masterClrMapping/>
+  </p:clrMapOvr>
+</p:notes>
+</file>
+
+<file path=ppt/notesSlides/notesSlide25.xml><?xml version="1.0" encoding="utf-8"?>
+<p:notes xmlns:a="http://schemas.openxmlformats.org/drawingml/2006/main" xmlns:r="http://schemas.openxmlformats.org/officeDocument/2006/relationships" xmlns:p="http://schemas.openxmlformats.org/presentationml/2006/main">
+  <p:cSld>
+    <p:spTree>
+      <p:nvGrpSpPr>
+        <p:cNvPr id="1" name=""/>
+        <p:cNvGrpSpPr/>
+        <p:nvPr/>
+      </p:nvGrpSpPr>
+      <p:grpSpPr>
+        <a:xfrm>
+          <a:off x="0" y="0"/>
+          <a:ext cx="0" cy="0"/>
+          <a:chOff x="0" y="0"/>
+          <a:chExt cx="0" cy="0"/>
+        </a:xfrm>
+      </p:grpSpPr>
+      <p:sp>
+        <p:nvSpPr>
+          <p:cNvPr id="2" name="Slide Image Placeholder 1"/>
+          <p:cNvSpPr>
+            <a:spLocks noGrp="1" noRot="1" noChangeAspect="1"/>
+          </p:cNvSpPr>
+          <p:nvPr>
+            <p:ph type="sldImg"/>
+          </p:nvPr>
+        </p:nvSpPr>
+        <p:spPr/>
+      </p:sp>
+      <p:sp>
+        <p:nvSpPr>
+          <p:cNvPr id="3" name="Notes Placeholder 2"/>
+          <p:cNvSpPr>
+            <a:spLocks noGrp="1"/>
+          </p:cNvSpPr>
+          <p:nvPr>
+            <p:ph type="body" idx="1"/>
+          </p:nvPr>
+        </p:nvSpPr>
+        <p:spPr/>
+        <p:txBody>
+          <a:bodyPr/>
+          <a:lstStyle/>
+          <a:p>
+            <a:endParaRPr lang="en-US" dirty="0"/>
+          </a:p>
+        </p:txBody>
+      </p:sp>
+      <p:sp>
+        <p:nvSpPr>
+          <p:cNvPr id="4" name="Slide Number Placeholder 3"/>
+          <p:cNvSpPr>
+            <a:spLocks noGrp="1"/>
+          </p:cNvSpPr>
+          <p:nvPr>
+            <p:ph type="sldNum" sz="quarter" idx="5"/>
+          </p:nvPr>
+        </p:nvSpPr>
+        <p:spPr/>
+        <p:txBody>
+          <a:bodyPr/>
+          <a:lstStyle/>
+          <a:p>
+            <a:fld id="{954455C2-984D-C04A-A2F8-0FC076906674}" type="slidenum">
+              <a:rPr lang="en-US" smtClean="0"/>
+              <a:t>36</a:t>
             </a:fld>
             <a:endParaRPr lang="en-US"/>
           </a:p>
@@ -3218,7 +3347,7 @@
     </p:spTree>
     <p:extLst>
       <p:ext uri="{BB962C8B-B14F-4D97-AF65-F5344CB8AC3E}">
-        <p14:creationId xmlns:p14="http://schemas.microsoft.com/office/powerpoint/2010/main" val="1023589353"/>
+        <p14:creationId xmlns:p14="http://schemas.microsoft.com/office/powerpoint/2010/main" val="3316110179"/>
       </p:ext>
     </p:extLst>
   </p:cSld>
@@ -3302,7 +3431,7 @@
     </p:spTree>
     <p:extLst>
       <p:ext uri="{BB962C8B-B14F-4D97-AF65-F5344CB8AC3E}">
-        <p14:creationId xmlns:p14="http://schemas.microsoft.com/office/powerpoint/2010/main" val="1898682986"/>
+        <p14:creationId xmlns:p14="http://schemas.microsoft.com/office/powerpoint/2010/main" val="1023589353"/>
       </p:ext>
     </p:extLst>
   </p:cSld>
@@ -3386,7 +3515,7 @@
     </p:spTree>
     <p:extLst>
       <p:ext uri="{BB962C8B-B14F-4D97-AF65-F5344CB8AC3E}">
-        <p14:creationId xmlns:p14="http://schemas.microsoft.com/office/powerpoint/2010/main" val="1332880913"/>
+        <p14:creationId xmlns:p14="http://schemas.microsoft.com/office/powerpoint/2010/main" val="1898682986"/>
       </p:ext>
     </p:extLst>
   </p:cSld>
@@ -3440,50 +3569,6 @@
           <a:bodyPr/>
           <a:lstStyle/>
           <a:p>
-            <a:pPr marL="0" marR="0" lvl="0" indent="0" algn="l" defTabSz="914400" rtl="0" eaLnBrk="1" fontAlgn="auto" latinLnBrk="0" hangingPunct="1">
-              <a:lnSpc>
-                <a:spcPct val="100000"/>
-              </a:lnSpc>
-              <a:spcBef>
-                <a:spcPts val="0"/>
-              </a:spcBef>
-              <a:spcAft>
-                <a:spcPts val="0"/>
-              </a:spcAft>
-              <a:buClrTx/>
-              <a:buSzTx/>
-              <a:buFontTx/>
-              <a:buNone/>
-              <a:tabLst/>
-              <a:defRPr/>
-            </a:pPr>
-            <a:r>
-              <a:rPr lang="en-US" dirty="0"/>
-              <a:t>SOZONE/</a:t>
-            </a:r>
-            <a:r>
-              <a:rPr lang="en-US" dirty="0" err="1"/>
-              <a:t>windAnalyis</a:t>
-            </a:r>
-            <a:r>
-              <a:rPr lang="en-US" dirty="0"/>
-              <a:t>/</a:t>
-            </a:r>
-            <a:r>
-              <a:rPr lang="en-US" dirty="0" err="1"/>
-              <a:t>wspdComponents</a:t>
-            </a:r>
-            <a:r>
-              <a:rPr lang="en-US" dirty="0"/>
-              <a:t>/Fig-line-</a:t>
-            </a:r>
-            <a:r>
-              <a:rPr lang="en-US" dirty="0" err="1"/>
-              <a:t>windeffect.ipynb</a:t>
-            </a:r>
-            <a:endParaRPr lang="en-US" dirty="0"/>
-          </a:p>
-          <a:p>
             <a:endParaRPr lang="en-US" dirty="0"/>
           </a:p>
         </p:txBody>
@@ -3514,7 +3599,7 @@
     </p:spTree>
     <p:extLst>
       <p:ext uri="{BB962C8B-B14F-4D97-AF65-F5344CB8AC3E}">
-        <p14:creationId xmlns:p14="http://schemas.microsoft.com/office/powerpoint/2010/main" val="3069057506"/>
+        <p14:creationId xmlns:p14="http://schemas.microsoft.com/office/powerpoint/2010/main" val="1332880913"/>
       </p:ext>
     </p:extLst>
   </p:cSld>
@@ -3671,7 +3756,7 @@
           <a:p>
             <a:fld id="{C8D220B2-7775-0445-A52F-3B794F02E8CE}" type="datetimeFigureOut">
               <a:rPr lang="en-US" smtClean="0"/>
-              <a:t>4/10/24</a:t>
+              <a:t>4/16/24</a:t>
             </a:fld>
             <a:endParaRPr lang="en-US"/>
           </a:p>
@@ -3869,7 +3954,7 @@
           <a:p>
             <a:fld id="{C8D220B2-7775-0445-A52F-3B794F02E8CE}" type="datetimeFigureOut">
               <a:rPr lang="en-US" smtClean="0"/>
-              <a:t>4/10/24</a:t>
+              <a:t>4/16/24</a:t>
             </a:fld>
             <a:endParaRPr lang="en-US"/>
           </a:p>
@@ -4077,7 +4162,7 @@
           <a:p>
             <a:fld id="{C8D220B2-7775-0445-A52F-3B794F02E8CE}" type="datetimeFigureOut">
               <a:rPr lang="en-US" smtClean="0"/>
-              <a:t>4/10/24</a:t>
+              <a:t>4/16/24</a:t>
             </a:fld>
             <a:endParaRPr lang="en-US"/>
           </a:p>
@@ -4275,7 +4360,7 @@
           <a:p>
             <a:fld id="{C8D220B2-7775-0445-A52F-3B794F02E8CE}" type="datetimeFigureOut">
               <a:rPr lang="en-US" smtClean="0"/>
-              <a:t>4/10/24</a:t>
+              <a:t>4/16/24</a:t>
             </a:fld>
             <a:endParaRPr lang="en-US"/>
           </a:p>
@@ -4550,7 +4635,7 @@
           <a:p>
             <a:fld id="{C8D220B2-7775-0445-A52F-3B794F02E8CE}" type="datetimeFigureOut">
               <a:rPr lang="en-US" smtClean="0"/>
-              <a:t>4/10/24</a:t>
+              <a:t>4/16/24</a:t>
             </a:fld>
             <a:endParaRPr lang="en-US"/>
           </a:p>
@@ -4815,7 +4900,7 @@
           <a:p>
             <a:fld id="{C8D220B2-7775-0445-A52F-3B794F02E8CE}" type="datetimeFigureOut">
               <a:rPr lang="en-US" smtClean="0"/>
-              <a:t>4/10/24</a:t>
+              <a:t>4/16/24</a:t>
             </a:fld>
             <a:endParaRPr lang="en-US"/>
           </a:p>
@@ -5227,7 +5312,7 @@
           <a:p>
             <a:fld id="{C8D220B2-7775-0445-A52F-3B794F02E8CE}" type="datetimeFigureOut">
               <a:rPr lang="en-US" smtClean="0"/>
-              <a:t>4/10/24</a:t>
+              <a:t>4/16/24</a:t>
             </a:fld>
             <a:endParaRPr lang="en-US"/>
           </a:p>
@@ -5368,7 +5453,7 @@
           <a:p>
             <a:fld id="{C8D220B2-7775-0445-A52F-3B794F02E8CE}" type="datetimeFigureOut">
               <a:rPr lang="en-US" smtClean="0"/>
-              <a:t>4/10/24</a:t>
+              <a:t>4/16/24</a:t>
             </a:fld>
             <a:endParaRPr lang="en-US"/>
           </a:p>
@@ -5481,7 +5566,7 @@
           <a:p>
             <a:fld id="{C8D220B2-7775-0445-A52F-3B794F02E8CE}" type="datetimeFigureOut">
               <a:rPr lang="en-US" smtClean="0"/>
-              <a:t>4/10/24</a:t>
+              <a:t>4/16/24</a:t>
             </a:fld>
             <a:endParaRPr lang="en-US"/>
           </a:p>
@@ -5792,7 +5877,7 @@
           <a:p>
             <a:fld id="{C8D220B2-7775-0445-A52F-3B794F02E8CE}" type="datetimeFigureOut">
               <a:rPr lang="en-US" smtClean="0"/>
-              <a:t>4/10/24</a:t>
+              <a:t>4/16/24</a:t>
             </a:fld>
             <a:endParaRPr lang="en-US"/>
           </a:p>
@@ -6080,7 +6165,7 @@
           <a:p>
             <a:fld id="{C8D220B2-7775-0445-A52F-3B794F02E8CE}" type="datetimeFigureOut">
               <a:rPr lang="en-US" smtClean="0"/>
-              <a:t>4/10/24</a:t>
+              <a:t>4/16/24</a:t>
             </a:fld>
             <a:endParaRPr lang="en-US"/>
           </a:p>
@@ -6321,7 +6406,7 @@
           <a:p>
             <a:fld id="{C8D220B2-7775-0445-A52F-3B794F02E8CE}" type="datetimeFigureOut">
               <a:rPr lang="en-US" smtClean="0"/>
-              <a:t>4/10/24</a:t>
+              <a:t>4/16/24</a:t>
             </a:fld>
             <a:endParaRPr lang="en-US"/>
           </a:p>
@@ -7064,7 +7149,7 @@
         <p:spPr/>
         <p:txBody>
           <a:bodyPr>
-            <a:normAutofit/>
+            <a:normAutofit fontScale="90000"/>
           </a:bodyPr>
           <a:lstStyle/>
           <a:p>
@@ -7076,7 +7161,7 @@
                 </a:solidFill>
                 <a:latin typeface="Gill Sans MT" panose="020B0502020104020203" pitchFamily="34" charset="77"/>
               </a:rPr>
-              <a:t>Can we learn from the UKESM1 winds?</a:t>
+              <a:t>What are the major physical controls </a:t>
             </a:r>
             <a:br>
               <a:rPr lang="en-US" sz="3600" dirty="0">
@@ -7093,155 +7178,1123 @@
                 </a:solidFill>
                 <a:latin typeface="Gill Sans MT" panose="020B0502020104020203" pitchFamily="34" charset="77"/>
               </a:rPr>
-              <a:t>Yes, they perform well against the ERA5 reanalysis</a:t>
+              <a:t>on the Southern Ocean carbon sink, and how will they change due to GHG emissions and ozone depletion?</a:t>
             </a:r>
             <a:endParaRPr lang="en-US" sz="3600" dirty="0"/>
           </a:p>
         </p:txBody>
       </p:sp>
-      <p:pic>
-        <p:nvPicPr>
-          <p:cNvPr id="1026" name="Picture 2">
-            <a:extLst>
-              <a:ext uri="{FF2B5EF4-FFF2-40B4-BE49-F238E27FC236}">
-                <a16:creationId xmlns:a16="http://schemas.microsoft.com/office/drawing/2014/main" id="{FC48E6D8-05D0-1989-E531-BBB21872DB4F}"/>
-              </a:ext>
-            </a:extLst>
-          </p:cNvPr>
-          <p:cNvPicPr>
-            <a:picLocks noChangeAspect="1" noChangeArrowheads="1"/>
-          </p:cNvPicPr>
+      <p:sp>
+        <p:nvSpPr>
+          <p:cNvPr id="4" name="TextBox 3">
+            <a:extLst>
+              <a:ext uri="{FF2B5EF4-FFF2-40B4-BE49-F238E27FC236}">
+                <a16:creationId xmlns:a16="http://schemas.microsoft.com/office/drawing/2014/main" id="{12DF8619-896C-4440-9534-287F7012DECF}"/>
+              </a:ext>
+            </a:extLst>
+          </p:cNvPr>
+          <p:cNvSpPr txBox="1"/>
           <p:nvPr/>
-        </p:nvPicPr>
-        <p:blipFill>
-          <a:blip r:embed="rId3">
-            <a:extLst>
-              <a:ext uri="{28A0092B-C50C-407E-A947-70E740481C1C}">
-                <a14:useLocalDpi xmlns:a14="http://schemas.microsoft.com/office/drawing/2010/main" val="0"/>
-              </a:ext>
-            </a:extLst>
-          </a:blip>
-          <a:srcRect/>
-          <a:stretch>
-            <a:fillRect/>
-          </a:stretch>
-        </p:blipFill>
-        <p:spPr bwMode="auto">
+        </p:nvSpPr>
+        <p:spPr>
           <a:xfrm>
-            <a:off x="1816045" y="1690688"/>
-            <a:ext cx="2054607" cy="4802187"/>
+            <a:off x="1155816" y="1906137"/>
+            <a:ext cx="2743788" cy="1200329"/>
           </a:xfrm>
           <a:prstGeom prst="rect">
             <a:avLst/>
           </a:prstGeom>
           <a:noFill/>
-          <a:extLst>
-            <a:ext uri="{909E8E84-426E-40DD-AFC4-6F175D3DCCD1}">
-              <a14:hiddenFill xmlns:a14="http://schemas.microsoft.com/office/drawing/2010/main">
-                <a:solidFill>
-                  <a:srgbClr val="FFFFFF"/>
-                </a:solidFill>
-              </a14:hiddenFill>
-            </a:ext>
-          </a:extLst>
         </p:spPr>
-      </p:pic>
-      <p:pic>
-        <p:nvPicPr>
-          <p:cNvPr id="1028" name="Picture 4">
-            <a:extLst>
-              <a:ext uri="{FF2B5EF4-FFF2-40B4-BE49-F238E27FC236}">
-                <a16:creationId xmlns:a16="http://schemas.microsoft.com/office/drawing/2014/main" id="{4162DECD-2F1D-4403-0BEB-804AAE298B40}"/>
-              </a:ext>
-            </a:extLst>
-          </p:cNvPr>
-          <p:cNvPicPr>
-            <a:picLocks noChangeAspect="1" noChangeArrowheads="1"/>
-          </p:cNvPicPr>
+        <p:txBody>
+          <a:bodyPr wrap="square">
+            <a:spAutoFit/>
+          </a:bodyPr>
+          <a:lstStyle/>
+          <a:p>
+            <a:pPr algn="ctr"/>
+            <a:r>
+              <a:rPr lang="en-CA" sz="2400" b="1" dirty="0">
+                <a:solidFill>
+                  <a:srgbClr val="000000"/>
+                </a:solidFill>
+                <a:latin typeface="Georgia" panose="02040502050405020303" pitchFamily="18" charset="0"/>
+                <a:cs typeface="Gill Sans" panose="020B0502020104020203" pitchFamily="34" charset="-79"/>
+              </a:rPr>
+              <a:t>sea surface temperature</a:t>
+            </a:r>
+          </a:p>
+          <a:p>
+            <a:pPr algn="ctr"/>
+            <a:r>
+              <a:rPr lang="en-CA" sz="2400" b="1" dirty="0">
+                <a:solidFill>
+                  <a:srgbClr val="000000"/>
+                </a:solidFill>
+                <a:latin typeface="Georgia" panose="02040502050405020303" pitchFamily="18" charset="0"/>
+                <a:cs typeface="Gill Sans" panose="020B0502020104020203" pitchFamily="34" charset="-79"/>
+              </a:rPr>
+              <a:t>(SST)</a:t>
+            </a:r>
+            <a:endParaRPr lang="en-US" sz="2400" b="1" dirty="0"/>
+          </a:p>
+        </p:txBody>
+      </p:sp>
+      <p:sp>
+        <p:nvSpPr>
+          <p:cNvPr id="5" name="TextBox 4">
+            <a:extLst>
+              <a:ext uri="{FF2B5EF4-FFF2-40B4-BE49-F238E27FC236}">
+                <a16:creationId xmlns:a16="http://schemas.microsoft.com/office/drawing/2014/main" id="{2348D4B2-B94B-0F69-593E-9DCD4FE479BB}"/>
+              </a:ext>
+            </a:extLst>
+          </p:cNvPr>
+          <p:cNvSpPr txBox="1"/>
           <p:nvPr/>
-        </p:nvPicPr>
-        <p:blipFill>
-          <a:blip r:embed="rId4">
-            <a:extLst>
-              <a:ext uri="{28A0092B-C50C-407E-A947-70E740481C1C}">
-                <a14:useLocalDpi xmlns:a14="http://schemas.microsoft.com/office/drawing/2010/main" val="0"/>
-              </a:ext>
-            </a:extLst>
-          </a:blip>
-          <a:srcRect/>
-          <a:stretch>
-            <a:fillRect/>
-          </a:stretch>
-        </p:blipFill>
-        <p:spPr bwMode="auto">
+        </p:nvSpPr>
+        <p:spPr>
           <a:xfrm>
-            <a:off x="4145911" y="1690688"/>
-            <a:ext cx="2797929" cy="4557712"/>
+            <a:off x="4994460" y="1906136"/>
+            <a:ext cx="2203080" cy="1200329"/>
           </a:xfrm>
           <a:prstGeom prst="rect">
             <a:avLst/>
           </a:prstGeom>
           <a:noFill/>
-          <a:extLst>
-            <a:ext uri="{909E8E84-426E-40DD-AFC4-6F175D3DCCD1}">
-              <a14:hiddenFill xmlns:a14="http://schemas.microsoft.com/office/drawing/2010/main">
-                <a:solidFill>
-                  <a:srgbClr val="FFFFFF"/>
-                </a:solidFill>
-              </a14:hiddenFill>
-            </a:ext>
-          </a:extLst>
         </p:spPr>
-      </p:pic>
-      <p:pic>
-        <p:nvPicPr>
-          <p:cNvPr id="3" name="Picture 2">
-            <a:extLst>
-              <a:ext uri="{FF2B5EF4-FFF2-40B4-BE49-F238E27FC236}">
-                <a16:creationId xmlns:a16="http://schemas.microsoft.com/office/drawing/2014/main" id="{2E0F8616-0418-6661-8111-B6144B7FDBC0}"/>
-              </a:ext>
-            </a:extLst>
-          </p:cNvPr>
-          <p:cNvPicPr>
-            <a:picLocks noChangeAspect="1" noChangeArrowheads="1"/>
-          </p:cNvPicPr>
+        <p:txBody>
+          <a:bodyPr wrap="square">
+            <a:spAutoFit/>
+          </a:bodyPr>
+          <a:lstStyle/>
+          <a:p>
+            <a:pPr algn="ctr"/>
+            <a:r>
+              <a:rPr lang="en-CA" sz="2400" b="1" dirty="0">
+                <a:solidFill>
+                  <a:srgbClr val="000000"/>
+                </a:solidFill>
+                <a:latin typeface="Georgia" panose="02040502050405020303" pitchFamily="18" charset="0"/>
+                <a:cs typeface="Gill Sans" panose="020B0502020104020203" pitchFamily="34" charset="-79"/>
+              </a:rPr>
+              <a:t>mixed layer </a:t>
+            </a:r>
+          </a:p>
+          <a:p>
+            <a:pPr algn="ctr"/>
+            <a:r>
+              <a:rPr lang="en-CA" sz="2400" b="1" dirty="0">
+                <a:solidFill>
+                  <a:srgbClr val="000000"/>
+                </a:solidFill>
+                <a:latin typeface="Georgia" panose="02040502050405020303" pitchFamily="18" charset="0"/>
+                <a:cs typeface="Gill Sans" panose="020B0502020104020203" pitchFamily="34" charset="-79"/>
+              </a:rPr>
+              <a:t>depth </a:t>
+            </a:r>
+          </a:p>
+          <a:p>
+            <a:pPr algn="ctr"/>
+            <a:r>
+              <a:rPr lang="en-CA" sz="2400" b="1" dirty="0">
+                <a:solidFill>
+                  <a:srgbClr val="000000"/>
+                </a:solidFill>
+                <a:latin typeface="Georgia" panose="02040502050405020303" pitchFamily="18" charset="0"/>
+                <a:cs typeface="Gill Sans" panose="020B0502020104020203" pitchFamily="34" charset="-79"/>
+              </a:rPr>
+              <a:t>(MLD)</a:t>
+            </a:r>
+          </a:p>
+        </p:txBody>
+      </p:sp>
+      <p:sp>
+        <p:nvSpPr>
+          <p:cNvPr id="6" name="TextBox 5">
+            <a:extLst>
+              <a:ext uri="{FF2B5EF4-FFF2-40B4-BE49-F238E27FC236}">
+                <a16:creationId xmlns:a16="http://schemas.microsoft.com/office/drawing/2014/main" id="{256DDB4B-4437-434D-72B5-B631BFD2DBC5}"/>
+              </a:ext>
+            </a:extLst>
+          </p:cNvPr>
+          <p:cNvSpPr txBox="1"/>
           <p:nvPr/>
-        </p:nvPicPr>
-        <p:blipFill rotWithShape="1">
-          <a:blip r:embed="rId5">
-            <a:extLst>
-              <a:ext uri="{28A0092B-C50C-407E-A947-70E740481C1C}">
-                <a14:useLocalDpi xmlns:a14="http://schemas.microsoft.com/office/drawing/2010/main" val="0"/>
-              </a:ext>
-            </a:extLst>
-          </a:blip>
-          <a:srcRect r="47887" b="75347"/>
-          <a:stretch/>
-        </p:blipFill>
-        <p:spPr bwMode="auto">
+        </p:nvSpPr>
+        <p:spPr>
           <a:xfrm>
-            <a:off x="7219100" y="2267712"/>
-            <a:ext cx="4479209" cy="2706624"/>
+            <a:off x="8548428" y="2090801"/>
+            <a:ext cx="2203080" cy="830997"/>
           </a:xfrm>
           <a:prstGeom prst="rect">
             <a:avLst/>
           </a:prstGeom>
           <a:noFill/>
-          <a:extLst>
-            <a:ext uri="{909E8E84-426E-40DD-AFC4-6F175D3DCCD1}">
-              <a14:hiddenFill xmlns:a14="http://schemas.microsoft.com/office/drawing/2010/main">
-                <a:solidFill>
-                  <a:srgbClr val="FFFFFF"/>
-                </a:solidFill>
-              </a14:hiddenFill>
-            </a:ext>
-          </a:extLst>
         </p:spPr>
-      </p:pic>
+        <p:txBody>
+          <a:bodyPr wrap="square">
+            <a:spAutoFit/>
+          </a:bodyPr>
+          <a:lstStyle/>
+          <a:p>
+            <a:pPr algn="ctr"/>
+            <a:r>
+              <a:rPr lang="en-CA" sz="2400" b="1" dirty="0">
+                <a:solidFill>
+                  <a:srgbClr val="000000"/>
+                </a:solidFill>
+                <a:latin typeface="Georgia" panose="02040502050405020303" pitchFamily="18" charset="0"/>
+                <a:cs typeface="Gill Sans" panose="020B0502020104020203" pitchFamily="34" charset="-79"/>
+              </a:rPr>
+              <a:t>overturning</a:t>
+            </a:r>
+          </a:p>
+          <a:p>
+            <a:pPr algn="ctr"/>
+            <a:r>
+              <a:rPr lang="en-CA" sz="2400" b="1" dirty="0">
+                <a:solidFill>
+                  <a:srgbClr val="000000"/>
+                </a:solidFill>
+                <a:latin typeface="Georgia" panose="02040502050405020303" pitchFamily="18" charset="0"/>
+                <a:cs typeface="Gill Sans" panose="020B0502020104020203" pitchFamily="34" charset="-79"/>
+              </a:rPr>
+              <a:t>(OT)</a:t>
+            </a:r>
+            <a:endParaRPr lang="en-US" sz="2400" b="1" dirty="0"/>
+          </a:p>
+        </p:txBody>
+      </p:sp>
+      <p:grpSp>
+        <p:nvGrpSpPr>
+          <p:cNvPr id="47" name="Group 46">
+            <a:extLst>
+              <a:ext uri="{FF2B5EF4-FFF2-40B4-BE49-F238E27FC236}">
+                <a16:creationId xmlns:a16="http://schemas.microsoft.com/office/drawing/2014/main" id="{42BE6AA8-AFE0-8689-DDF8-373B6DBBCCEE}"/>
+              </a:ext>
+            </a:extLst>
+          </p:cNvPr>
+          <p:cNvGrpSpPr/>
+          <p:nvPr/>
+        </p:nvGrpSpPr>
+        <p:grpSpPr>
+          <a:xfrm>
+            <a:off x="1543092" y="3275472"/>
+            <a:ext cx="2095200" cy="895320"/>
+            <a:chOff x="1540944" y="3811608"/>
+            <a:chExt cx="2095200" cy="895320"/>
+          </a:xfrm>
+        </p:grpSpPr>
+        <mc:AlternateContent xmlns:mc="http://schemas.openxmlformats.org/markup-compatibility/2006" xmlns:p14="http://schemas.microsoft.com/office/powerpoint/2010/main">
+          <mc:Choice Requires="p14">
+            <p:contentPart p14:bwMode="auto" r:id="rId3">
+              <p14:nvContentPartPr>
+                <p14:cNvPr id="9" name="Ink 8">
+                  <a:extLst>
+                    <a:ext uri="{FF2B5EF4-FFF2-40B4-BE49-F238E27FC236}">
+                      <a16:creationId xmlns:a16="http://schemas.microsoft.com/office/drawing/2014/main" id="{FC80510C-4050-8669-4226-DB6A9E9D90CF}"/>
+                    </a:ext>
+                  </a:extLst>
+                </p14:cNvPr>
+                <p14:cNvContentPartPr/>
+                <p14:nvPr/>
+              </p14:nvContentPartPr>
+              <p14:xfrm>
+                <a:off x="1540944" y="4233888"/>
+                <a:ext cx="2095200" cy="223560"/>
+              </p14:xfrm>
+            </p:contentPart>
+          </mc:Choice>
+          <mc:Fallback xmlns="">
+            <p:pic>
+              <p:nvPicPr>
+                <p:cNvPr id="9" name="Ink 8">
+                  <a:extLst>
+                    <a:ext uri="{FF2B5EF4-FFF2-40B4-BE49-F238E27FC236}">
+                      <a16:creationId xmlns:a16="http://schemas.microsoft.com/office/drawing/2014/main" id="{FC80510C-4050-8669-4226-DB6A9E9D90CF}"/>
+                    </a:ext>
+                  </a:extLst>
+                </p:cNvPr>
+                <p:cNvPicPr/>
+                <p:nvPr/>
+              </p:nvPicPr>
+              <p:blipFill>
+                <a:blip r:embed="rId4"/>
+                <a:stretch>
+                  <a:fillRect/>
+                </a:stretch>
+              </p:blipFill>
+              <p:spPr>
+                <a:xfrm>
+                  <a:off x="1522944" y="4215888"/>
+                  <a:ext cx="2130840" cy="259200"/>
+                </a:xfrm>
+                <a:prstGeom prst="rect">
+                  <a:avLst/>
+                </a:prstGeom>
+              </p:spPr>
+            </p:pic>
+          </mc:Fallback>
+        </mc:AlternateContent>
+        <p:grpSp>
+          <p:nvGrpSpPr>
+            <p:cNvPr id="35" name="Group 34">
+              <a:extLst>
+                <a:ext uri="{FF2B5EF4-FFF2-40B4-BE49-F238E27FC236}">
+                  <a16:creationId xmlns:a16="http://schemas.microsoft.com/office/drawing/2014/main" id="{9A47C0ED-1DCA-19AB-6E06-0031244AF319}"/>
+                </a:ext>
+              </a:extLst>
+            </p:cNvPr>
+            <p:cNvGrpSpPr/>
+            <p:nvPr/>
+          </p:nvGrpSpPr>
+          <p:grpSpPr>
+            <a:xfrm>
+              <a:off x="2594664" y="3811608"/>
+              <a:ext cx="400320" cy="895320"/>
+              <a:chOff x="2258424" y="4817808"/>
+              <a:chExt cx="400320" cy="895320"/>
+            </a:xfrm>
+          </p:grpSpPr>
+          <mc:AlternateContent xmlns:mc="http://schemas.openxmlformats.org/markup-compatibility/2006" xmlns:p14="http://schemas.microsoft.com/office/powerpoint/2010/main">
+            <mc:Choice Requires="p14">
+              <p:contentPart p14:bwMode="auto" r:id="rId5">
+                <p14:nvContentPartPr>
+                  <p14:cNvPr id="33" name="Ink 32">
+                    <a:extLst>
+                      <a:ext uri="{FF2B5EF4-FFF2-40B4-BE49-F238E27FC236}">
+                        <a16:creationId xmlns:a16="http://schemas.microsoft.com/office/drawing/2014/main" id="{59DDF7AF-5BF7-9D89-56C1-415AAD31535F}"/>
+                      </a:ext>
+                    </a:extLst>
+                  </p14:cNvPr>
+                  <p14:cNvContentPartPr/>
+                  <p14:nvPr/>
+                </p14:nvContentPartPr>
+                <p14:xfrm>
+                  <a:off x="2404224" y="4905648"/>
+                  <a:ext cx="34200" cy="807480"/>
+                </p14:xfrm>
+              </p:contentPart>
+            </mc:Choice>
+            <mc:Fallback xmlns="">
+              <p:pic>
+                <p:nvPicPr>
+                  <p:cNvPr id="33" name="Ink 32">
+                    <a:extLst>
+                      <a:ext uri="{FF2B5EF4-FFF2-40B4-BE49-F238E27FC236}">
+                        <a16:creationId xmlns:a16="http://schemas.microsoft.com/office/drawing/2014/main" id="{59DDF7AF-5BF7-9D89-56C1-415AAD31535F}"/>
+                      </a:ext>
+                    </a:extLst>
+                  </p:cNvPr>
+                  <p:cNvPicPr/>
+                  <p:nvPr/>
+                </p:nvPicPr>
+                <p:blipFill>
+                  <a:blip r:embed="rId6"/>
+                  <a:stretch>
+                    <a:fillRect/>
+                  </a:stretch>
+                </p:blipFill>
+                <p:spPr>
+                  <a:xfrm>
+                    <a:off x="2386224" y="4887648"/>
+                    <a:ext cx="69840" cy="843120"/>
+                  </a:xfrm>
+                  <a:prstGeom prst="rect">
+                    <a:avLst/>
+                  </a:prstGeom>
+                </p:spPr>
+              </p:pic>
+            </mc:Fallback>
+          </mc:AlternateContent>
+          <mc:AlternateContent xmlns:mc="http://schemas.openxmlformats.org/markup-compatibility/2006" xmlns:p14="http://schemas.microsoft.com/office/powerpoint/2010/main">
+            <mc:Choice Requires="p14">
+              <p:contentPart p14:bwMode="auto" r:id="rId7">
+                <p14:nvContentPartPr>
+                  <p14:cNvPr id="34" name="Ink 33">
+                    <a:extLst>
+                      <a:ext uri="{FF2B5EF4-FFF2-40B4-BE49-F238E27FC236}">
+                        <a16:creationId xmlns:a16="http://schemas.microsoft.com/office/drawing/2014/main" id="{05C30469-965C-772A-D37C-D178DC2DFFE9}"/>
+                      </a:ext>
+                    </a:extLst>
+                  </p14:cNvPr>
+                  <p14:cNvContentPartPr/>
+                  <p14:nvPr/>
+                </p14:nvContentPartPr>
+                <p14:xfrm>
+                  <a:off x="2258424" y="4817808"/>
+                  <a:ext cx="400320" cy="367920"/>
+                </p14:xfrm>
+              </p:contentPart>
+            </mc:Choice>
+            <mc:Fallback xmlns="">
+              <p:pic>
+                <p:nvPicPr>
+                  <p:cNvPr id="34" name="Ink 33">
+                    <a:extLst>
+                      <a:ext uri="{FF2B5EF4-FFF2-40B4-BE49-F238E27FC236}">
+                        <a16:creationId xmlns:a16="http://schemas.microsoft.com/office/drawing/2014/main" id="{05C30469-965C-772A-D37C-D178DC2DFFE9}"/>
+                      </a:ext>
+                    </a:extLst>
+                  </p:cNvPr>
+                  <p:cNvPicPr/>
+                  <p:nvPr/>
+                </p:nvPicPr>
+                <p:blipFill>
+                  <a:blip r:embed="rId8"/>
+                  <a:stretch>
+                    <a:fillRect/>
+                  </a:stretch>
+                </p:blipFill>
+                <p:spPr>
+                  <a:xfrm>
+                    <a:off x="2240784" y="4800168"/>
+                    <a:ext cx="435960" cy="403560"/>
+                  </a:xfrm>
+                  <a:prstGeom prst="rect">
+                    <a:avLst/>
+                  </a:prstGeom>
+                </p:spPr>
+              </p:pic>
+            </mc:Fallback>
+          </mc:AlternateContent>
+        </p:grpSp>
+      </p:grpSp>
+      <p:grpSp>
+        <p:nvGrpSpPr>
+          <p:cNvPr id="46" name="Group 45">
+            <a:extLst>
+              <a:ext uri="{FF2B5EF4-FFF2-40B4-BE49-F238E27FC236}">
+                <a16:creationId xmlns:a16="http://schemas.microsoft.com/office/drawing/2014/main" id="{69DEC568-168A-7BA1-0572-75CFC17B69A3}"/>
+              </a:ext>
+            </a:extLst>
+          </p:cNvPr>
+          <p:cNvGrpSpPr/>
+          <p:nvPr/>
+        </p:nvGrpSpPr>
+        <p:grpSpPr>
+          <a:xfrm>
+            <a:off x="8656308" y="3643392"/>
+            <a:ext cx="2095200" cy="1656252"/>
+            <a:chOff x="8656308" y="4231116"/>
+            <a:chExt cx="2095200" cy="1656252"/>
+          </a:xfrm>
+        </p:grpSpPr>
+        <mc:AlternateContent xmlns:mc="http://schemas.openxmlformats.org/markup-compatibility/2006" xmlns:p14="http://schemas.microsoft.com/office/powerpoint/2010/main">
+          <mc:Choice Requires="p14">
+            <p:contentPart p14:bwMode="auto" r:id="rId9">
+              <p14:nvContentPartPr>
+                <p14:cNvPr id="12" name="Ink 11">
+                  <a:extLst>
+                    <a:ext uri="{FF2B5EF4-FFF2-40B4-BE49-F238E27FC236}">
+                      <a16:creationId xmlns:a16="http://schemas.microsoft.com/office/drawing/2014/main" id="{C7F376EC-D88B-6915-B734-9451B95165F8}"/>
+                    </a:ext>
+                  </a:extLst>
+                </p14:cNvPr>
+                <p14:cNvContentPartPr/>
+                <p14:nvPr/>
+              </p14:nvContentPartPr>
+              <p14:xfrm>
+                <a:off x="8656308" y="4231116"/>
+                <a:ext cx="2095200" cy="223560"/>
+              </p14:xfrm>
+            </p:contentPart>
+          </mc:Choice>
+          <mc:Fallback xmlns="">
+            <p:pic>
+              <p:nvPicPr>
+                <p:cNvPr id="12" name="Ink 11">
+                  <a:extLst>
+                    <a:ext uri="{FF2B5EF4-FFF2-40B4-BE49-F238E27FC236}">
+                      <a16:creationId xmlns:a16="http://schemas.microsoft.com/office/drawing/2014/main" id="{C7F376EC-D88B-6915-B734-9451B95165F8}"/>
+                    </a:ext>
+                  </a:extLst>
+                </p:cNvPr>
+                <p:cNvPicPr/>
+                <p:nvPr/>
+              </p:nvPicPr>
+              <p:blipFill>
+                <a:blip r:embed="rId4"/>
+                <a:stretch>
+                  <a:fillRect/>
+                </a:stretch>
+              </p:blipFill>
+              <p:spPr>
+                <a:xfrm>
+                  <a:off x="8638308" y="4213116"/>
+                  <a:ext cx="2130840" cy="259200"/>
+                </a:xfrm>
+                <a:prstGeom prst="rect">
+                  <a:avLst/>
+                </a:prstGeom>
+              </p:spPr>
+            </p:pic>
+          </mc:Fallback>
+        </mc:AlternateContent>
+        <p:grpSp>
+          <p:nvGrpSpPr>
+            <p:cNvPr id="16" name="Group 15">
+              <a:extLst>
+                <a:ext uri="{FF2B5EF4-FFF2-40B4-BE49-F238E27FC236}">
+                  <a16:creationId xmlns:a16="http://schemas.microsoft.com/office/drawing/2014/main" id="{2EA058A1-511D-E672-BE2D-45D9D4066D6D}"/>
+                </a:ext>
+              </a:extLst>
+            </p:cNvPr>
+            <p:cNvGrpSpPr/>
+            <p:nvPr/>
+          </p:nvGrpSpPr>
+          <p:grpSpPr>
+            <a:xfrm>
+              <a:off x="9107784" y="4687488"/>
+              <a:ext cx="1369800" cy="997920"/>
+              <a:chOff x="9107784" y="4687488"/>
+              <a:chExt cx="1369800" cy="997920"/>
+            </a:xfrm>
+          </p:grpSpPr>
+          <mc:AlternateContent xmlns:mc="http://schemas.openxmlformats.org/markup-compatibility/2006" xmlns:p14="http://schemas.microsoft.com/office/powerpoint/2010/main">
+            <mc:Choice Requires="p14">
+              <p:contentPart p14:bwMode="auto" r:id="rId10">
+                <p14:nvContentPartPr>
+                  <p14:cNvPr id="14" name="Ink 13">
+                    <a:extLst>
+                      <a:ext uri="{FF2B5EF4-FFF2-40B4-BE49-F238E27FC236}">
+                        <a16:creationId xmlns:a16="http://schemas.microsoft.com/office/drawing/2014/main" id="{0A6DEC9F-4144-7A2F-A675-2AAEC4AE2ABE}"/>
+                      </a:ext>
+                    </a:extLst>
+                  </p14:cNvPr>
+                  <p14:cNvContentPartPr/>
+                  <p14:nvPr/>
+                </p14:nvContentPartPr>
+                <p14:xfrm>
+                  <a:off x="9107784" y="4706928"/>
+                  <a:ext cx="1369800" cy="978480"/>
+                </p14:xfrm>
+              </p:contentPart>
+            </mc:Choice>
+            <mc:Fallback xmlns="">
+              <p:pic>
+                <p:nvPicPr>
+                  <p:cNvPr id="14" name="Ink 13">
+                    <a:extLst>
+                      <a:ext uri="{FF2B5EF4-FFF2-40B4-BE49-F238E27FC236}">
+                        <a16:creationId xmlns:a16="http://schemas.microsoft.com/office/drawing/2014/main" id="{0A6DEC9F-4144-7A2F-A675-2AAEC4AE2ABE}"/>
+                      </a:ext>
+                    </a:extLst>
+                  </p:cNvPr>
+                  <p:cNvPicPr/>
+                  <p:nvPr/>
+                </p:nvPicPr>
+                <p:blipFill>
+                  <a:blip r:embed="rId11"/>
+                  <a:stretch>
+                    <a:fillRect/>
+                  </a:stretch>
+                </p:blipFill>
+                <p:spPr>
+                  <a:xfrm>
+                    <a:off x="9090144" y="4689288"/>
+                    <a:ext cx="1405440" cy="1014120"/>
+                  </a:xfrm>
+                  <a:prstGeom prst="rect">
+                    <a:avLst/>
+                  </a:prstGeom>
+                </p:spPr>
+              </p:pic>
+            </mc:Fallback>
+          </mc:AlternateContent>
+          <mc:AlternateContent xmlns:mc="http://schemas.openxmlformats.org/markup-compatibility/2006" xmlns:p14="http://schemas.microsoft.com/office/powerpoint/2010/main">
+            <mc:Choice Requires="p14">
+              <p:contentPart p14:bwMode="auto" r:id="rId12">
+                <p14:nvContentPartPr>
+                  <p14:cNvPr id="15" name="Ink 14">
+                    <a:extLst>
+                      <a:ext uri="{FF2B5EF4-FFF2-40B4-BE49-F238E27FC236}">
+                        <a16:creationId xmlns:a16="http://schemas.microsoft.com/office/drawing/2014/main" id="{8EF86E93-0E7D-0EB2-C009-883A1793FA16}"/>
+                      </a:ext>
+                    </a:extLst>
+                  </p14:cNvPr>
+                  <p14:cNvContentPartPr/>
+                  <p14:nvPr/>
+                </p14:nvContentPartPr>
+                <p14:xfrm>
+                  <a:off x="9797904" y="4687488"/>
+                  <a:ext cx="177840" cy="307080"/>
+                </p14:xfrm>
+              </p:contentPart>
+            </mc:Choice>
+            <mc:Fallback xmlns="">
+              <p:pic>
+                <p:nvPicPr>
+                  <p:cNvPr id="15" name="Ink 14">
+                    <a:extLst>
+                      <a:ext uri="{FF2B5EF4-FFF2-40B4-BE49-F238E27FC236}">
+                        <a16:creationId xmlns:a16="http://schemas.microsoft.com/office/drawing/2014/main" id="{8EF86E93-0E7D-0EB2-C009-883A1793FA16}"/>
+                      </a:ext>
+                    </a:extLst>
+                  </p:cNvPr>
+                  <p:cNvPicPr/>
+                  <p:nvPr/>
+                </p:nvPicPr>
+                <p:blipFill>
+                  <a:blip r:embed="rId13"/>
+                  <a:stretch>
+                    <a:fillRect/>
+                  </a:stretch>
+                </p:blipFill>
+                <p:spPr>
+                  <a:xfrm>
+                    <a:off x="9779904" y="4669848"/>
+                    <a:ext cx="213480" cy="342720"/>
+                  </a:xfrm>
+                  <a:prstGeom prst="rect">
+                    <a:avLst/>
+                  </a:prstGeom>
+                </p:spPr>
+              </p:pic>
+            </mc:Fallback>
+          </mc:AlternateContent>
+        </p:grpSp>
+        <p:grpSp>
+          <p:nvGrpSpPr>
+            <p:cNvPr id="39" name="Group 38">
+              <a:extLst>
+                <a:ext uri="{FF2B5EF4-FFF2-40B4-BE49-F238E27FC236}">
+                  <a16:creationId xmlns:a16="http://schemas.microsoft.com/office/drawing/2014/main" id="{D4C72199-28F1-01E0-DD45-263503647CDC}"/>
+                </a:ext>
+              </a:extLst>
+            </p:cNvPr>
+            <p:cNvGrpSpPr/>
+            <p:nvPr/>
+          </p:nvGrpSpPr>
+          <p:grpSpPr>
+            <a:xfrm>
+              <a:off x="9399984" y="4992048"/>
+              <a:ext cx="400320" cy="895320"/>
+              <a:chOff x="2258424" y="4817808"/>
+              <a:chExt cx="400320" cy="895320"/>
+            </a:xfrm>
+          </p:grpSpPr>
+          <mc:AlternateContent xmlns:mc="http://schemas.openxmlformats.org/markup-compatibility/2006" xmlns:p14="http://schemas.microsoft.com/office/powerpoint/2010/main">
+            <mc:Choice Requires="p14">
+              <p:contentPart p14:bwMode="auto" r:id="rId14">
+                <p14:nvContentPartPr>
+                  <p14:cNvPr id="40" name="Ink 39">
+                    <a:extLst>
+                      <a:ext uri="{FF2B5EF4-FFF2-40B4-BE49-F238E27FC236}">
+                        <a16:creationId xmlns:a16="http://schemas.microsoft.com/office/drawing/2014/main" id="{9E27D847-382F-DAE4-6748-383264C14F96}"/>
+                      </a:ext>
+                    </a:extLst>
+                  </p14:cNvPr>
+                  <p14:cNvContentPartPr/>
+                  <p14:nvPr/>
+                </p14:nvContentPartPr>
+                <p14:xfrm>
+                  <a:off x="2404224" y="4905648"/>
+                  <a:ext cx="34200" cy="807480"/>
+                </p14:xfrm>
+              </p:contentPart>
+            </mc:Choice>
+            <mc:Fallback xmlns="">
+              <p:pic>
+                <p:nvPicPr>
+                  <p:cNvPr id="40" name="Ink 39">
+                    <a:extLst>
+                      <a:ext uri="{FF2B5EF4-FFF2-40B4-BE49-F238E27FC236}">
+                        <a16:creationId xmlns:a16="http://schemas.microsoft.com/office/drawing/2014/main" id="{9E27D847-382F-DAE4-6748-383264C14F96}"/>
+                      </a:ext>
+                    </a:extLst>
+                  </p:cNvPr>
+                  <p:cNvPicPr/>
+                  <p:nvPr/>
+                </p:nvPicPr>
+                <p:blipFill>
+                  <a:blip r:embed="rId6"/>
+                  <a:stretch>
+                    <a:fillRect/>
+                  </a:stretch>
+                </p:blipFill>
+                <p:spPr>
+                  <a:xfrm>
+                    <a:off x="2386224" y="4887648"/>
+                    <a:ext cx="69840" cy="843120"/>
+                  </a:xfrm>
+                  <a:prstGeom prst="rect">
+                    <a:avLst/>
+                  </a:prstGeom>
+                </p:spPr>
+              </p:pic>
+            </mc:Fallback>
+          </mc:AlternateContent>
+          <mc:AlternateContent xmlns:mc="http://schemas.openxmlformats.org/markup-compatibility/2006" xmlns:p14="http://schemas.microsoft.com/office/powerpoint/2010/main">
+            <mc:Choice Requires="p14">
+              <p:contentPart p14:bwMode="auto" r:id="rId15">
+                <p14:nvContentPartPr>
+                  <p14:cNvPr id="41" name="Ink 40">
+                    <a:extLst>
+                      <a:ext uri="{FF2B5EF4-FFF2-40B4-BE49-F238E27FC236}">
+                        <a16:creationId xmlns:a16="http://schemas.microsoft.com/office/drawing/2014/main" id="{2BD54CD0-DFB3-8816-ACB8-8ED8C4DDB567}"/>
+                      </a:ext>
+                    </a:extLst>
+                  </p14:cNvPr>
+                  <p14:cNvContentPartPr/>
+                  <p14:nvPr/>
+                </p14:nvContentPartPr>
+                <p14:xfrm>
+                  <a:off x="2258424" y="4817808"/>
+                  <a:ext cx="400320" cy="367920"/>
+                </p14:xfrm>
+              </p:contentPart>
+            </mc:Choice>
+            <mc:Fallback xmlns="">
+              <p:pic>
+                <p:nvPicPr>
+                  <p:cNvPr id="41" name="Ink 40">
+                    <a:extLst>
+                      <a:ext uri="{FF2B5EF4-FFF2-40B4-BE49-F238E27FC236}">
+                        <a16:creationId xmlns:a16="http://schemas.microsoft.com/office/drawing/2014/main" id="{2BD54CD0-DFB3-8816-ACB8-8ED8C4DDB567}"/>
+                      </a:ext>
+                    </a:extLst>
+                  </p:cNvPr>
+                  <p:cNvPicPr/>
+                  <p:nvPr/>
+                </p:nvPicPr>
+                <p:blipFill>
+                  <a:blip r:embed="rId8"/>
+                  <a:stretch>
+                    <a:fillRect/>
+                  </a:stretch>
+                </p:blipFill>
+                <p:spPr>
+                  <a:xfrm>
+                    <a:off x="2240784" y="4800168"/>
+                    <a:ext cx="435960" cy="403560"/>
+                  </a:xfrm>
+                  <a:prstGeom prst="rect">
+                    <a:avLst/>
+                  </a:prstGeom>
+                </p:spPr>
+              </p:pic>
+            </mc:Fallback>
+          </mc:AlternateContent>
+        </p:grpSp>
+      </p:grpSp>
+      <p:grpSp>
+        <p:nvGrpSpPr>
+          <p:cNvPr id="45" name="Group 44">
+            <a:extLst>
+              <a:ext uri="{FF2B5EF4-FFF2-40B4-BE49-F238E27FC236}">
+                <a16:creationId xmlns:a16="http://schemas.microsoft.com/office/drawing/2014/main" id="{8B42C2C8-8BF4-A372-ACF5-0A80E0E5D405}"/>
+              </a:ext>
+            </a:extLst>
+          </p:cNvPr>
+          <p:cNvGrpSpPr/>
+          <p:nvPr/>
+        </p:nvGrpSpPr>
+        <p:grpSpPr>
+          <a:xfrm>
+            <a:off x="5048400" y="3634248"/>
+            <a:ext cx="2095200" cy="1535604"/>
+            <a:chOff x="5048400" y="4231116"/>
+            <a:chExt cx="2095200" cy="1535604"/>
+          </a:xfrm>
+        </p:grpSpPr>
+        <mc:AlternateContent xmlns:mc="http://schemas.openxmlformats.org/markup-compatibility/2006" xmlns:p14="http://schemas.microsoft.com/office/powerpoint/2010/main">
+          <mc:Choice Requires="p14">
+            <p:contentPart p14:bwMode="auto" r:id="rId16">
+              <p14:nvContentPartPr>
+                <p14:cNvPr id="11" name="Ink 10">
+                  <a:extLst>
+                    <a:ext uri="{FF2B5EF4-FFF2-40B4-BE49-F238E27FC236}">
+                      <a16:creationId xmlns:a16="http://schemas.microsoft.com/office/drawing/2014/main" id="{A578C256-DEEB-8885-C4DD-BAEDFEE5328C}"/>
+                    </a:ext>
+                  </a:extLst>
+                </p14:cNvPr>
+                <p14:cNvContentPartPr/>
+                <p14:nvPr/>
+              </p14:nvContentPartPr>
+              <p14:xfrm>
+                <a:off x="5048400" y="4231116"/>
+                <a:ext cx="2095200" cy="223560"/>
+              </p14:xfrm>
+            </p:contentPart>
+          </mc:Choice>
+          <mc:Fallback xmlns="">
+            <p:pic>
+              <p:nvPicPr>
+                <p:cNvPr id="11" name="Ink 10">
+                  <a:extLst>
+                    <a:ext uri="{FF2B5EF4-FFF2-40B4-BE49-F238E27FC236}">
+                      <a16:creationId xmlns:a16="http://schemas.microsoft.com/office/drawing/2014/main" id="{A578C256-DEEB-8885-C4DD-BAEDFEE5328C}"/>
+                    </a:ext>
+                  </a:extLst>
+                </p:cNvPr>
+                <p:cNvPicPr/>
+                <p:nvPr/>
+              </p:nvPicPr>
+              <p:blipFill>
+                <a:blip r:embed="rId4"/>
+                <a:stretch>
+                  <a:fillRect/>
+                </a:stretch>
+              </p:blipFill>
+              <p:spPr>
+                <a:xfrm>
+                  <a:off x="5030400" y="4213116"/>
+                  <a:ext cx="2130840" cy="259200"/>
+                </a:xfrm>
+                <a:prstGeom prst="rect">
+                  <a:avLst/>
+                </a:prstGeom>
+              </p:spPr>
+            </p:pic>
+          </mc:Fallback>
+        </mc:AlternateContent>
+        <mc:AlternateContent xmlns:mc="http://schemas.openxmlformats.org/markup-compatibility/2006" xmlns:p14="http://schemas.microsoft.com/office/powerpoint/2010/main">
+          <mc:Choice Requires="p14">
+            <p:contentPart p14:bwMode="auto" r:id="rId17">
+              <p14:nvContentPartPr>
+                <p14:cNvPr id="13" name="Ink 12">
+                  <a:extLst>
+                    <a:ext uri="{FF2B5EF4-FFF2-40B4-BE49-F238E27FC236}">
+                      <a16:creationId xmlns:a16="http://schemas.microsoft.com/office/drawing/2014/main" id="{F9E6BEF6-96C6-3E9D-2F1B-B08AE3B665F7}"/>
+                    </a:ext>
+                  </a:extLst>
+                </p14:cNvPr>
+                <p14:cNvContentPartPr/>
+                <p14:nvPr/>
+              </p14:nvContentPartPr>
+              <p14:xfrm>
+                <a:off x="5273784" y="4992048"/>
+                <a:ext cx="1863720" cy="430560"/>
+              </p14:xfrm>
+            </p:contentPart>
+          </mc:Choice>
+          <mc:Fallback xmlns="">
+            <p:pic>
+              <p:nvPicPr>
+                <p:cNvPr id="13" name="Ink 12">
+                  <a:extLst>
+                    <a:ext uri="{FF2B5EF4-FFF2-40B4-BE49-F238E27FC236}">
+                      <a16:creationId xmlns:a16="http://schemas.microsoft.com/office/drawing/2014/main" id="{F9E6BEF6-96C6-3E9D-2F1B-B08AE3B665F7}"/>
+                    </a:ext>
+                  </a:extLst>
+                </p:cNvPr>
+                <p:cNvPicPr/>
+                <p:nvPr/>
+              </p:nvPicPr>
+              <p:blipFill>
+                <a:blip r:embed="rId18"/>
+                <a:stretch>
+                  <a:fillRect/>
+                </a:stretch>
+              </p:blipFill>
+              <p:spPr>
+                <a:xfrm>
+                  <a:off x="5255784" y="4974048"/>
+                  <a:ext cx="1899360" cy="466200"/>
+                </a:xfrm>
+                <a:prstGeom prst="rect">
+                  <a:avLst/>
+                </a:prstGeom>
+              </p:spPr>
+            </p:pic>
+          </mc:Fallback>
+        </mc:AlternateContent>
+        <p:grpSp>
+          <p:nvGrpSpPr>
+            <p:cNvPr id="42" name="Group 41">
+              <a:extLst>
+                <a:ext uri="{FF2B5EF4-FFF2-40B4-BE49-F238E27FC236}">
+                  <a16:creationId xmlns:a16="http://schemas.microsoft.com/office/drawing/2014/main" id="{CE3FFF03-827D-85E6-157A-A21F6BDC3307}"/>
+                </a:ext>
+              </a:extLst>
+            </p:cNvPr>
+            <p:cNvGrpSpPr/>
+            <p:nvPr/>
+          </p:nvGrpSpPr>
+          <p:grpSpPr>
+            <a:xfrm>
+              <a:off x="5936064" y="4871400"/>
+              <a:ext cx="400320" cy="895320"/>
+              <a:chOff x="2258424" y="4817808"/>
+              <a:chExt cx="400320" cy="895320"/>
+            </a:xfrm>
+          </p:grpSpPr>
+          <mc:AlternateContent xmlns:mc="http://schemas.openxmlformats.org/markup-compatibility/2006" xmlns:p14="http://schemas.microsoft.com/office/powerpoint/2010/main">
+            <mc:Choice Requires="p14">
+              <p:contentPart p14:bwMode="auto" r:id="rId19">
+                <p14:nvContentPartPr>
+                  <p14:cNvPr id="43" name="Ink 42">
+                    <a:extLst>
+                      <a:ext uri="{FF2B5EF4-FFF2-40B4-BE49-F238E27FC236}">
+                        <a16:creationId xmlns:a16="http://schemas.microsoft.com/office/drawing/2014/main" id="{63F1BD97-8BD8-ED78-7ACF-B705B8B7D055}"/>
+                      </a:ext>
+                    </a:extLst>
+                  </p14:cNvPr>
+                  <p14:cNvContentPartPr/>
+                  <p14:nvPr/>
+                </p14:nvContentPartPr>
+                <p14:xfrm>
+                  <a:off x="2404224" y="4905648"/>
+                  <a:ext cx="34200" cy="807480"/>
+                </p14:xfrm>
+              </p:contentPart>
+            </mc:Choice>
+            <mc:Fallback xmlns="">
+              <p:pic>
+                <p:nvPicPr>
+                  <p:cNvPr id="43" name="Ink 42">
+                    <a:extLst>
+                      <a:ext uri="{FF2B5EF4-FFF2-40B4-BE49-F238E27FC236}">
+                        <a16:creationId xmlns:a16="http://schemas.microsoft.com/office/drawing/2014/main" id="{63F1BD97-8BD8-ED78-7ACF-B705B8B7D055}"/>
+                      </a:ext>
+                    </a:extLst>
+                  </p:cNvPr>
+                  <p:cNvPicPr/>
+                  <p:nvPr/>
+                </p:nvPicPr>
+                <p:blipFill>
+                  <a:blip r:embed="rId6"/>
+                  <a:stretch>
+                    <a:fillRect/>
+                  </a:stretch>
+                </p:blipFill>
+                <p:spPr>
+                  <a:xfrm>
+                    <a:off x="2386224" y="4887648"/>
+                    <a:ext cx="69840" cy="843120"/>
+                  </a:xfrm>
+                  <a:prstGeom prst="rect">
+                    <a:avLst/>
+                  </a:prstGeom>
+                </p:spPr>
+              </p:pic>
+            </mc:Fallback>
+          </mc:AlternateContent>
+          <mc:AlternateContent xmlns:mc="http://schemas.openxmlformats.org/markup-compatibility/2006" xmlns:p14="http://schemas.microsoft.com/office/powerpoint/2010/main">
+            <mc:Choice Requires="p14">
+              <p:contentPart p14:bwMode="auto" r:id="rId20">
+                <p14:nvContentPartPr>
+                  <p14:cNvPr id="44" name="Ink 43">
+                    <a:extLst>
+                      <a:ext uri="{FF2B5EF4-FFF2-40B4-BE49-F238E27FC236}">
+                        <a16:creationId xmlns:a16="http://schemas.microsoft.com/office/drawing/2014/main" id="{B44B10D1-DC49-F07C-5709-39370C270719}"/>
+                      </a:ext>
+                    </a:extLst>
+                  </p14:cNvPr>
+                  <p14:cNvContentPartPr/>
+                  <p14:nvPr/>
+                </p14:nvContentPartPr>
+                <p14:xfrm>
+                  <a:off x="2258424" y="4817808"/>
+                  <a:ext cx="400320" cy="367920"/>
+                </p14:xfrm>
+              </p:contentPart>
+            </mc:Choice>
+            <mc:Fallback xmlns="">
+              <p:pic>
+                <p:nvPicPr>
+                  <p:cNvPr id="44" name="Ink 43">
+                    <a:extLst>
+                      <a:ext uri="{FF2B5EF4-FFF2-40B4-BE49-F238E27FC236}">
+                        <a16:creationId xmlns:a16="http://schemas.microsoft.com/office/drawing/2014/main" id="{B44B10D1-DC49-F07C-5709-39370C270719}"/>
+                      </a:ext>
+                    </a:extLst>
+                  </p:cNvPr>
+                  <p:cNvPicPr/>
+                  <p:nvPr/>
+                </p:nvPicPr>
+                <p:blipFill>
+                  <a:blip r:embed="rId8"/>
+                  <a:stretch>
+                    <a:fillRect/>
+                  </a:stretch>
+                </p:blipFill>
+                <p:spPr>
+                  <a:xfrm>
+                    <a:off x="2240784" y="4800168"/>
+                    <a:ext cx="435960" cy="403560"/>
+                  </a:xfrm>
+                  <a:prstGeom prst="rect">
+                    <a:avLst/>
+                  </a:prstGeom>
+                </p:spPr>
+              </p:pic>
+            </mc:Fallback>
+          </mc:AlternateContent>
+        </p:grpSp>
+      </p:grpSp>
+      <p:sp>
+        <p:nvSpPr>
+          <p:cNvPr id="48" name="TextBox 47">
+            <a:extLst>
+              <a:ext uri="{FF2B5EF4-FFF2-40B4-BE49-F238E27FC236}">
+                <a16:creationId xmlns:a16="http://schemas.microsoft.com/office/drawing/2014/main" id="{C11A5924-53E8-4685-97F4-FE25E064CCC5}"/>
+              </a:ext>
+            </a:extLst>
+          </p:cNvPr>
+          <p:cNvSpPr txBox="1"/>
+          <p:nvPr/>
+        </p:nvSpPr>
+        <p:spPr>
+          <a:xfrm>
+            <a:off x="1221959" y="5708044"/>
+            <a:ext cx="2737466" cy="646331"/>
+          </a:xfrm>
+          <a:prstGeom prst="rect">
+            <a:avLst/>
+          </a:prstGeom>
+          <a:noFill/>
+        </p:spPr>
+        <p:txBody>
+          <a:bodyPr wrap="square">
+            <a:spAutoFit/>
+          </a:bodyPr>
+          <a:lstStyle/>
+          <a:p>
+            <a:pPr algn="ctr"/>
+            <a:r>
+              <a:rPr lang="en-CA" i="1" dirty="0">
+                <a:solidFill>
+                  <a:srgbClr val="000000"/>
+                </a:solidFill>
+                <a:latin typeface="Georgia" panose="02040502050405020303" pitchFamily="18" charset="0"/>
+                <a:cs typeface="Gill Sans" panose="020B0502020104020203" pitchFamily="34" charset="-79"/>
+              </a:rPr>
+              <a:t>solubility decrease with increasing SST</a:t>
+            </a:r>
+            <a:endParaRPr lang="en-US" i="1" dirty="0"/>
+          </a:p>
+        </p:txBody>
+      </p:sp>
+      <p:sp>
+        <p:nvSpPr>
+          <p:cNvPr id="49" name="TextBox 48">
+            <a:extLst>
+              <a:ext uri="{FF2B5EF4-FFF2-40B4-BE49-F238E27FC236}">
+                <a16:creationId xmlns:a16="http://schemas.microsoft.com/office/drawing/2014/main" id="{21D4564A-2716-175C-053C-346DD4B1A31A}"/>
+              </a:ext>
+            </a:extLst>
+          </p:cNvPr>
+          <p:cNvSpPr txBox="1"/>
+          <p:nvPr/>
+        </p:nvSpPr>
+        <p:spPr>
+          <a:xfrm>
+            <a:off x="4727267" y="5569545"/>
+            <a:ext cx="2864628" cy="923330"/>
+          </a:xfrm>
+          <a:prstGeom prst="rect">
+            <a:avLst/>
+          </a:prstGeom>
+          <a:noFill/>
+        </p:spPr>
+        <p:txBody>
+          <a:bodyPr wrap="square">
+            <a:spAutoFit/>
+          </a:bodyPr>
+          <a:lstStyle/>
+          <a:p>
+            <a:pPr algn="ctr"/>
+            <a:r>
+              <a:rPr lang="en-CA" i="1" dirty="0">
+                <a:solidFill>
+                  <a:srgbClr val="000000"/>
+                </a:solidFill>
+                <a:latin typeface="Georgia" panose="02040502050405020303" pitchFamily="18" charset="0"/>
+                <a:cs typeface="Gill Sans" panose="020B0502020104020203" pitchFamily="34" charset="-79"/>
+              </a:rPr>
+              <a:t>MLD deepening brings up </a:t>
+            </a:r>
+          </a:p>
+          <a:p>
+            <a:pPr algn="ctr"/>
+            <a:r>
+              <a:rPr lang="en-CA" i="1" dirty="0">
+                <a:solidFill>
+                  <a:srgbClr val="000000"/>
+                </a:solidFill>
+                <a:latin typeface="Georgia" panose="02040502050405020303" pitchFamily="18" charset="0"/>
+                <a:cs typeface="Gill Sans" panose="020B0502020104020203" pitchFamily="34" charset="-79"/>
+              </a:rPr>
+              <a:t>high-carbon water </a:t>
+            </a:r>
+          </a:p>
+          <a:p>
+            <a:pPr algn="ctr"/>
+            <a:r>
+              <a:rPr lang="en-CA" i="1" dirty="0">
+                <a:solidFill>
+                  <a:srgbClr val="000000"/>
+                </a:solidFill>
+                <a:latin typeface="Georgia" panose="02040502050405020303" pitchFamily="18" charset="0"/>
+                <a:cs typeface="Gill Sans" panose="020B0502020104020203" pitchFamily="34" charset="-79"/>
+              </a:rPr>
+              <a:t>and nutrients</a:t>
+            </a:r>
+            <a:endParaRPr lang="en-US" i="1" dirty="0"/>
+          </a:p>
+        </p:txBody>
+      </p:sp>
+      <p:sp>
+        <p:nvSpPr>
+          <p:cNvPr id="50" name="TextBox 49">
+            <a:extLst>
+              <a:ext uri="{FF2B5EF4-FFF2-40B4-BE49-F238E27FC236}">
+                <a16:creationId xmlns:a16="http://schemas.microsoft.com/office/drawing/2014/main" id="{7DE2811E-C8F7-AB6E-0C7F-BDAE2118EBB0}"/>
+              </a:ext>
+            </a:extLst>
+          </p:cNvPr>
+          <p:cNvSpPr txBox="1"/>
+          <p:nvPr/>
+        </p:nvSpPr>
+        <p:spPr>
+          <a:xfrm>
+            <a:off x="8281235" y="5569545"/>
+            <a:ext cx="2737466" cy="923330"/>
+          </a:xfrm>
+          <a:prstGeom prst="rect">
+            <a:avLst/>
+          </a:prstGeom>
+          <a:noFill/>
+        </p:spPr>
+        <p:txBody>
+          <a:bodyPr wrap="square">
+            <a:spAutoFit/>
+          </a:bodyPr>
+          <a:lstStyle/>
+          <a:p>
+            <a:pPr algn="ctr"/>
+            <a:r>
+              <a:rPr lang="en-CA" i="1" dirty="0">
+                <a:solidFill>
+                  <a:srgbClr val="000000"/>
+                </a:solidFill>
+                <a:latin typeface="Georgia" panose="02040502050405020303" pitchFamily="18" charset="0"/>
+                <a:cs typeface="Gill Sans" panose="020B0502020104020203" pitchFamily="34" charset="-79"/>
+              </a:rPr>
+              <a:t>enhanced OT brings up high-carbon water </a:t>
+            </a:r>
+          </a:p>
+          <a:p>
+            <a:pPr algn="ctr"/>
+            <a:r>
+              <a:rPr lang="en-CA" i="1" dirty="0">
+                <a:solidFill>
+                  <a:srgbClr val="000000"/>
+                </a:solidFill>
+                <a:latin typeface="Georgia" panose="02040502050405020303" pitchFamily="18" charset="0"/>
+                <a:cs typeface="Gill Sans" panose="020B0502020104020203" pitchFamily="34" charset="-79"/>
+              </a:rPr>
+              <a:t>and nutrients</a:t>
+            </a:r>
+            <a:endParaRPr lang="en-US" i="1" dirty="0"/>
+          </a:p>
+        </p:txBody>
+      </p:sp>
     </p:spTree>
     <p:extLst>
       <p:ext uri="{BB962C8B-B14F-4D97-AF65-F5344CB8AC3E}">
-        <p14:creationId xmlns:p14="http://schemas.microsoft.com/office/powerpoint/2010/main" val="3648285883"/>
+        <p14:creationId xmlns:p14="http://schemas.microsoft.com/office/powerpoint/2010/main" val="2679288869"/>
       </p:ext>
     </p:extLst>
   </p:cSld>
@@ -7299,7 +8352,7 @@
                 </a:solidFill>
                 <a:latin typeface="Gill Sans MT" panose="020B0502020104020203" pitchFamily="34" charset="77"/>
               </a:rPr>
-              <a:t>Ozone and GHG effect </a:t>
+              <a:t>Can we learn from the UKESM1 winds?</a:t>
             </a:r>
             <a:br>
               <a:rPr lang="en-US" sz="3600" dirty="0">
@@ -7316,7 +8369,7 @@
                 </a:solidFill>
                 <a:latin typeface="Gill Sans MT" panose="020B0502020104020203" pitchFamily="34" charset="77"/>
               </a:rPr>
-              <a:t>on wind speed,1950-2100</a:t>
+              <a:t>Yes, they perform well against the ERA5 reanalysis</a:t>
             </a:r>
             <a:endParaRPr lang="en-US" sz="3600" dirty="0"/>
           </a:p>
@@ -7324,40 +8377,10 @@
       </p:sp>
       <p:pic>
         <p:nvPicPr>
-          <p:cNvPr id="5" name="Picture 4">
-            <a:extLst>
-              <a:ext uri="{FF2B5EF4-FFF2-40B4-BE49-F238E27FC236}">
-                <a16:creationId xmlns:a16="http://schemas.microsoft.com/office/drawing/2014/main" id="{5B8BAEB7-A52C-4144-3033-8062466DD667}"/>
-              </a:ext>
-            </a:extLst>
-          </p:cNvPr>
-          <p:cNvPicPr>
-            <a:picLocks noChangeAspect="1"/>
-          </p:cNvPicPr>
-          <p:nvPr/>
-        </p:nvPicPr>
-        <p:blipFill>
-          <a:blip r:embed="rId3"/>
-          <a:stretch>
-            <a:fillRect/>
-          </a:stretch>
-        </p:blipFill>
-        <p:spPr>
-          <a:xfrm>
-            <a:off x="186553" y="137161"/>
-            <a:ext cx="2739242" cy="1325563"/>
-          </a:xfrm>
-          <a:prstGeom prst="rect">
-            <a:avLst/>
-          </a:prstGeom>
-        </p:spPr>
-      </p:pic>
-      <p:pic>
-        <p:nvPicPr>
-          <p:cNvPr id="2054" name="Picture 6">
-            <a:extLst>
-              <a:ext uri="{FF2B5EF4-FFF2-40B4-BE49-F238E27FC236}">
-                <a16:creationId xmlns:a16="http://schemas.microsoft.com/office/drawing/2014/main" id="{879B3DED-4E25-B83C-6FB8-009748D81AAF}"/>
+          <p:cNvPr id="1026" name="Picture 2">
+            <a:extLst>
+              <a:ext uri="{FF2B5EF4-FFF2-40B4-BE49-F238E27FC236}">
+                <a16:creationId xmlns:a16="http://schemas.microsoft.com/office/drawing/2014/main" id="{FC48E6D8-05D0-1989-E531-BBB21872DB4F}"/>
               </a:ext>
             </a:extLst>
           </p:cNvPr>
@@ -7367,7 +8390,7 @@
           <p:nvPr/>
         </p:nvPicPr>
         <p:blipFill>
-          <a:blip r:embed="rId4">
+          <a:blip r:embed="rId3">
             <a:extLst>
               <a:ext uri="{28A0092B-C50C-407E-A947-70E740481C1C}">
                 <a14:useLocalDpi xmlns:a14="http://schemas.microsoft.com/office/drawing/2010/main" val="0"/>
@@ -7381,8 +8404,8 @@
         </p:blipFill>
         <p:spPr bwMode="auto">
           <a:xfrm>
-            <a:off x="0" y="2174685"/>
-            <a:ext cx="12192000" cy="3201987"/>
+            <a:off x="1816045" y="1690688"/>
+            <a:ext cx="2054607" cy="4802187"/>
           </a:xfrm>
           <a:prstGeom prst="rect">
             <a:avLst/>
@@ -7399,53 +8422,102 @@
           </a:extLst>
         </p:spPr>
       </p:pic>
-      <p:sp>
-        <p:nvSpPr>
-          <p:cNvPr id="7" name="TextBox 6">
-            <a:extLst>
-              <a:ext uri="{FF2B5EF4-FFF2-40B4-BE49-F238E27FC236}">
-                <a16:creationId xmlns:a16="http://schemas.microsoft.com/office/drawing/2014/main" id="{0FE620A4-AB2D-79FB-6A25-45FFB679DB5E}"/>
-              </a:ext>
-            </a:extLst>
-          </p:cNvPr>
-          <p:cNvSpPr txBox="1"/>
+      <p:pic>
+        <p:nvPicPr>
+          <p:cNvPr id="1028" name="Picture 4">
+            <a:extLst>
+              <a:ext uri="{FF2B5EF4-FFF2-40B4-BE49-F238E27FC236}">
+                <a16:creationId xmlns:a16="http://schemas.microsoft.com/office/drawing/2014/main" id="{4162DECD-2F1D-4403-0BEB-804AAE298B40}"/>
+              </a:ext>
+            </a:extLst>
+          </p:cNvPr>
+          <p:cNvPicPr>
+            <a:picLocks noChangeAspect="1" noChangeArrowheads="1"/>
+          </p:cNvPicPr>
           <p:nvPr/>
-        </p:nvSpPr>
-        <p:spPr>
+        </p:nvPicPr>
+        <p:blipFill>
+          <a:blip r:embed="rId4">
+            <a:extLst>
+              <a:ext uri="{28A0092B-C50C-407E-A947-70E740481C1C}">
+                <a14:useLocalDpi xmlns:a14="http://schemas.microsoft.com/office/drawing/2010/main" val="0"/>
+              </a:ext>
+            </a:extLst>
+          </a:blip>
+          <a:srcRect/>
+          <a:stretch>
+            <a:fillRect/>
+          </a:stretch>
+        </p:blipFill>
+        <p:spPr bwMode="auto">
           <a:xfrm>
-            <a:off x="9213815" y="6308209"/>
-            <a:ext cx="2737466" cy="369332"/>
+            <a:off x="4145911" y="1690688"/>
+            <a:ext cx="2797929" cy="4557712"/>
           </a:xfrm>
           <a:prstGeom prst="rect">
             <a:avLst/>
           </a:prstGeom>
           <a:noFill/>
+          <a:extLst>
+            <a:ext uri="{909E8E84-426E-40DD-AFC4-6F175D3DCCD1}">
+              <a14:hiddenFill xmlns:a14="http://schemas.microsoft.com/office/drawing/2010/main">
+                <a:solidFill>
+                  <a:srgbClr val="FFFFFF"/>
+                </a:solidFill>
+              </a14:hiddenFill>
+            </a:ext>
+          </a:extLst>
         </p:spPr>
-        <p:txBody>
-          <a:bodyPr wrap="square">
-            <a:spAutoFit/>
-          </a:bodyPr>
-          <a:lstStyle/>
-          <a:p>
-            <a:pPr algn="ctr"/>
-            <a:r>
-              <a:rPr lang="en-CA" i="1" dirty="0">
-                <a:solidFill>
-                  <a:srgbClr val="000000"/>
-                </a:solidFill>
-                <a:latin typeface="Georgia" panose="02040502050405020303" pitchFamily="18" charset="0"/>
-                <a:cs typeface="Gill Sans" panose="020B0502020104020203" pitchFamily="34" charset="-79"/>
-              </a:rPr>
-              <a:t>austral summer, DJF</a:t>
-            </a:r>
-            <a:endParaRPr lang="en-US" i="1" dirty="0"/>
-          </a:p>
-        </p:txBody>
-      </p:sp>
+      </p:pic>
+      <p:pic>
+        <p:nvPicPr>
+          <p:cNvPr id="3" name="Picture 2">
+            <a:extLst>
+              <a:ext uri="{FF2B5EF4-FFF2-40B4-BE49-F238E27FC236}">
+                <a16:creationId xmlns:a16="http://schemas.microsoft.com/office/drawing/2014/main" id="{2E0F8616-0418-6661-8111-B6144B7FDBC0}"/>
+              </a:ext>
+            </a:extLst>
+          </p:cNvPr>
+          <p:cNvPicPr>
+            <a:picLocks noChangeAspect="1" noChangeArrowheads="1"/>
+          </p:cNvPicPr>
+          <p:nvPr/>
+        </p:nvPicPr>
+        <p:blipFill rotWithShape="1">
+          <a:blip r:embed="rId5">
+            <a:extLst>
+              <a:ext uri="{28A0092B-C50C-407E-A947-70E740481C1C}">
+                <a14:useLocalDpi xmlns:a14="http://schemas.microsoft.com/office/drawing/2010/main" val="0"/>
+              </a:ext>
+            </a:extLst>
+          </a:blip>
+          <a:srcRect r="47887" b="75347"/>
+          <a:stretch/>
+        </p:blipFill>
+        <p:spPr bwMode="auto">
+          <a:xfrm>
+            <a:off x="7219100" y="2267712"/>
+            <a:ext cx="4479209" cy="2706624"/>
+          </a:xfrm>
+          <a:prstGeom prst="rect">
+            <a:avLst/>
+          </a:prstGeom>
+          <a:noFill/>
+          <a:extLst>
+            <a:ext uri="{909E8E84-426E-40DD-AFC4-6F175D3DCCD1}">
+              <a14:hiddenFill xmlns:a14="http://schemas.microsoft.com/office/drawing/2010/main">
+                <a:solidFill>
+                  <a:srgbClr val="FFFFFF"/>
+                </a:solidFill>
+              </a14:hiddenFill>
+            </a:ext>
+          </a:extLst>
+        </p:spPr>
+      </p:pic>
     </p:spTree>
     <p:extLst>
       <p:ext uri="{BB962C8B-B14F-4D97-AF65-F5344CB8AC3E}">
-        <p14:creationId xmlns:p14="http://schemas.microsoft.com/office/powerpoint/2010/main" val="514097413"/>
+        <p14:creationId xmlns:p14="http://schemas.microsoft.com/office/powerpoint/2010/main" val="3648285883"/>
       </p:ext>
     </p:extLst>
   </p:cSld>
@@ -7585,7 +8657,7 @@
         </p:blipFill>
         <p:spPr bwMode="auto">
           <a:xfrm>
-            <a:off x="0" y="2156397"/>
+            <a:off x="0" y="2174685"/>
             <a:ext cx="12192000" cy="3201987"/>
           </a:xfrm>
           <a:prstGeom prst="rect">
@@ -7603,59 +8675,12 @@
           </a:extLst>
         </p:spPr>
       </p:pic>
-      <p:pic>
-        <p:nvPicPr>
-          <p:cNvPr id="6" name="Picture 4">
-            <a:extLst>
-              <a:ext uri="{FF2B5EF4-FFF2-40B4-BE49-F238E27FC236}">
-                <a16:creationId xmlns:a16="http://schemas.microsoft.com/office/drawing/2014/main" id="{79D1B276-E577-2179-44A6-39CD1BCA504E}"/>
-              </a:ext>
-            </a:extLst>
-          </p:cNvPr>
-          <p:cNvPicPr>
-            <a:picLocks noChangeAspect="1" noChangeArrowheads="1"/>
-          </p:cNvPicPr>
-          <p:nvPr/>
-        </p:nvPicPr>
-        <p:blipFill>
-          <a:blip r:embed="rId5">
-            <a:extLst>
-              <a:ext uri="{28A0092B-C50C-407E-A947-70E740481C1C}">
-                <a14:useLocalDpi xmlns:a14="http://schemas.microsoft.com/office/drawing/2010/main" val="0"/>
-              </a:ext>
-            </a:extLst>
-          </a:blip>
-          <a:srcRect/>
-          <a:stretch>
-            <a:fillRect/>
-          </a:stretch>
-        </p:blipFill>
-        <p:spPr bwMode="auto">
-          <a:xfrm>
-            <a:off x="0" y="2174684"/>
-            <a:ext cx="12192000" cy="3201987"/>
-          </a:xfrm>
-          <a:prstGeom prst="rect">
-            <a:avLst/>
-          </a:prstGeom>
-          <a:noFill/>
-          <a:extLst>
-            <a:ext uri="{909E8E84-426E-40DD-AFC4-6F175D3DCCD1}">
-              <a14:hiddenFill xmlns:a14="http://schemas.microsoft.com/office/drawing/2010/main">
-                <a:solidFill>
-                  <a:srgbClr val="FFFFFF"/>
-                </a:solidFill>
-              </a14:hiddenFill>
-            </a:ext>
-          </a:extLst>
-        </p:spPr>
-      </p:pic>
-      <p:sp>
-        <p:nvSpPr>
-          <p:cNvPr id="3" name="TextBox 2">
-            <a:extLst>
-              <a:ext uri="{FF2B5EF4-FFF2-40B4-BE49-F238E27FC236}">
-                <a16:creationId xmlns:a16="http://schemas.microsoft.com/office/drawing/2014/main" id="{4727121C-410F-8A8F-7733-B27DAF8D2C41}"/>
+      <p:sp>
+        <p:nvSpPr>
+          <p:cNvPr id="7" name="TextBox 6">
+            <a:extLst>
+              <a:ext uri="{FF2B5EF4-FFF2-40B4-BE49-F238E27FC236}">
+                <a16:creationId xmlns:a16="http://schemas.microsoft.com/office/drawing/2014/main" id="{0FE620A4-AB2D-79FB-6A25-45FFB679DB5E}"/>
               </a:ext>
             </a:extLst>
           </p:cNvPr>
@@ -7696,7 +8721,7 @@
     </p:spTree>
     <p:extLst>
       <p:ext uri="{BB962C8B-B14F-4D97-AF65-F5344CB8AC3E}">
-        <p14:creationId xmlns:p14="http://schemas.microsoft.com/office/powerpoint/2010/main" val="1994646492"/>
+        <p14:creationId xmlns:p14="http://schemas.microsoft.com/office/powerpoint/2010/main" val="514097413"/>
       </p:ext>
     </p:extLst>
   </p:cSld>
@@ -7901,59 +8926,12 @@
           </a:extLst>
         </p:spPr>
       </p:pic>
-      <p:pic>
-        <p:nvPicPr>
-          <p:cNvPr id="3" name="Picture 2">
-            <a:extLst>
-              <a:ext uri="{FF2B5EF4-FFF2-40B4-BE49-F238E27FC236}">
-                <a16:creationId xmlns:a16="http://schemas.microsoft.com/office/drawing/2014/main" id="{656AE5AA-A1FB-374A-B27A-A457B9842AC3}"/>
-              </a:ext>
-            </a:extLst>
-          </p:cNvPr>
-          <p:cNvPicPr>
-            <a:picLocks noChangeAspect="1" noChangeArrowheads="1"/>
-          </p:cNvPicPr>
-          <p:nvPr/>
-        </p:nvPicPr>
-        <p:blipFill>
-          <a:blip r:embed="rId6">
-            <a:extLst>
-              <a:ext uri="{28A0092B-C50C-407E-A947-70E740481C1C}">
-                <a14:useLocalDpi xmlns:a14="http://schemas.microsoft.com/office/drawing/2010/main" val="0"/>
-              </a:ext>
-            </a:extLst>
-          </a:blip>
-          <a:srcRect/>
-          <a:stretch>
-            <a:fillRect/>
-          </a:stretch>
-        </p:blipFill>
-        <p:spPr bwMode="auto">
-          <a:xfrm>
-            <a:off x="0" y="2174686"/>
-            <a:ext cx="12192000" cy="3201987"/>
-          </a:xfrm>
-          <a:prstGeom prst="rect">
-            <a:avLst/>
-          </a:prstGeom>
-          <a:noFill/>
-          <a:extLst>
-            <a:ext uri="{909E8E84-426E-40DD-AFC4-6F175D3DCCD1}">
-              <a14:hiddenFill xmlns:a14="http://schemas.microsoft.com/office/drawing/2010/main">
-                <a:solidFill>
-                  <a:srgbClr val="FFFFFF"/>
-                </a:solidFill>
-              </a14:hiddenFill>
-            </a:ext>
-          </a:extLst>
-        </p:spPr>
-      </p:pic>
-      <p:sp>
-        <p:nvSpPr>
-          <p:cNvPr id="4" name="TextBox 3">
-            <a:extLst>
-              <a:ext uri="{FF2B5EF4-FFF2-40B4-BE49-F238E27FC236}">
-                <a16:creationId xmlns:a16="http://schemas.microsoft.com/office/drawing/2014/main" id="{EE9F7DDE-F3A6-C6C5-060C-C446A72CDA3E}"/>
+      <p:sp>
+        <p:nvSpPr>
+          <p:cNvPr id="3" name="TextBox 2">
+            <a:extLst>
+              <a:ext uri="{FF2B5EF4-FFF2-40B4-BE49-F238E27FC236}">
+                <a16:creationId xmlns:a16="http://schemas.microsoft.com/office/drawing/2014/main" id="{4727121C-410F-8A8F-7733-B27DAF8D2C41}"/>
               </a:ext>
             </a:extLst>
           </p:cNvPr>
@@ -7994,7 +8972,7 @@
     </p:spTree>
     <p:extLst>
       <p:ext uri="{BB962C8B-B14F-4D97-AF65-F5344CB8AC3E}">
-        <p14:creationId xmlns:p14="http://schemas.microsoft.com/office/powerpoint/2010/main" val="3814102497"/>
+        <p14:creationId xmlns:p14="http://schemas.microsoft.com/office/powerpoint/2010/main" val="1994646492"/>
       </p:ext>
     </p:extLst>
   </p:cSld>
@@ -8246,59 +9224,12 @@
           </a:extLst>
         </p:spPr>
       </p:pic>
-      <p:pic>
-        <p:nvPicPr>
-          <p:cNvPr id="6146" name="Picture 2">
-            <a:extLst>
-              <a:ext uri="{FF2B5EF4-FFF2-40B4-BE49-F238E27FC236}">
-                <a16:creationId xmlns:a16="http://schemas.microsoft.com/office/drawing/2014/main" id="{5CE4AF16-D34B-02D5-0D24-F569A62D7F69}"/>
-              </a:ext>
-            </a:extLst>
-          </p:cNvPr>
-          <p:cNvPicPr>
-            <a:picLocks noChangeAspect="1" noChangeArrowheads="1"/>
-          </p:cNvPicPr>
-          <p:nvPr/>
-        </p:nvPicPr>
-        <p:blipFill>
-          <a:blip r:embed="rId7">
-            <a:extLst>
-              <a:ext uri="{28A0092B-C50C-407E-A947-70E740481C1C}">
-                <a14:useLocalDpi xmlns:a14="http://schemas.microsoft.com/office/drawing/2010/main" val="0"/>
-              </a:ext>
-            </a:extLst>
-          </a:blip>
-          <a:srcRect/>
-          <a:stretch>
-            <a:fillRect/>
-          </a:stretch>
-        </p:blipFill>
-        <p:spPr bwMode="auto">
-          <a:xfrm>
-            <a:off x="0" y="2174686"/>
-            <a:ext cx="12192000" cy="3201987"/>
-          </a:xfrm>
-          <a:prstGeom prst="rect">
-            <a:avLst/>
-          </a:prstGeom>
-          <a:noFill/>
-          <a:extLst>
-            <a:ext uri="{909E8E84-426E-40DD-AFC4-6F175D3DCCD1}">
-              <a14:hiddenFill xmlns:a14="http://schemas.microsoft.com/office/drawing/2010/main">
-                <a:solidFill>
-                  <a:srgbClr val="FFFFFF"/>
-                </a:solidFill>
-              </a14:hiddenFill>
-            </a:ext>
-          </a:extLst>
-        </p:spPr>
-      </p:pic>
       <p:sp>
         <p:nvSpPr>
           <p:cNvPr id="4" name="TextBox 3">
             <a:extLst>
               <a:ext uri="{FF2B5EF4-FFF2-40B4-BE49-F238E27FC236}">
-                <a16:creationId xmlns:a16="http://schemas.microsoft.com/office/drawing/2014/main" id="{56499817-8034-0A98-0E18-A11510F2647B}"/>
+                <a16:creationId xmlns:a16="http://schemas.microsoft.com/office/drawing/2014/main" id="{EE9F7DDE-F3A6-C6C5-060C-C446A72CDA3E}"/>
               </a:ext>
             </a:extLst>
           </p:cNvPr>
@@ -8339,7 +9270,7 @@
     </p:spTree>
     <p:extLst>
       <p:ext uri="{BB962C8B-B14F-4D97-AF65-F5344CB8AC3E}">
-        <p14:creationId xmlns:p14="http://schemas.microsoft.com/office/powerpoint/2010/main" val="1297158282"/>
+        <p14:creationId xmlns:p14="http://schemas.microsoft.com/office/powerpoint/2010/main" val="3814102497"/>
       </p:ext>
     </p:extLst>
   </p:cSld>
@@ -8397,7 +9328,24 @@
                 </a:solidFill>
                 <a:latin typeface="Gill Sans MT" panose="020B0502020104020203" pitchFamily="34" charset="77"/>
               </a:rPr>
-              <a:t>Results: Physical Sea State</a:t>
+              <a:t>Ozone and GHG effect </a:t>
+            </a:r>
+            <a:br>
+              <a:rPr lang="en-US" sz="3600" dirty="0">
+                <a:solidFill>
+                  <a:srgbClr val="0C13E4"/>
+                </a:solidFill>
+                <a:latin typeface="Gill Sans MT" panose="020B0502020104020203" pitchFamily="34" charset="77"/>
+              </a:rPr>
+            </a:br>
+            <a:r>
+              <a:rPr lang="en-US" sz="3600" dirty="0">
+                <a:solidFill>
+                  <a:srgbClr val="0C13E4"/>
+                </a:solidFill>
+                <a:latin typeface="Gill Sans MT" panose="020B0502020104020203" pitchFamily="34" charset="77"/>
+              </a:rPr>
+              <a:t>on wind speed,1950-2100</a:t>
             </a:r>
             <a:endParaRPr lang="en-US" sz="3600" dirty="0"/>
           </a:p>
@@ -8405,10 +9353,10 @@
       </p:sp>
       <p:pic>
         <p:nvPicPr>
-          <p:cNvPr id="4" name="Picture 3">
-            <a:extLst>
-              <a:ext uri="{FF2B5EF4-FFF2-40B4-BE49-F238E27FC236}">
-                <a16:creationId xmlns:a16="http://schemas.microsoft.com/office/drawing/2014/main" id="{39D26988-8358-E23D-E34C-B90311E75638}"/>
+          <p:cNvPr id="5" name="Picture 4">
+            <a:extLst>
+              <a:ext uri="{FF2B5EF4-FFF2-40B4-BE49-F238E27FC236}">
+                <a16:creationId xmlns:a16="http://schemas.microsoft.com/office/drawing/2014/main" id="{5B8BAEB7-A52C-4144-3033-8062466DD667}"/>
               </a:ext>
             </a:extLst>
           </p:cNvPr>
@@ -8435,10 +9383,10 @@
       </p:pic>
       <p:pic>
         <p:nvPicPr>
-          <p:cNvPr id="9220" name="Picture 4">
-            <a:extLst>
-              <a:ext uri="{FF2B5EF4-FFF2-40B4-BE49-F238E27FC236}">
-                <a16:creationId xmlns:a16="http://schemas.microsoft.com/office/drawing/2014/main" id="{0991AA69-AFAB-85AE-BF39-97105B6C1849}"/>
+          <p:cNvPr id="2054" name="Picture 6">
+            <a:extLst>
+              <a:ext uri="{FF2B5EF4-FFF2-40B4-BE49-F238E27FC236}">
+                <a16:creationId xmlns:a16="http://schemas.microsoft.com/office/drawing/2014/main" id="{879B3DED-4E25-B83C-6FB8-009748D81AAF}"/>
               </a:ext>
             </a:extLst>
           </p:cNvPr>
@@ -8462,8 +9410,8 @@
         </p:blipFill>
         <p:spPr bwMode="auto">
           <a:xfrm>
-            <a:off x="394353" y="2286350"/>
-            <a:ext cx="11403293" cy="2614739"/>
+            <a:off x="0" y="2156397"/>
+            <a:ext cx="12192000" cy="3201987"/>
           </a:xfrm>
           <a:prstGeom prst="rect">
             <a:avLst/>
@@ -8480,12 +9428,153 @@
           </a:extLst>
         </p:spPr>
       </p:pic>
-      <p:sp>
-        <p:nvSpPr>
-          <p:cNvPr id="5" name="TextBox 4">
-            <a:extLst>
-              <a:ext uri="{FF2B5EF4-FFF2-40B4-BE49-F238E27FC236}">
-                <a16:creationId xmlns:a16="http://schemas.microsoft.com/office/drawing/2014/main" id="{50495FC6-A844-C72D-6CCF-394853636A20}"/>
+      <p:pic>
+        <p:nvPicPr>
+          <p:cNvPr id="6" name="Picture 4">
+            <a:extLst>
+              <a:ext uri="{FF2B5EF4-FFF2-40B4-BE49-F238E27FC236}">
+                <a16:creationId xmlns:a16="http://schemas.microsoft.com/office/drawing/2014/main" id="{79D1B276-E577-2179-44A6-39CD1BCA504E}"/>
+              </a:ext>
+            </a:extLst>
+          </p:cNvPr>
+          <p:cNvPicPr>
+            <a:picLocks noChangeAspect="1" noChangeArrowheads="1"/>
+          </p:cNvPicPr>
+          <p:nvPr/>
+        </p:nvPicPr>
+        <p:blipFill>
+          <a:blip r:embed="rId5">
+            <a:extLst>
+              <a:ext uri="{28A0092B-C50C-407E-A947-70E740481C1C}">
+                <a14:useLocalDpi xmlns:a14="http://schemas.microsoft.com/office/drawing/2010/main" val="0"/>
+              </a:ext>
+            </a:extLst>
+          </a:blip>
+          <a:srcRect/>
+          <a:stretch>
+            <a:fillRect/>
+          </a:stretch>
+        </p:blipFill>
+        <p:spPr bwMode="auto">
+          <a:xfrm>
+            <a:off x="0" y="2174684"/>
+            <a:ext cx="12192000" cy="3201987"/>
+          </a:xfrm>
+          <a:prstGeom prst="rect">
+            <a:avLst/>
+          </a:prstGeom>
+          <a:noFill/>
+          <a:extLst>
+            <a:ext uri="{909E8E84-426E-40DD-AFC4-6F175D3DCCD1}">
+              <a14:hiddenFill xmlns:a14="http://schemas.microsoft.com/office/drawing/2010/main">
+                <a:solidFill>
+                  <a:srgbClr val="FFFFFF"/>
+                </a:solidFill>
+              </a14:hiddenFill>
+            </a:ext>
+          </a:extLst>
+        </p:spPr>
+      </p:pic>
+      <p:pic>
+        <p:nvPicPr>
+          <p:cNvPr id="3" name="Picture 2">
+            <a:extLst>
+              <a:ext uri="{FF2B5EF4-FFF2-40B4-BE49-F238E27FC236}">
+                <a16:creationId xmlns:a16="http://schemas.microsoft.com/office/drawing/2014/main" id="{656AE5AA-A1FB-374A-B27A-A457B9842AC3}"/>
+              </a:ext>
+            </a:extLst>
+          </p:cNvPr>
+          <p:cNvPicPr>
+            <a:picLocks noChangeAspect="1" noChangeArrowheads="1"/>
+          </p:cNvPicPr>
+          <p:nvPr/>
+        </p:nvPicPr>
+        <p:blipFill>
+          <a:blip r:embed="rId6">
+            <a:extLst>
+              <a:ext uri="{28A0092B-C50C-407E-A947-70E740481C1C}">
+                <a14:useLocalDpi xmlns:a14="http://schemas.microsoft.com/office/drawing/2010/main" val="0"/>
+              </a:ext>
+            </a:extLst>
+          </a:blip>
+          <a:srcRect/>
+          <a:stretch>
+            <a:fillRect/>
+          </a:stretch>
+        </p:blipFill>
+        <p:spPr bwMode="auto">
+          <a:xfrm>
+            <a:off x="0" y="2174686"/>
+            <a:ext cx="12192000" cy="3201987"/>
+          </a:xfrm>
+          <a:prstGeom prst="rect">
+            <a:avLst/>
+          </a:prstGeom>
+          <a:noFill/>
+          <a:extLst>
+            <a:ext uri="{909E8E84-426E-40DD-AFC4-6F175D3DCCD1}">
+              <a14:hiddenFill xmlns:a14="http://schemas.microsoft.com/office/drawing/2010/main">
+                <a:solidFill>
+                  <a:srgbClr val="FFFFFF"/>
+                </a:solidFill>
+              </a14:hiddenFill>
+            </a:ext>
+          </a:extLst>
+        </p:spPr>
+      </p:pic>
+      <p:pic>
+        <p:nvPicPr>
+          <p:cNvPr id="6146" name="Picture 2">
+            <a:extLst>
+              <a:ext uri="{FF2B5EF4-FFF2-40B4-BE49-F238E27FC236}">
+                <a16:creationId xmlns:a16="http://schemas.microsoft.com/office/drawing/2014/main" id="{5CE4AF16-D34B-02D5-0D24-F569A62D7F69}"/>
+              </a:ext>
+            </a:extLst>
+          </p:cNvPr>
+          <p:cNvPicPr>
+            <a:picLocks noChangeAspect="1" noChangeArrowheads="1"/>
+          </p:cNvPicPr>
+          <p:nvPr/>
+        </p:nvPicPr>
+        <p:blipFill>
+          <a:blip r:embed="rId7">
+            <a:extLst>
+              <a:ext uri="{28A0092B-C50C-407E-A947-70E740481C1C}">
+                <a14:useLocalDpi xmlns:a14="http://schemas.microsoft.com/office/drawing/2010/main" val="0"/>
+              </a:ext>
+            </a:extLst>
+          </a:blip>
+          <a:srcRect/>
+          <a:stretch>
+            <a:fillRect/>
+          </a:stretch>
+        </p:blipFill>
+        <p:spPr bwMode="auto">
+          <a:xfrm>
+            <a:off x="0" y="2174686"/>
+            <a:ext cx="12192000" cy="3201987"/>
+          </a:xfrm>
+          <a:prstGeom prst="rect">
+            <a:avLst/>
+          </a:prstGeom>
+          <a:noFill/>
+          <a:extLst>
+            <a:ext uri="{909E8E84-426E-40DD-AFC4-6F175D3DCCD1}">
+              <a14:hiddenFill xmlns:a14="http://schemas.microsoft.com/office/drawing/2010/main">
+                <a:solidFill>
+                  <a:srgbClr val="FFFFFF"/>
+                </a:solidFill>
+              </a14:hiddenFill>
+            </a:ext>
+          </a:extLst>
+        </p:spPr>
+      </p:pic>
+      <p:sp>
+        <p:nvSpPr>
+          <p:cNvPr id="4" name="TextBox 3">
+            <a:extLst>
+              <a:ext uri="{FF2B5EF4-FFF2-40B4-BE49-F238E27FC236}">
+                <a16:creationId xmlns:a16="http://schemas.microsoft.com/office/drawing/2014/main" id="{56499817-8034-0A98-0E18-A11510F2647B}"/>
               </a:ext>
             </a:extLst>
           </p:cNvPr>
@@ -8523,57 +9612,10 @@
           </a:p>
         </p:txBody>
       </p:sp>
-      <p:pic>
-        <p:nvPicPr>
-          <p:cNvPr id="9222" name="Picture 6">
-            <a:extLst>
-              <a:ext uri="{FF2B5EF4-FFF2-40B4-BE49-F238E27FC236}">
-                <a16:creationId xmlns:a16="http://schemas.microsoft.com/office/drawing/2014/main" id="{3F609CFB-29C5-8C5E-6146-B3512A1E65F0}"/>
-              </a:ext>
-            </a:extLst>
-          </p:cNvPr>
-          <p:cNvPicPr>
-            <a:picLocks noChangeAspect="1" noChangeArrowheads="1"/>
-          </p:cNvPicPr>
-          <p:nvPr/>
-        </p:nvPicPr>
-        <p:blipFill>
-          <a:blip r:embed="rId5">
-            <a:extLst>
-              <a:ext uri="{28A0092B-C50C-407E-A947-70E740481C1C}">
-                <a14:useLocalDpi xmlns:a14="http://schemas.microsoft.com/office/drawing/2010/main" val="0"/>
-              </a:ext>
-            </a:extLst>
-          </a:blip>
-          <a:srcRect/>
-          <a:stretch>
-            <a:fillRect/>
-          </a:stretch>
-        </p:blipFill>
-        <p:spPr bwMode="auto">
-          <a:xfrm>
-            <a:off x="394353" y="2286349"/>
-            <a:ext cx="11403294" cy="2614739"/>
-          </a:xfrm>
-          <a:prstGeom prst="rect">
-            <a:avLst/>
-          </a:prstGeom>
-          <a:noFill/>
-          <a:extLst>
-            <a:ext uri="{909E8E84-426E-40DD-AFC4-6F175D3DCCD1}">
-              <a14:hiddenFill xmlns:a14="http://schemas.microsoft.com/office/drawing/2010/main">
-                <a:solidFill>
-                  <a:srgbClr val="FFFFFF"/>
-                </a:solidFill>
-              </a14:hiddenFill>
-            </a:ext>
-          </a:extLst>
-        </p:spPr>
-      </p:pic>
     </p:spTree>
     <p:extLst>
       <p:ext uri="{BB962C8B-B14F-4D97-AF65-F5344CB8AC3E}">
-        <p14:creationId xmlns:p14="http://schemas.microsoft.com/office/powerpoint/2010/main" val="2705404102"/>
+        <p14:creationId xmlns:p14="http://schemas.microsoft.com/office/powerpoint/2010/main" val="1297158282"/>
       </p:ext>
     </p:extLst>
   </p:cSld>
@@ -8757,10 +9799,57 @@
           </a:p>
         </p:txBody>
       </p:sp>
+      <p:pic>
+        <p:nvPicPr>
+          <p:cNvPr id="9222" name="Picture 6">
+            <a:extLst>
+              <a:ext uri="{FF2B5EF4-FFF2-40B4-BE49-F238E27FC236}">
+                <a16:creationId xmlns:a16="http://schemas.microsoft.com/office/drawing/2014/main" id="{3F609CFB-29C5-8C5E-6146-B3512A1E65F0}"/>
+              </a:ext>
+            </a:extLst>
+          </p:cNvPr>
+          <p:cNvPicPr>
+            <a:picLocks noChangeAspect="1" noChangeArrowheads="1"/>
+          </p:cNvPicPr>
+          <p:nvPr/>
+        </p:nvPicPr>
+        <p:blipFill>
+          <a:blip r:embed="rId5">
+            <a:extLst>
+              <a:ext uri="{28A0092B-C50C-407E-A947-70E740481C1C}">
+                <a14:useLocalDpi xmlns:a14="http://schemas.microsoft.com/office/drawing/2010/main" val="0"/>
+              </a:ext>
+            </a:extLst>
+          </a:blip>
+          <a:srcRect/>
+          <a:stretch>
+            <a:fillRect/>
+          </a:stretch>
+        </p:blipFill>
+        <p:spPr bwMode="auto">
+          <a:xfrm>
+            <a:off x="394353" y="2286349"/>
+            <a:ext cx="11403294" cy="2614739"/>
+          </a:xfrm>
+          <a:prstGeom prst="rect">
+            <a:avLst/>
+          </a:prstGeom>
+          <a:noFill/>
+          <a:extLst>
+            <a:ext uri="{909E8E84-426E-40DD-AFC4-6F175D3DCCD1}">
+              <a14:hiddenFill xmlns:a14="http://schemas.microsoft.com/office/drawing/2010/main">
+                <a:solidFill>
+                  <a:srgbClr val="FFFFFF"/>
+                </a:solidFill>
+              </a14:hiddenFill>
+            </a:ext>
+          </a:extLst>
+        </p:spPr>
+      </p:pic>
     </p:spTree>
     <p:extLst>
       <p:ext uri="{BB962C8B-B14F-4D97-AF65-F5344CB8AC3E}">
-        <p14:creationId xmlns:p14="http://schemas.microsoft.com/office/powerpoint/2010/main" val="1320790637"/>
+        <p14:creationId xmlns:p14="http://schemas.microsoft.com/office/powerpoint/2010/main" val="2705404102"/>
       </p:ext>
     </p:extLst>
   </p:cSld>
@@ -8803,12 +9892,7 @@
             <p:ph type="title"/>
           </p:nvPr>
         </p:nvSpPr>
-        <p:spPr>
-          <a:xfrm>
-            <a:off x="838200" y="-128378"/>
-            <a:ext cx="10515600" cy="1325563"/>
-          </a:xfrm>
-        </p:spPr>
+        <p:spPr/>
         <p:txBody>
           <a:bodyPr>
             <a:normAutofit/>
@@ -8831,10 +9915,40 @@
       </p:sp>
       <p:pic>
         <p:nvPicPr>
-          <p:cNvPr id="8194" name="Picture 2">
-            <a:extLst>
-              <a:ext uri="{FF2B5EF4-FFF2-40B4-BE49-F238E27FC236}">
-                <a16:creationId xmlns:a16="http://schemas.microsoft.com/office/drawing/2014/main" id="{20551D60-36C8-6EE4-4857-0AD7CCC27F40}"/>
+          <p:cNvPr id="4" name="Picture 3">
+            <a:extLst>
+              <a:ext uri="{FF2B5EF4-FFF2-40B4-BE49-F238E27FC236}">
+                <a16:creationId xmlns:a16="http://schemas.microsoft.com/office/drawing/2014/main" id="{39D26988-8358-E23D-E34C-B90311E75638}"/>
+              </a:ext>
+            </a:extLst>
+          </p:cNvPr>
+          <p:cNvPicPr>
+            <a:picLocks noChangeAspect="1"/>
+          </p:cNvPicPr>
+          <p:nvPr/>
+        </p:nvPicPr>
+        <p:blipFill>
+          <a:blip r:embed="rId3"/>
+          <a:stretch>
+            <a:fillRect/>
+          </a:stretch>
+        </p:blipFill>
+        <p:spPr>
+          <a:xfrm>
+            <a:off x="186553" y="137161"/>
+            <a:ext cx="2739242" cy="1325563"/>
+          </a:xfrm>
+          <a:prstGeom prst="rect">
+            <a:avLst/>
+          </a:prstGeom>
+        </p:spPr>
+      </p:pic>
+      <p:pic>
+        <p:nvPicPr>
+          <p:cNvPr id="9220" name="Picture 4">
+            <a:extLst>
+              <a:ext uri="{FF2B5EF4-FFF2-40B4-BE49-F238E27FC236}">
+                <a16:creationId xmlns:a16="http://schemas.microsoft.com/office/drawing/2014/main" id="{0991AA69-AFAB-85AE-BF39-97105B6C1849}"/>
               </a:ext>
             </a:extLst>
           </p:cNvPr>
@@ -8843,21 +9957,23 @@
           </p:cNvPicPr>
           <p:nvPr/>
         </p:nvPicPr>
-        <p:blipFill rotWithShape="1">
-          <a:blip r:embed="rId3">
+        <p:blipFill>
+          <a:blip r:embed="rId4">
             <a:extLst>
               <a:ext uri="{28A0092B-C50C-407E-A947-70E740481C1C}">
                 <a14:useLocalDpi xmlns:a14="http://schemas.microsoft.com/office/drawing/2010/main" val="0"/>
               </a:ext>
             </a:extLst>
           </a:blip>
-          <a:srcRect t="50629" r="66593"/>
-          <a:stretch/>
+          <a:srcRect/>
+          <a:stretch>
+            <a:fillRect/>
+          </a:stretch>
         </p:blipFill>
         <p:spPr bwMode="auto">
           <a:xfrm>
-            <a:off x="1372616" y="2363384"/>
-            <a:ext cx="3546856" cy="2702389"/>
+            <a:off x="394353" y="2286350"/>
+            <a:ext cx="11403293" cy="2614739"/>
           </a:xfrm>
           <a:prstGeom prst="rect">
             <a:avLst/>
@@ -8874,186 +9990,12 @@
           </a:extLst>
         </p:spPr>
       </p:pic>
-      <p:pic>
-        <p:nvPicPr>
-          <p:cNvPr id="5" name="Picture 2">
-            <a:extLst>
-              <a:ext uri="{FF2B5EF4-FFF2-40B4-BE49-F238E27FC236}">
-                <a16:creationId xmlns:a16="http://schemas.microsoft.com/office/drawing/2014/main" id="{A578A0CA-D88D-51E2-7BA7-4FAA1D1AB125}"/>
-              </a:ext>
-            </a:extLst>
-          </p:cNvPr>
-          <p:cNvPicPr>
-            <a:picLocks noChangeAspect="1" noChangeArrowheads="1"/>
-          </p:cNvPicPr>
-          <p:nvPr/>
-        </p:nvPicPr>
-        <p:blipFill rotWithShape="1">
-          <a:blip r:embed="rId3">
-            <a:extLst>
-              <a:ext uri="{28A0092B-C50C-407E-A947-70E740481C1C}">
-                <a14:useLocalDpi xmlns:a14="http://schemas.microsoft.com/office/drawing/2010/main" val="0"/>
-              </a:ext>
-            </a:extLst>
-          </a:blip>
-          <a:srcRect l="68450"/>
-          <a:stretch/>
-        </p:blipFill>
-        <p:spPr bwMode="auto">
-          <a:xfrm>
-            <a:off x="6778754" y="977729"/>
-            <a:ext cx="3349752" cy="5473700"/>
-          </a:xfrm>
-          <a:prstGeom prst="rect">
-            <a:avLst/>
-          </a:prstGeom>
-          <a:noFill/>
-          <a:extLst>
-            <a:ext uri="{909E8E84-426E-40DD-AFC4-6F175D3DCCD1}">
-              <a14:hiddenFill xmlns:a14="http://schemas.microsoft.com/office/drawing/2010/main">
-                <a:solidFill>
-                  <a:srgbClr val="FFFFFF"/>
-                </a:solidFill>
-              </a14:hiddenFill>
-            </a:ext>
-          </a:extLst>
-        </p:spPr>
-      </p:pic>
-      <p:sp>
-        <p:nvSpPr>
-          <p:cNvPr id="6" name="TextBox 5">
-            <a:extLst>
-              <a:ext uri="{FF2B5EF4-FFF2-40B4-BE49-F238E27FC236}">
-                <a16:creationId xmlns:a16="http://schemas.microsoft.com/office/drawing/2014/main" id="{7DFDAA41-56D3-304A-6D96-0C06BDC02C0E}"/>
-              </a:ext>
-            </a:extLst>
-          </p:cNvPr>
-          <p:cNvSpPr txBox="1"/>
-          <p:nvPr/>
-        </p:nvSpPr>
-        <p:spPr>
-          <a:xfrm>
-            <a:off x="2520712" y="5065773"/>
-            <a:ext cx="1250663" cy="646331"/>
-          </a:xfrm>
-          <a:prstGeom prst="rect">
-            <a:avLst/>
-          </a:prstGeom>
-          <a:noFill/>
-        </p:spPr>
-        <p:txBody>
-          <a:bodyPr wrap="none" rtlCol="0">
-            <a:spAutoFit/>
-          </a:bodyPr>
-          <a:lstStyle/>
-          <a:p>
-            <a:pPr algn="ctr"/>
-            <a:r>
-              <a:rPr lang="en-US" i="1" dirty="0"/>
-              <a:t>historical</a:t>
-            </a:r>
-          </a:p>
-          <a:p>
-            <a:pPr algn="ctr"/>
-            <a:r>
-              <a:rPr lang="en-US" i="1" dirty="0"/>
-              <a:t>1950-2000</a:t>
-            </a:r>
-          </a:p>
-        </p:txBody>
-      </p:sp>
-      <p:sp>
-        <p:nvSpPr>
-          <p:cNvPr id="7" name="TextBox 6">
-            <a:extLst>
-              <a:ext uri="{FF2B5EF4-FFF2-40B4-BE49-F238E27FC236}">
-                <a16:creationId xmlns:a16="http://schemas.microsoft.com/office/drawing/2014/main" id="{1589D96A-11F1-262E-ADC2-7C1B4238F616}"/>
-              </a:ext>
-            </a:extLst>
-          </p:cNvPr>
-          <p:cNvSpPr txBox="1"/>
-          <p:nvPr/>
-        </p:nvSpPr>
-        <p:spPr>
-          <a:xfrm>
-            <a:off x="10234694" y="2168234"/>
-            <a:ext cx="1250663" cy="646331"/>
-          </a:xfrm>
-          <a:prstGeom prst="rect">
-            <a:avLst/>
-          </a:prstGeom>
-          <a:noFill/>
-        </p:spPr>
-        <p:txBody>
-          <a:bodyPr wrap="none" rtlCol="0">
-            <a:spAutoFit/>
-          </a:bodyPr>
-          <a:lstStyle/>
-          <a:p>
-            <a:pPr algn="ctr"/>
-            <a:r>
-              <a:rPr lang="en-US" i="1" dirty="0"/>
-              <a:t>SSP3</a:t>
-            </a:r>
-          </a:p>
-          <a:p>
-            <a:pPr algn="ctr"/>
-            <a:r>
-              <a:rPr lang="en-US" i="1" dirty="0"/>
-              <a:t>2050-2100</a:t>
-            </a:r>
-          </a:p>
-        </p:txBody>
-      </p:sp>
-      <p:sp>
-        <p:nvSpPr>
-          <p:cNvPr id="9" name="TextBox 8">
-            <a:extLst>
-              <a:ext uri="{FF2B5EF4-FFF2-40B4-BE49-F238E27FC236}">
-                <a16:creationId xmlns:a16="http://schemas.microsoft.com/office/drawing/2014/main" id="{2A2CEB9B-DCAD-1F9A-D55E-951309B6B915}"/>
-              </a:ext>
-            </a:extLst>
-          </p:cNvPr>
-          <p:cNvSpPr txBox="1"/>
-          <p:nvPr/>
-        </p:nvSpPr>
-        <p:spPr>
-          <a:xfrm>
-            <a:off x="10249934" y="4935818"/>
-            <a:ext cx="1250663" cy="646331"/>
-          </a:xfrm>
-          <a:prstGeom prst="rect">
-            <a:avLst/>
-          </a:prstGeom>
-          <a:noFill/>
-        </p:spPr>
-        <p:txBody>
-          <a:bodyPr wrap="none" rtlCol="0">
-            <a:spAutoFit/>
-          </a:bodyPr>
-          <a:lstStyle/>
-          <a:p>
-            <a:pPr algn="ctr"/>
-            <a:r>
-              <a:rPr lang="en-US" i="1" dirty="0"/>
-              <a:t>SSP1</a:t>
-            </a:r>
-          </a:p>
-          <a:p>
-            <a:pPr algn="ctr"/>
-            <a:r>
-              <a:rPr lang="en-US" i="1" dirty="0"/>
-              <a:t>2050-2100</a:t>
-            </a:r>
-          </a:p>
-        </p:txBody>
-      </p:sp>
-      <p:sp>
-        <p:nvSpPr>
-          <p:cNvPr id="3" name="TextBox 2">
-            <a:extLst>
-              <a:ext uri="{FF2B5EF4-FFF2-40B4-BE49-F238E27FC236}">
-                <a16:creationId xmlns:a16="http://schemas.microsoft.com/office/drawing/2014/main" id="{304E7DD3-3925-0EEC-A7C1-76459B693552}"/>
+      <p:sp>
+        <p:nvSpPr>
+          <p:cNvPr id="5" name="TextBox 4">
+            <a:extLst>
+              <a:ext uri="{FF2B5EF4-FFF2-40B4-BE49-F238E27FC236}">
+                <a16:creationId xmlns:a16="http://schemas.microsoft.com/office/drawing/2014/main" id="{50495FC6-A844-C72D-6CCF-394853636A20}"/>
               </a:ext>
             </a:extLst>
           </p:cNvPr>
@@ -9085,7 +10027,7 @@
                 <a:latin typeface="Georgia" panose="02040502050405020303" pitchFamily="18" charset="0"/>
                 <a:cs typeface="Gill Sans" panose="020B0502020104020203" pitchFamily="34" charset="-79"/>
               </a:rPr>
-              <a:t>year average</a:t>
+              <a:t>austral summer, DJF</a:t>
             </a:r>
             <a:endParaRPr lang="en-US" i="1" dirty="0"/>
           </a:p>
@@ -9094,7 +10036,7 @@
     </p:spTree>
     <p:extLst>
       <p:ext uri="{BB962C8B-B14F-4D97-AF65-F5344CB8AC3E}">
-        <p14:creationId xmlns:p14="http://schemas.microsoft.com/office/powerpoint/2010/main" val="1593079630"/>
+        <p14:creationId xmlns:p14="http://schemas.microsoft.com/office/powerpoint/2010/main" val="1320790637"/>
       </p:ext>
     </p:extLst>
   </p:cSld>
@@ -9123,10 +10065,142 @@
       </p:grpSpPr>
       <p:sp>
         <p:nvSpPr>
-          <p:cNvPr id="4" name="TextBox 3">
-            <a:extLst>
-              <a:ext uri="{FF2B5EF4-FFF2-40B4-BE49-F238E27FC236}">
-                <a16:creationId xmlns:a16="http://schemas.microsoft.com/office/drawing/2014/main" id="{AF9B623E-CAA3-C5B5-DDF7-8248BD1B4033}"/>
+          <p:cNvPr id="2" name="Title 1">
+            <a:extLst>
+              <a:ext uri="{FF2B5EF4-FFF2-40B4-BE49-F238E27FC236}">
+                <a16:creationId xmlns:a16="http://schemas.microsoft.com/office/drawing/2014/main" id="{743D13F2-7090-696A-A0F6-3CB169034685}"/>
+              </a:ext>
+            </a:extLst>
+          </p:cNvPr>
+          <p:cNvSpPr>
+            <a:spLocks noGrp="1"/>
+          </p:cNvSpPr>
+          <p:nvPr>
+            <p:ph type="title"/>
+          </p:nvPr>
+        </p:nvSpPr>
+        <p:spPr>
+          <a:xfrm>
+            <a:off x="838200" y="-128378"/>
+            <a:ext cx="10515600" cy="1325563"/>
+          </a:xfrm>
+        </p:spPr>
+        <p:txBody>
+          <a:bodyPr>
+            <a:normAutofit/>
+          </a:bodyPr>
+          <a:lstStyle/>
+          <a:p>
+            <a:pPr algn="ctr"/>
+            <a:r>
+              <a:rPr lang="en-US" sz="3600" dirty="0">
+                <a:solidFill>
+                  <a:srgbClr val="0C13E4"/>
+                </a:solidFill>
+                <a:latin typeface="Gill Sans MT" panose="020B0502020104020203" pitchFamily="34" charset="77"/>
+              </a:rPr>
+              <a:t>Results: Physical Sea State</a:t>
+            </a:r>
+            <a:endParaRPr lang="en-US" sz="3600" dirty="0"/>
+          </a:p>
+        </p:txBody>
+      </p:sp>
+      <p:pic>
+        <p:nvPicPr>
+          <p:cNvPr id="8194" name="Picture 2">
+            <a:extLst>
+              <a:ext uri="{FF2B5EF4-FFF2-40B4-BE49-F238E27FC236}">
+                <a16:creationId xmlns:a16="http://schemas.microsoft.com/office/drawing/2014/main" id="{20551D60-36C8-6EE4-4857-0AD7CCC27F40}"/>
+              </a:ext>
+            </a:extLst>
+          </p:cNvPr>
+          <p:cNvPicPr>
+            <a:picLocks noChangeAspect="1" noChangeArrowheads="1"/>
+          </p:cNvPicPr>
+          <p:nvPr/>
+        </p:nvPicPr>
+        <p:blipFill rotWithShape="1">
+          <a:blip r:embed="rId3">
+            <a:extLst>
+              <a:ext uri="{28A0092B-C50C-407E-A947-70E740481C1C}">
+                <a14:useLocalDpi xmlns:a14="http://schemas.microsoft.com/office/drawing/2010/main" val="0"/>
+              </a:ext>
+            </a:extLst>
+          </a:blip>
+          <a:srcRect t="50629" r="66593"/>
+          <a:stretch/>
+        </p:blipFill>
+        <p:spPr bwMode="auto">
+          <a:xfrm>
+            <a:off x="1372616" y="2363384"/>
+            <a:ext cx="3546856" cy="2702389"/>
+          </a:xfrm>
+          <a:prstGeom prst="rect">
+            <a:avLst/>
+          </a:prstGeom>
+          <a:noFill/>
+          <a:extLst>
+            <a:ext uri="{909E8E84-426E-40DD-AFC4-6F175D3DCCD1}">
+              <a14:hiddenFill xmlns:a14="http://schemas.microsoft.com/office/drawing/2010/main">
+                <a:solidFill>
+                  <a:srgbClr val="FFFFFF"/>
+                </a:solidFill>
+              </a14:hiddenFill>
+            </a:ext>
+          </a:extLst>
+        </p:spPr>
+      </p:pic>
+      <p:pic>
+        <p:nvPicPr>
+          <p:cNvPr id="5" name="Picture 2">
+            <a:extLst>
+              <a:ext uri="{FF2B5EF4-FFF2-40B4-BE49-F238E27FC236}">
+                <a16:creationId xmlns:a16="http://schemas.microsoft.com/office/drawing/2014/main" id="{A578A0CA-D88D-51E2-7BA7-4FAA1D1AB125}"/>
+              </a:ext>
+            </a:extLst>
+          </p:cNvPr>
+          <p:cNvPicPr>
+            <a:picLocks noChangeAspect="1" noChangeArrowheads="1"/>
+          </p:cNvPicPr>
+          <p:nvPr/>
+        </p:nvPicPr>
+        <p:blipFill rotWithShape="1">
+          <a:blip r:embed="rId3">
+            <a:extLst>
+              <a:ext uri="{28A0092B-C50C-407E-A947-70E740481C1C}">
+                <a14:useLocalDpi xmlns:a14="http://schemas.microsoft.com/office/drawing/2010/main" val="0"/>
+              </a:ext>
+            </a:extLst>
+          </a:blip>
+          <a:srcRect l="68450"/>
+          <a:stretch/>
+        </p:blipFill>
+        <p:spPr bwMode="auto">
+          <a:xfrm>
+            <a:off x="6778754" y="977729"/>
+            <a:ext cx="3349752" cy="5473700"/>
+          </a:xfrm>
+          <a:prstGeom prst="rect">
+            <a:avLst/>
+          </a:prstGeom>
+          <a:noFill/>
+          <a:extLst>
+            <a:ext uri="{909E8E84-426E-40DD-AFC4-6F175D3DCCD1}">
+              <a14:hiddenFill xmlns:a14="http://schemas.microsoft.com/office/drawing/2010/main">
+                <a:solidFill>
+                  <a:srgbClr val="FFFFFF"/>
+                </a:solidFill>
+              </a14:hiddenFill>
+            </a:ext>
+          </a:extLst>
+        </p:spPr>
+      </p:pic>
+      <p:sp>
+        <p:nvSpPr>
+          <p:cNvPr id="6" name="TextBox 5">
+            <a:extLst>
+              <a:ext uri="{FF2B5EF4-FFF2-40B4-BE49-F238E27FC236}">
+                <a16:creationId xmlns:a16="http://schemas.microsoft.com/office/drawing/2014/main" id="{7DFDAA41-56D3-304A-6D96-0C06BDC02C0E}"/>
               </a:ext>
             </a:extLst>
           </p:cNvPr>
@@ -9135,8 +10209,8 @@
         </p:nvSpPr>
         <p:spPr>
           <a:xfrm>
-            <a:off x="2377656" y="2999399"/>
-            <a:ext cx="144601" cy="241470"/>
+            <a:off x="2520712" y="5065773"/>
+            <a:ext cx="1250663" cy="646331"/>
           </a:xfrm>
           <a:prstGeom prst="rect">
             <a:avLst/>
@@ -9144,126 +10218,159 @@
           <a:noFill/>
         </p:spPr>
         <p:txBody>
-          <a:bodyPr wrap="square" rtlCol="0">
+          <a:bodyPr wrap="none" rtlCol="0">
             <a:spAutoFit/>
           </a:bodyPr>
           <a:lstStyle/>
           <a:p>
-            <a:endParaRPr lang="en-US" dirty="0"/>
+            <a:pPr algn="ctr"/>
+            <a:r>
+              <a:rPr lang="en-US" i="1" dirty="0"/>
+              <a:t>historical</a:t>
+            </a:r>
+          </a:p>
+          <a:p>
+            <a:pPr algn="ctr"/>
+            <a:r>
+              <a:rPr lang="en-US" i="1" dirty="0"/>
+              <a:t>1950-2000</a:t>
+            </a:r>
           </a:p>
         </p:txBody>
       </p:sp>
       <p:sp>
         <p:nvSpPr>
-          <p:cNvPr id="10" name="Title 1">
-            <a:extLst>
-              <a:ext uri="{FF2B5EF4-FFF2-40B4-BE49-F238E27FC236}">
-                <a16:creationId xmlns:a16="http://schemas.microsoft.com/office/drawing/2014/main" id="{F4861A18-A84B-ED60-DBA4-21D77706193F}"/>
-              </a:ext>
-            </a:extLst>
-          </p:cNvPr>
-          <p:cNvSpPr>
-            <a:spLocks noGrp="1"/>
-          </p:cNvSpPr>
-          <p:nvPr>
-            <p:ph type="title"/>
-          </p:nvPr>
+          <p:cNvPr id="7" name="TextBox 6">
+            <a:extLst>
+              <a:ext uri="{FF2B5EF4-FFF2-40B4-BE49-F238E27FC236}">
+                <a16:creationId xmlns:a16="http://schemas.microsoft.com/office/drawing/2014/main" id="{1589D96A-11F1-262E-ADC2-7C1B4238F616}"/>
+              </a:ext>
+            </a:extLst>
+          </p:cNvPr>
+          <p:cNvSpPr txBox="1"/>
+          <p:nvPr/>
         </p:nvSpPr>
         <p:spPr>
           <a:xfrm>
-            <a:off x="3344718" y="365125"/>
-            <a:ext cx="8009082" cy="1325563"/>
-          </a:xfrm>
-        </p:spPr>
-        <p:txBody>
-          <a:bodyPr>
-            <a:normAutofit/>
-          </a:bodyPr>
-          <a:lstStyle/>
-          <a:p>
-            <a:pPr algn="ctr"/>
-            <a:r>
-              <a:rPr lang="en-US" sz="3600" dirty="0">
-                <a:solidFill>
-                  <a:srgbClr val="0C13E4"/>
-                </a:solidFill>
-                <a:latin typeface="Gill Sans MT" panose="020B0502020104020203" pitchFamily="34" charset="77"/>
-              </a:rPr>
-              <a:t>Ok, but what does it mean </a:t>
-            </a:r>
-            <a:br>
-              <a:rPr lang="en-US" sz="3600" dirty="0">
-                <a:solidFill>
-                  <a:srgbClr val="0C13E4"/>
-                </a:solidFill>
-                <a:latin typeface="Gill Sans MT" panose="020B0502020104020203" pitchFamily="34" charset="77"/>
-              </a:rPr>
-            </a:br>
-            <a:r>
-              <a:rPr lang="en-US" sz="3600" dirty="0">
-                <a:solidFill>
-                  <a:srgbClr val="0C13E4"/>
-                </a:solidFill>
-                <a:latin typeface="Gill Sans MT" panose="020B0502020104020203" pitchFamily="34" charset="77"/>
-              </a:rPr>
-              <a:t>for the CO</a:t>
-            </a:r>
-            <a:r>
-              <a:rPr lang="en-US" sz="3600" baseline="-25000" dirty="0">
-                <a:solidFill>
-                  <a:srgbClr val="0C13E4"/>
-                </a:solidFill>
-                <a:latin typeface="Gill Sans MT" panose="020B0502020104020203" pitchFamily="34" charset="77"/>
-              </a:rPr>
-              <a:t>2</a:t>
-            </a:r>
-            <a:r>
-              <a:rPr lang="en-US" sz="3600" dirty="0">
-                <a:solidFill>
-                  <a:srgbClr val="0C13E4"/>
-                </a:solidFill>
-                <a:latin typeface="Gill Sans MT" panose="020B0502020104020203" pitchFamily="34" charset="77"/>
-              </a:rPr>
-              <a:t> sink?</a:t>
-            </a:r>
-            <a:endParaRPr lang="en-US" sz="3600" dirty="0"/>
-          </a:p>
-        </p:txBody>
-      </p:sp>
-      <p:pic>
-        <p:nvPicPr>
-          <p:cNvPr id="2" name="Picture 1">
-            <a:extLst>
-              <a:ext uri="{FF2B5EF4-FFF2-40B4-BE49-F238E27FC236}">
-                <a16:creationId xmlns:a16="http://schemas.microsoft.com/office/drawing/2014/main" id="{AD9144FD-1A72-4A4D-3C6D-BB569CDB4A7E}"/>
-              </a:ext>
-            </a:extLst>
-          </p:cNvPr>
-          <p:cNvPicPr>
-            <a:picLocks noChangeAspect="1"/>
-          </p:cNvPicPr>
-          <p:nvPr/>
-        </p:nvPicPr>
-        <p:blipFill>
-          <a:blip r:embed="rId2"/>
-          <a:stretch>
-            <a:fillRect/>
-          </a:stretch>
-        </p:blipFill>
-        <p:spPr>
-          <a:xfrm>
-            <a:off x="186553" y="137161"/>
-            <a:ext cx="2739242" cy="1325563"/>
+            <a:off x="10234694" y="2168234"/>
+            <a:ext cx="1250663" cy="646331"/>
           </a:xfrm>
           <a:prstGeom prst="rect">
             <a:avLst/>
           </a:prstGeom>
+          <a:noFill/>
         </p:spPr>
-      </p:pic>
+        <p:txBody>
+          <a:bodyPr wrap="none" rtlCol="0">
+            <a:spAutoFit/>
+          </a:bodyPr>
+          <a:lstStyle/>
+          <a:p>
+            <a:pPr algn="ctr"/>
+            <a:r>
+              <a:rPr lang="en-US" i="1" dirty="0"/>
+              <a:t>SSP3</a:t>
+            </a:r>
+          </a:p>
+          <a:p>
+            <a:pPr algn="ctr"/>
+            <a:r>
+              <a:rPr lang="en-US" i="1" dirty="0"/>
+              <a:t>2050-2100</a:t>
+            </a:r>
+          </a:p>
+        </p:txBody>
+      </p:sp>
+      <p:sp>
+        <p:nvSpPr>
+          <p:cNvPr id="9" name="TextBox 8">
+            <a:extLst>
+              <a:ext uri="{FF2B5EF4-FFF2-40B4-BE49-F238E27FC236}">
+                <a16:creationId xmlns:a16="http://schemas.microsoft.com/office/drawing/2014/main" id="{2A2CEB9B-DCAD-1F9A-D55E-951309B6B915}"/>
+              </a:ext>
+            </a:extLst>
+          </p:cNvPr>
+          <p:cNvSpPr txBox="1"/>
+          <p:nvPr/>
+        </p:nvSpPr>
+        <p:spPr>
+          <a:xfrm>
+            <a:off x="10249934" y="4935818"/>
+            <a:ext cx="1250663" cy="646331"/>
+          </a:xfrm>
+          <a:prstGeom prst="rect">
+            <a:avLst/>
+          </a:prstGeom>
+          <a:noFill/>
+        </p:spPr>
+        <p:txBody>
+          <a:bodyPr wrap="none" rtlCol="0">
+            <a:spAutoFit/>
+          </a:bodyPr>
+          <a:lstStyle/>
+          <a:p>
+            <a:pPr algn="ctr"/>
+            <a:r>
+              <a:rPr lang="en-US" i="1" dirty="0"/>
+              <a:t>SSP1</a:t>
+            </a:r>
+          </a:p>
+          <a:p>
+            <a:pPr algn="ctr"/>
+            <a:r>
+              <a:rPr lang="en-US" i="1" dirty="0"/>
+              <a:t>2050-2100</a:t>
+            </a:r>
+          </a:p>
+        </p:txBody>
+      </p:sp>
+      <p:sp>
+        <p:nvSpPr>
+          <p:cNvPr id="3" name="TextBox 2">
+            <a:extLst>
+              <a:ext uri="{FF2B5EF4-FFF2-40B4-BE49-F238E27FC236}">
+                <a16:creationId xmlns:a16="http://schemas.microsoft.com/office/drawing/2014/main" id="{304E7DD3-3925-0EEC-A7C1-76459B693552}"/>
+              </a:ext>
+            </a:extLst>
+          </p:cNvPr>
+          <p:cNvSpPr txBox="1"/>
+          <p:nvPr/>
+        </p:nvSpPr>
+        <p:spPr>
+          <a:xfrm>
+            <a:off x="9213815" y="6308209"/>
+            <a:ext cx="2737466" cy="369332"/>
+          </a:xfrm>
+          <a:prstGeom prst="rect">
+            <a:avLst/>
+          </a:prstGeom>
+          <a:noFill/>
+        </p:spPr>
+        <p:txBody>
+          <a:bodyPr wrap="square">
+            <a:spAutoFit/>
+          </a:bodyPr>
+          <a:lstStyle/>
+          <a:p>
+            <a:pPr algn="ctr"/>
+            <a:r>
+              <a:rPr lang="en-CA" i="1" dirty="0">
+                <a:solidFill>
+                  <a:srgbClr val="000000"/>
+                </a:solidFill>
+                <a:latin typeface="Georgia" panose="02040502050405020303" pitchFamily="18" charset="0"/>
+                <a:cs typeface="Gill Sans" panose="020B0502020104020203" pitchFamily="34" charset="-79"/>
+              </a:rPr>
+              <a:t>year average</a:t>
+            </a:r>
+            <a:endParaRPr lang="en-US" i="1" dirty="0"/>
+          </a:p>
+        </p:txBody>
+      </p:sp>
     </p:spTree>
     <p:extLst>
       <p:ext uri="{BB962C8B-B14F-4D97-AF65-F5344CB8AC3E}">
-        <p14:creationId xmlns:p14="http://schemas.microsoft.com/office/powerpoint/2010/main" val="2802643277"/>
+        <p14:creationId xmlns:p14="http://schemas.microsoft.com/office/powerpoint/2010/main" val="1593079630"/>
       </p:ext>
     </p:extLst>
   </p:cSld>
@@ -9404,7 +10511,7 @@
           <p:cNvPr id="2" name="Picture 1">
             <a:extLst>
               <a:ext uri="{FF2B5EF4-FFF2-40B4-BE49-F238E27FC236}">
-                <a16:creationId xmlns:a16="http://schemas.microsoft.com/office/drawing/2014/main" id="{205014F2-CAC6-4252-26EF-4F15737440F7}"/>
+                <a16:creationId xmlns:a16="http://schemas.microsoft.com/office/drawing/2014/main" id="{AD9144FD-1A72-4A4D-3C6D-BB569CDB4A7E}"/>
               </a:ext>
             </a:extLst>
           </p:cNvPr>
@@ -9414,7 +10521,7 @@
           <p:nvPr/>
         </p:nvPicPr>
         <p:blipFill>
-          <a:blip r:embed="rId3"/>
+          <a:blip r:embed="rId2"/>
           <a:stretch>
             <a:fillRect/>
           </a:stretch>
@@ -9429,98 +10536,10 @@
           </a:prstGeom>
         </p:spPr>
       </p:pic>
-      <p:pic>
-        <p:nvPicPr>
-          <p:cNvPr id="11268" name="Picture 4">
-            <a:extLst>
-              <a:ext uri="{FF2B5EF4-FFF2-40B4-BE49-F238E27FC236}">
-                <a16:creationId xmlns:a16="http://schemas.microsoft.com/office/drawing/2014/main" id="{F9157BC0-E671-CFE5-FA97-FD10BE18BFAD}"/>
-              </a:ext>
-            </a:extLst>
-          </p:cNvPr>
-          <p:cNvPicPr>
-            <a:picLocks noChangeAspect="1" noChangeArrowheads="1"/>
-          </p:cNvPicPr>
-          <p:nvPr/>
-        </p:nvPicPr>
-        <p:blipFill rotWithShape="1">
-          <a:blip r:embed="rId4">
-            <a:extLst>
-              <a:ext uri="{28A0092B-C50C-407E-A947-70E740481C1C}">
-                <a14:useLocalDpi xmlns:a14="http://schemas.microsoft.com/office/drawing/2010/main" val="0"/>
-              </a:ext>
-            </a:extLst>
-          </a:blip>
-          <a:srcRect b="51913"/>
-          <a:stretch/>
-        </p:blipFill>
-        <p:spPr bwMode="auto">
-          <a:xfrm>
-            <a:off x="57437" y="2357976"/>
-            <a:ext cx="4785037" cy="3036098"/>
-          </a:xfrm>
-          <a:prstGeom prst="rect">
-            <a:avLst/>
-          </a:prstGeom>
-          <a:noFill/>
-          <a:extLst>
-            <a:ext uri="{909E8E84-426E-40DD-AFC4-6F175D3DCCD1}">
-              <a14:hiddenFill xmlns:a14="http://schemas.microsoft.com/office/drawing/2010/main">
-                <a:solidFill>
-                  <a:srgbClr val="FFFFFF"/>
-                </a:solidFill>
-              </a14:hiddenFill>
-            </a:ext>
-          </a:extLst>
-        </p:spPr>
-      </p:pic>
-      <p:sp>
-        <p:nvSpPr>
-          <p:cNvPr id="3" name="TextBox 2">
-            <a:extLst>
-              <a:ext uri="{FF2B5EF4-FFF2-40B4-BE49-F238E27FC236}">
-                <a16:creationId xmlns:a16="http://schemas.microsoft.com/office/drawing/2014/main" id="{DFE5C79D-B064-67B2-C0BE-5E4556C0E3D6}"/>
-              </a:ext>
-            </a:extLst>
-          </p:cNvPr>
-          <p:cNvSpPr txBox="1"/>
-          <p:nvPr/>
-        </p:nvSpPr>
-        <p:spPr>
-          <a:xfrm>
-            <a:off x="-287510" y="6446293"/>
-            <a:ext cx="2737466" cy="369332"/>
-          </a:xfrm>
-          <a:prstGeom prst="rect">
-            <a:avLst/>
-          </a:prstGeom>
-          <a:noFill/>
-        </p:spPr>
-        <p:txBody>
-          <a:bodyPr wrap="square">
-            <a:spAutoFit/>
-          </a:bodyPr>
-          <a:lstStyle/>
-          <a:p>
-            <a:pPr algn="ctr"/>
-            <a:r>
-              <a:rPr lang="en-CA" i="1" dirty="0">
-                <a:solidFill>
-                  <a:srgbClr val="000000"/>
-                </a:solidFill>
-                <a:latin typeface="Georgia" panose="02040502050405020303" pitchFamily="18" charset="0"/>
-                <a:cs typeface="Gill Sans" panose="020B0502020104020203" pitchFamily="34" charset="-79"/>
-              </a:rPr>
-              <a:t>year average</a:t>
-            </a:r>
-            <a:endParaRPr lang="en-US" i="1" dirty="0"/>
-          </a:p>
-        </p:txBody>
-      </p:sp>
     </p:spTree>
     <p:extLst>
       <p:ext uri="{BB962C8B-B14F-4D97-AF65-F5344CB8AC3E}">
-        <p14:creationId xmlns:p14="http://schemas.microsoft.com/office/powerpoint/2010/main" val="46269649"/>
+        <p14:creationId xmlns:p14="http://schemas.microsoft.com/office/powerpoint/2010/main" val="2802643277"/>
       </p:ext>
     </p:extLst>
   </p:cSld>
@@ -9805,7 +10824,7 @@
           <p:cNvPr id="2" name="Picture 1">
             <a:extLst>
               <a:ext uri="{FF2B5EF4-FFF2-40B4-BE49-F238E27FC236}">
-                <a16:creationId xmlns:a16="http://schemas.microsoft.com/office/drawing/2014/main" id="{03E20780-4D18-6493-5929-3563A8BA5111}"/>
+                <a16:creationId xmlns:a16="http://schemas.microsoft.com/office/drawing/2014/main" id="{205014F2-CAC6-4252-26EF-4F15737440F7}"/>
               </a:ext>
             </a:extLst>
           </p:cNvPr>
@@ -9832,10 +10851,10 @@
       </p:pic>
       <p:pic>
         <p:nvPicPr>
-          <p:cNvPr id="3" name="Picture 2">
-            <a:extLst>
-              <a:ext uri="{FF2B5EF4-FFF2-40B4-BE49-F238E27FC236}">
-                <a16:creationId xmlns:a16="http://schemas.microsoft.com/office/drawing/2014/main" id="{5D1BD610-4322-B781-F0B2-C0BC4A8EC7DB}"/>
+          <p:cNvPr id="11268" name="Picture 4">
+            <a:extLst>
+              <a:ext uri="{FF2B5EF4-FFF2-40B4-BE49-F238E27FC236}">
+                <a16:creationId xmlns:a16="http://schemas.microsoft.com/office/drawing/2014/main" id="{F9157BC0-E671-CFE5-FA97-FD10BE18BFAD}"/>
               </a:ext>
             </a:extLst>
           </p:cNvPr>
@@ -9846,405 +10865,6 @@
         </p:nvPicPr>
         <p:blipFill rotWithShape="1">
           <a:blip r:embed="rId4">
-            <a:extLst>
-              <a:ext uri="{28A0092B-C50C-407E-A947-70E740481C1C}">
-                <a14:useLocalDpi xmlns:a14="http://schemas.microsoft.com/office/drawing/2010/main" val="0"/>
-              </a:ext>
-            </a:extLst>
-          </a:blip>
-          <a:srcRect t="13735" r="64250" b="45849"/>
-          <a:stretch/>
-        </p:blipFill>
-        <p:spPr bwMode="auto">
-          <a:xfrm>
-            <a:off x="5127440" y="2779060"/>
-            <a:ext cx="2670630" cy="1980225"/>
-          </a:xfrm>
-          <a:prstGeom prst="rect">
-            <a:avLst/>
-          </a:prstGeom>
-          <a:noFill/>
-          <a:extLst>
-            <a:ext uri="{909E8E84-426E-40DD-AFC4-6F175D3DCCD1}">
-              <a14:hiddenFill xmlns:a14="http://schemas.microsoft.com/office/drawing/2010/main">
-                <a:solidFill>
-                  <a:srgbClr val="FFFFFF"/>
-                </a:solidFill>
-              </a14:hiddenFill>
-            </a:ext>
-          </a:extLst>
-        </p:spPr>
-      </p:pic>
-      <p:pic>
-        <p:nvPicPr>
-          <p:cNvPr id="6" name="Picture 2">
-            <a:extLst>
-              <a:ext uri="{FF2B5EF4-FFF2-40B4-BE49-F238E27FC236}">
-                <a16:creationId xmlns:a16="http://schemas.microsoft.com/office/drawing/2014/main" id="{C9FC65B0-3FF5-A812-2916-75184FF6E51F}"/>
-              </a:ext>
-            </a:extLst>
-          </p:cNvPr>
-          <p:cNvPicPr>
-            <a:picLocks noChangeAspect="1" noChangeArrowheads="1"/>
-          </p:cNvPicPr>
-          <p:nvPr/>
-        </p:nvPicPr>
-        <p:blipFill rotWithShape="1">
-          <a:blip r:embed="rId4">
-            <a:extLst>
-              <a:ext uri="{28A0092B-C50C-407E-A947-70E740481C1C}">
-                <a14:useLocalDpi xmlns:a14="http://schemas.microsoft.com/office/drawing/2010/main" val="0"/>
-              </a:ext>
-            </a:extLst>
-          </a:blip>
-          <a:srcRect l="68897" t="13450" b="48099"/>
-          <a:stretch/>
-        </p:blipFill>
-        <p:spPr bwMode="auto">
-          <a:xfrm>
-            <a:off x="8916275" y="1648529"/>
-            <a:ext cx="2292920" cy="1859153"/>
-          </a:xfrm>
-          <a:prstGeom prst="rect">
-            <a:avLst/>
-          </a:prstGeom>
-          <a:noFill/>
-          <a:extLst>
-            <a:ext uri="{909E8E84-426E-40DD-AFC4-6F175D3DCCD1}">
-              <a14:hiddenFill xmlns:a14="http://schemas.microsoft.com/office/drawing/2010/main">
-                <a:solidFill>
-                  <a:srgbClr val="FFFFFF"/>
-                </a:solidFill>
-              </a14:hiddenFill>
-            </a:ext>
-          </a:extLst>
-        </p:spPr>
-      </p:pic>
-      <p:pic>
-        <p:nvPicPr>
-          <p:cNvPr id="7" name="Picture 2">
-            <a:extLst>
-              <a:ext uri="{FF2B5EF4-FFF2-40B4-BE49-F238E27FC236}">
-                <a16:creationId xmlns:a16="http://schemas.microsoft.com/office/drawing/2014/main" id="{D9BA39E4-2750-017B-A459-3F47D6A7DF48}"/>
-              </a:ext>
-            </a:extLst>
-          </p:cNvPr>
-          <p:cNvPicPr>
-            <a:picLocks noChangeAspect="1" noChangeArrowheads="1"/>
-          </p:cNvPicPr>
-          <p:nvPr/>
-        </p:nvPicPr>
-        <p:blipFill rotWithShape="1">
-          <a:blip r:embed="rId4">
-            <a:extLst>
-              <a:ext uri="{28A0092B-C50C-407E-A947-70E740481C1C}">
-                <a14:useLocalDpi xmlns:a14="http://schemas.microsoft.com/office/drawing/2010/main" val="0"/>
-              </a:ext>
-            </a:extLst>
-          </a:blip>
-          <a:srcRect l="68897" t="59584"/>
-          <a:stretch/>
-        </p:blipFill>
-        <p:spPr bwMode="auto">
-          <a:xfrm>
-            <a:off x="8916275" y="4194132"/>
-            <a:ext cx="2323520" cy="1980226"/>
-          </a:xfrm>
-          <a:prstGeom prst="rect">
-            <a:avLst/>
-          </a:prstGeom>
-          <a:noFill/>
-          <a:extLst>
-            <a:ext uri="{909E8E84-426E-40DD-AFC4-6F175D3DCCD1}">
-              <a14:hiddenFill xmlns:a14="http://schemas.microsoft.com/office/drawing/2010/main">
-                <a:solidFill>
-                  <a:srgbClr val="FFFFFF"/>
-                </a:solidFill>
-              </a14:hiddenFill>
-            </a:ext>
-          </a:extLst>
-        </p:spPr>
-      </p:pic>
-      <p:pic>
-        <p:nvPicPr>
-          <p:cNvPr id="8" name="Picture 7">
-            <a:extLst>
-              <a:ext uri="{FF2B5EF4-FFF2-40B4-BE49-F238E27FC236}">
-                <a16:creationId xmlns:a16="http://schemas.microsoft.com/office/drawing/2014/main" id="{28C7931C-905A-250B-ABED-490A42859493}"/>
-              </a:ext>
-            </a:extLst>
-          </p:cNvPr>
-          <p:cNvPicPr>
-            <a:picLocks noChangeAspect="1" noChangeArrowheads="1"/>
-          </p:cNvPicPr>
-          <p:nvPr/>
-        </p:nvPicPr>
-        <p:blipFill rotWithShape="1">
-          <a:blip r:embed="rId4">
-            <a:extLst>
-              <a:ext uri="{28A0092B-C50C-407E-A947-70E740481C1C}">
-                <a14:useLocalDpi xmlns:a14="http://schemas.microsoft.com/office/drawing/2010/main" val="0"/>
-              </a:ext>
-            </a:extLst>
-          </a:blip>
-          <a:srcRect l="10209" t="13735" r="64250" b="78826"/>
-          <a:stretch/>
-        </p:blipFill>
-        <p:spPr bwMode="auto">
-          <a:xfrm>
-            <a:off x="9378349" y="4282267"/>
-            <a:ext cx="1907965" cy="364451"/>
-          </a:xfrm>
-          <a:prstGeom prst="rect">
-            <a:avLst/>
-          </a:prstGeom>
-          <a:noFill/>
-          <a:extLst>
-            <a:ext uri="{909E8E84-426E-40DD-AFC4-6F175D3DCCD1}">
-              <a14:hiddenFill xmlns:a14="http://schemas.microsoft.com/office/drawing/2010/main">
-                <a:solidFill>
-                  <a:srgbClr val="FFFFFF"/>
-                </a:solidFill>
-              </a14:hiddenFill>
-            </a:ext>
-          </a:extLst>
-        </p:spPr>
-      </p:pic>
-      <p:pic>
-        <p:nvPicPr>
-          <p:cNvPr id="11" name="Picture 10">
-            <a:extLst>
-              <a:ext uri="{FF2B5EF4-FFF2-40B4-BE49-F238E27FC236}">
-                <a16:creationId xmlns:a16="http://schemas.microsoft.com/office/drawing/2014/main" id="{B0A1AEA4-EC69-EEA4-F905-EBC2551B4116}"/>
-              </a:ext>
-            </a:extLst>
-          </p:cNvPr>
-          <p:cNvPicPr>
-            <a:picLocks noChangeAspect="1" noChangeArrowheads="1"/>
-          </p:cNvPicPr>
-          <p:nvPr/>
-        </p:nvPicPr>
-        <p:blipFill rotWithShape="1">
-          <a:blip r:embed="rId4">
-            <a:extLst>
-              <a:ext uri="{28A0092B-C50C-407E-A947-70E740481C1C}">
-                <a14:useLocalDpi xmlns:a14="http://schemas.microsoft.com/office/drawing/2010/main" val="0"/>
-              </a:ext>
-            </a:extLst>
-          </a:blip>
-          <a:srcRect t="13735" r="95920" b="45849"/>
-          <a:stretch/>
-        </p:blipFill>
-        <p:spPr bwMode="auto">
-          <a:xfrm>
-            <a:off x="8666847" y="4194132"/>
-            <a:ext cx="304800" cy="1980225"/>
-          </a:xfrm>
-          <a:prstGeom prst="rect">
-            <a:avLst/>
-          </a:prstGeom>
-          <a:noFill/>
-          <a:extLst>
-            <a:ext uri="{909E8E84-426E-40DD-AFC4-6F175D3DCCD1}">
-              <a14:hiddenFill xmlns:a14="http://schemas.microsoft.com/office/drawing/2010/main">
-                <a:solidFill>
-                  <a:srgbClr val="FFFFFF"/>
-                </a:solidFill>
-              </a14:hiddenFill>
-            </a:ext>
-          </a:extLst>
-        </p:spPr>
-      </p:pic>
-      <p:pic>
-        <p:nvPicPr>
-          <p:cNvPr id="13" name="Picture 12">
-            <a:extLst>
-              <a:ext uri="{FF2B5EF4-FFF2-40B4-BE49-F238E27FC236}">
-                <a16:creationId xmlns:a16="http://schemas.microsoft.com/office/drawing/2014/main" id="{8D45632C-5632-3BF9-7B15-C53C57D46658}"/>
-              </a:ext>
-            </a:extLst>
-          </p:cNvPr>
-          <p:cNvPicPr>
-            <a:picLocks noChangeAspect="1" noChangeArrowheads="1"/>
-          </p:cNvPicPr>
-          <p:nvPr/>
-        </p:nvPicPr>
-        <p:blipFill rotWithShape="1">
-          <a:blip r:embed="rId4">
-            <a:extLst>
-              <a:ext uri="{28A0092B-C50C-407E-A947-70E740481C1C}">
-                <a14:useLocalDpi xmlns:a14="http://schemas.microsoft.com/office/drawing/2010/main" val="0"/>
-              </a:ext>
-            </a:extLst>
-          </a:blip>
-          <a:srcRect t="13735" r="95920" b="45849"/>
-          <a:stretch/>
-        </p:blipFill>
-        <p:spPr bwMode="auto">
-          <a:xfrm>
-            <a:off x="8622492" y="1587992"/>
-            <a:ext cx="304800" cy="1980225"/>
-          </a:xfrm>
-          <a:prstGeom prst="rect">
-            <a:avLst/>
-          </a:prstGeom>
-          <a:noFill/>
-          <a:extLst>
-            <a:ext uri="{909E8E84-426E-40DD-AFC4-6F175D3DCCD1}">
-              <a14:hiddenFill xmlns:a14="http://schemas.microsoft.com/office/drawing/2010/main">
-                <a:solidFill>
-                  <a:srgbClr val="FFFFFF"/>
-                </a:solidFill>
-              </a14:hiddenFill>
-            </a:ext>
-          </a:extLst>
-        </p:spPr>
-      </p:pic>
-      <p:sp>
-        <p:nvSpPr>
-          <p:cNvPr id="17" name="TextBox 16">
-            <a:extLst>
-              <a:ext uri="{FF2B5EF4-FFF2-40B4-BE49-F238E27FC236}">
-                <a16:creationId xmlns:a16="http://schemas.microsoft.com/office/drawing/2014/main" id="{13EA565D-C510-F5B7-067E-0FD1C7005329}"/>
-              </a:ext>
-            </a:extLst>
-          </p:cNvPr>
-          <p:cNvSpPr txBox="1"/>
-          <p:nvPr/>
-        </p:nvSpPr>
-        <p:spPr>
-          <a:xfrm>
-            <a:off x="5945335" y="4745289"/>
-            <a:ext cx="1250663" cy="646331"/>
-          </a:xfrm>
-          <a:prstGeom prst="rect">
-            <a:avLst/>
-          </a:prstGeom>
-          <a:noFill/>
-        </p:spPr>
-        <p:txBody>
-          <a:bodyPr wrap="none" rtlCol="0">
-            <a:spAutoFit/>
-          </a:bodyPr>
-          <a:lstStyle/>
-          <a:p>
-            <a:pPr algn="ctr"/>
-            <a:r>
-              <a:rPr lang="en-US" i="1" dirty="0"/>
-              <a:t>historical</a:t>
-            </a:r>
-          </a:p>
-          <a:p>
-            <a:pPr algn="ctr"/>
-            <a:r>
-              <a:rPr lang="en-US" i="1" dirty="0"/>
-              <a:t>1950-2000</a:t>
-            </a:r>
-          </a:p>
-        </p:txBody>
-      </p:sp>
-      <p:sp>
-        <p:nvSpPr>
-          <p:cNvPr id="18" name="TextBox 17">
-            <a:extLst>
-              <a:ext uri="{FF2B5EF4-FFF2-40B4-BE49-F238E27FC236}">
-                <a16:creationId xmlns:a16="http://schemas.microsoft.com/office/drawing/2014/main" id="{F3817C94-4853-75B4-C5E1-462643E1F87F}"/>
-              </a:ext>
-            </a:extLst>
-          </p:cNvPr>
-          <p:cNvSpPr txBox="1"/>
-          <p:nvPr/>
-        </p:nvSpPr>
-        <p:spPr>
-          <a:xfrm>
-            <a:off x="9573520" y="1911708"/>
-            <a:ext cx="1250663" cy="646331"/>
-          </a:xfrm>
-          <a:prstGeom prst="rect">
-            <a:avLst/>
-          </a:prstGeom>
-          <a:noFill/>
-        </p:spPr>
-        <p:txBody>
-          <a:bodyPr wrap="none" rtlCol="0">
-            <a:spAutoFit/>
-          </a:bodyPr>
-          <a:lstStyle/>
-          <a:p>
-            <a:pPr algn="ctr"/>
-            <a:r>
-              <a:rPr lang="en-US" i="1" dirty="0"/>
-              <a:t>SSP3</a:t>
-            </a:r>
-          </a:p>
-          <a:p>
-            <a:pPr algn="ctr"/>
-            <a:r>
-              <a:rPr lang="en-US" i="1" dirty="0"/>
-              <a:t>2050-2100</a:t>
-            </a:r>
-          </a:p>
-        </p:txBody>
-      </p:sp>
-      <p:sp>
-        <p:nvSpPr>
-          <p:cNvPr id="19" name="TextBox 18">
-            <a:extLst>
-              <a:ext uri="{FF2B5EF4-FFF2-40B4-BE49-F238E27FC236}">
-                <a16:creationId xmlns:a16="http://schemas.microsoft.com/office/drawing/2014/main" id="{41E5DAE3-E09A-E654-D8BF-D581040D1861}"/>
-              </a:ext>
-            </a:extLst>
-          </p:cNvPr>
-          <p:cNvSpPr txBox="1"/>
-          <p:nvPr/>
-        </p:nvSpPr>
-        <p:spPr>
-          <a:xfrm>
-            <a:off x="9619078" y="4734853"/>
-            <a:ext cx="1250663" cy="646331"/>
-          </a:xfrm>
-          <a:prstGeom prst="rect">
-            <a:avLst/>
-          </a:prstGeom>
-          <a:noFill/>
-        </p:spPr>
-        <p:txBody>
-          <a:bodyPr wrap="none" rtlCol="0">
-            <a:spAutoFit/>
-          </a:bodyPr>
-          <a:lstStyle/>
-          <a:p>
-            <a:pPr algn="ctr"/>
-            <a:r>
-              <a:rPr lang="en-US" i="1" dirty="0"/>
-              <a:t>SSP1</a:t>
-            </a:r>
-          </a:p>
-          <a:p>
-            <a:pPr algn="ctr"/>
-            <a:r>
-              <a:rPr lang="en-US" i="1" dirty="0"/>
-              <a:t>2050-2100</a:t>
-            </a:r>
-          </a:p>
-        </p:txBody>
-      </p:sp>
-      <p:pic>
-        <p:nvPicPr>
-          <p:cNvPr id="22" name="Picture 4">
-            <a:extLst>
-              <a:ext uri="{FF2B5EF4-FFF2-40B4-BE49-F238E27FC236}">
-                <a16:creationId xmlns:a16="http://schemas.microsoft.com/office/drawing/2014/main" id="{88A34D05-162C-B925-9761-1CF850225FD9}"/>
-              </a:ext>
-            </a:extLst>
-          </p:cNvPr>
-          <p:cNvPicPr>
-            <a:picLocks noChangeAspect="1" noChangeArrowheads="1"/>
-          </p:cNvPicPr>
-          <p:nvPr/>
-        </p:nvPicPr>
-        <p:blipFill rotWithShape="1">
-          <a:blip r:embed="rId5">
             <a:extLst>
               <a:ext uri="{28A0092B-C50C-407E-A947-70E740481C1C}">
                 <a14:useLocalDpi xmlns:a14="http://schemas.microsoft.com/office/drawing/2010/main" val="0"/>
@@ -10276,10 +10896,10 @@
       </p:pic>
       <p:sp>
         <p:nvSpPr>
-          <p:cNvPr id="23" name="TextBox 22">
-            <a:extLst>
-              <a:ext uri="{FF2B5EF4-FFF2-40B4-BE49-F238E27FC236}">
-                <a16:creationId xmlns:a16="http://schemas.microsoft.com/office/drawing/2014/main" id="{CBFA0F10-3685-218C-1E39-B6E5F60B4E1B}"/>
+          <p:cNvPr id="3" name="TextBox 2">
+            <a:extLst>
+              <a:ext uri="{FF2B5EF4-FFF2-40B4-BE49-F238E27FC236}">
+                <a16:creationId xmlns:a16="http://schemas.microsoft.com/office/drawing/2014/main" id="{DFE5C79D-B064-67B2-C0BE-5E4556C0E3D6}"/>
               </a:ext>
             </a:extLst>
           </p:cNvPr>
@@ -10320,7 +10940,7 @@
     </p:spTree>
     <p:extLst>
       <p:ext uri="{BB962C8B-B14F-4D97-AF65-F5344CB8AC3E}">
-        <p14:creationId xmlns:p14="http://schemas.microsoft.com/office/powerpoint/2010/main" val="3820219229"/>
+        <p14:creationId xmlns:p14="http://schemas.microsoft.com/office/powerpoint/2010/main" val="46269649"/>
       </p:ext>
     </p:extLst>
   </p:cSld>
@@ -10347,96 +10967,6 @@
           <a:chExt cx="0" cy="0"/>
         </a:xfrm>
       </p:grpSpPr>
-      <p:pic>
-        <p:nvPicPr>
-          <p:cNvPr id="15" name="Picture 4">
-            <a:extLst>
-              <a:ext uri="{FF2B5EF4-FFF2-40B4-BE49-F238E27FC236}">
-                <a16:creationId xmlns:a16="http://schemas.microsoft.com/office/drawing/2014/main" id="{BF17A13B-6CB6-358A-7694-D280629D0762}"/>
-              </a:ext>
-            </a:extLst>
-          </p:cNvPr>
-          <p:cNvPicPr>
-            <a:picLocks noChangeAspect="1" noChangeArrowheads="1"/>
-          </p:cNvPicPr>
-          <p:nvPr/>
-        </p:nvPicPr>
-        <p:blipFill rotWithShape="1">
-          <a:blip r:embed="rId3">
-            <a:extLst>
-              <a:ext uri="{28A0092B-C50C-407E-A947-70E740481C1C}">
-                <a14:useLocalDpi xmlns:a14="http://schemas.microsoft.com/office/drawing/2010/main" val="0"/>
-              </a:ext>
-            </a:extLst>
-          </a:blip>
-          <a:srcRect l="67440" t="58219"/>
-          <a:stretch/>
-        </p:blipFill>
-        <p:spPr bwMode="auto">
-          <a:xfrm>
-            <a:off x="8813121" y="4095708"/>
-            <a:ext cx="2588834" cy="2177071"/>
-          </a:xfrm>
-          <a:prstGeom prst="rect">
-            <a:avLst/>
-          </a:prstGeom>
-          <a:noFill/>
-          <a:extLst>
-            <a:ext uri="{909E8E84-426E-40DD-AFC4-6F175D3DCCD1}">
-              <a14:hiddenFill xmlns:a14="http://schemas.microsoft.com/office/drawing/2010/main">
-                <a:solidFill>
-                  <a:srgbClr val="FFFFFF"/>
-                </a:solidFill>
-              </a14:hiddenFill>
-            </a:ext>
-          </a:extLst>
-        </p:spPr>
-      </p:pic>
-      <p:pic>
-        <p:nvPicPr>
-          <p:cNvPr id="14" name="Picture 4">
-            <a:extLst>
-              <a:ext uri="{FF2B5EF4-FFF2-40B4-BE49-F238E27FC236}">
-                <a16:creationId xmlns:a16="http://schemas.microsoft.com/office/drawing/2014/main" id="{331CF7CE-46B1-82E8-60CE-29FE1AFC031F}"/>
-              </a:ext>
-            </a:extLst>
-          </p:cNvPr>
-          <p:cNvPicPr>
-            <a:picLocks noChangeAspect="1" noChangeArrowheads="1"/>
-          </p:cNvPicPr>
-          <p:nvPr/>
-        </p:nvPicPr>
-        <p:blipFill rotWithShape="1">
-          <a:blip r:embed="rId3">
-            <a:extLst>
-              <a:ext uri="{28A0092B-C50C-407E-A947-70E740481C1C}">
-                <a14:useLocalDpi xmlns:a14="http://schemas.microsoft.com/office/drawing/2010/main" val="0"/>
-              </a:ext>
-            </a:extLst>
-          </a:blip>
-          <a:srcRect l="67634" t="13380" r="-438" b="47679"/>
-          <a:stretch/>
-        </p:blipFill>
-        <p:spPr bwMode="auto">
-          <a:xfrm>
-            <a:off x="8864097" y="1639340"/>
-            <a:ext cx="2545286" cy="1980225"/>
-          </a:xfrm>
-          <a:prstGeom prst="rect">
-            <a:avLst/>
-          </a:prstGeom>
-          <a:noFill/>
-          <a:extLst>
-            <a:ext uri="{909E8E84-426E-40DD-AFC4-6F175D3DCCD1}">
-              <a14:hiddenFill xmlns:a14="http://schemas.microsoft.com/office/drawing/2010/main">
-                <a:solidFill>
-                  <a:srgbClr val="FFFFFF"/>
-                </a:solidFill>
-              </a14:hiddenFill>
-            </a:ext>
-          </a:extLst>
-        </p:spPr>
-      </p:pic>
       <p:sp>
         <p:nvSpPr>
           <p:cNvPr id="4" name="TextBox 3">
@@ -10561,7 +11091,7 @@
           <p:nvPr/>
         </p:nvPicPr>
         <p:blipFill>
-          <a:blip r:embed="rId4"/>
+          <a:blip r:embed="rId3"/>
           <a:stretch>
             <a:fillRect/>
           </a:stretch>
@@ -10591,7 +11121,7 @@
           <p:nvPr/>
         </p:nvPicPr>
         <p:blipFill rotWithShape="1">
-          <a:blip r:embed="rId5">
+          <a:blip r:embed="rId4">
             <a:extLst>
               <a:ext uri="{28A0092B-C50C-407E-A947-70E740481C1C}">
                 <a14:useLocalDpi xmlns:a14="http://schemas.microsoft.com/office/drawing/2010/main" val="0"/>
@@ -10623,10 +11153,10 @@
       </p:pic>
       <p:pic>
         <p:nvPicPr>
-          <p:cNvPr id="11" name="Picture 10">
-            <a:extLst>
-              <a:ext uri="{FF2B5EF4-FFF2-40B4-BE49-F238E27FC236}">
-                <a16:creationId xmlns:a16="http://schemas.microsoft.com/office/drawing/2014/main" id="{B0A1AEA4-EC69-EEA4-F905-EBC2551B4116}"/>
+          <p:cNvPr id="6" name="Picture 2">
+            <a:extLst>
+              <a:ext uri="{FF2B5EF4-FFF2-40B4-BE49-F238E27FC236}">
+                <a16:creationId xmlns:a16="http://schemas.microsoft.com/office/drawing/2014/main" id="{C9FC65B0-3FF5-A812-2916-75184FF6E51F}"/>
               </a:ext>
             </a:extLst>
           </p:cNvPr>
@@ -10636,7 +11166,142 @@
           <p:nvPr/>
         </p:nvPicPr>
         <p:blipFill rotWithShape="1">
-          <a:blip r:embed="rId5">
+          <a:blip r:embed="rId4">
+            <a:extLst>
+              <a:ext uri="{28A0092B-C50C-407E-A947-70E740481C1C}">
+                <a14:useLocalDpi xmlns:a14="http://schemas.microsoft.com/office/drawing/2010/main" val="0"/>
+              </a:ext>
+            </a:extLst>
+          </a:blip>
+          <a:srcRect l="68897" t="13450" b="48099"/>
+          <a:stretch/>
+        </p:blipFill>
+        <p:spPr bwMode="auto">
+          <a:xfrm>
+            <a:off x="8916275" y="1648529"/>
+            <a:ext cx="2292920" cy="1859153"/>
+          </a:xfrm>
+          <a:prstGeom prst="rect">
+            <a:avLst/>
+          </a:prstGeom>
+          <a:noFill/>
+          <a:extLst>
+            <a:ext uri="{909E8E84-426E-40DD-AFC4-6F175D3DCCD1}">
+              <a14:hiddenFill xmlns:a14="http://schemas.microsoft.com/office/drawing/2010/main">
+                <a:solidFill>
+                  <a:srgbClr val="FFFFFF"/>
+                </a:solidFill>
+              </a14:hiddenFill>
+            </a:ext>
+          </a:extLst>
+        </p:spPr>
+      </p:pic>
+      <p:pic>
+        <p:nvPicPr>
+          <p:cNvPr id="7" name="Picture 2">
+            <a:extLst>
+              <a:ext uri="{FF2B5EF4-FFF2-40B4-BE49-F238E27FC236}">
+                <a16:creationId xmlns:a16="http://schemas.microsoft.com/office/drawing/2014/main" id="{D9BA39E4-2750-017B-A459-3F47D6A7DF48}"/>
+              </a:ext>
+            </a:extLst>
+          </p:cNvPr>
+          <p:cNvPicPr>
+            <a:picLocks noChangeAspect="1" noChangeArrowheads="1"/>
+          </p:cNvPicPr>
+          <p:nvPr/>
+        </p:nvPicPr>
+        <p:blipFill rotWithShape="1">
+          <a:blip r:embed="rId4">
+            <a:extLst>
+              <a:ext uri="{28A0092B-C50C-407E-A947-70E740481C1C}">
+                <a14:useLocalDpi xmlns:a14="http://schemas.microsoft.com/office/drawing/2010/main" val="0"/>
+              </a:ext>
+            </a:extLst>
+          </a:blip>
+          <a:srcRect l="68897" t="59584"/>
+          <a:stretch/>
+        </p:blipFill>
+        <p:spPr bwMode="auto">
+          <a:xfrm>
+            <a:off x="8916275" y="4194132"/>
+            <a:ext cx="2323520" cy="1980226"/>
+          </a:xfrm>
+          <a:prstGeom prst="rect">
+            <a:avLst/>
+          </a:prstGeom>
+          <a:noFill/>
+          <a:extLst>
+            <a:ext uri="{909E8E84-426E-40DD-AFC4-6F175D3DCCD1}">
+              <a14:hiddenFill xmlns:a14="http://schemas.microsoft.com/office/drawing/2010/main">
+                <a:solidFill>
+                  <a:srgbClr val="FFFFFF"/>
+                </a:solidFill>
+              </a14:hiddenFill>
+            </a:ext>
+          </a:extLst>
+        </p:spPr>
+      </p:pic>
+      <p:pic>
+        <p:nvPicPr>
+          <p:cNvPr id="8" name="Picture 7">
+            <a:extLst>
+              <a:ext uri="{FF2B5EF4-FFF2-40B4-BE49-F238E27FC236}">
+                <a16:creationId xmlns:a16="http://schemas.microsoft.com/office/drawing/2014/main" id="{28C7931C-905A-250B-ABED-490A42859493}"/>
+              </a:ext>
+            </a:extLst>
+          </p:cNvPr>
+          <p:cNvPicPr>
+            <a:picLocks noChangeAspect="1" noChangeArrowheads="1"/>
+          </p:cNvPicPr>
+          <p:nvPr/>
+        </p:nvPicPr>
+        <p:blipFill rotWithShape="1">
+          <a:blip r:embed="rId4">
+            <a:extLst>
+              <a:ext uri="{28A0092B-C50C-407E-A947-70E740481C1C}">
+                <a14:useLocalDpi xmlns:a14="http://schemas.microsoft.com/office/drawing/2010/main" val="0"/>
+              </a:ext>
+            </a:extLst>
+          </a:blip>
+          <a:srcRect l="10209" t="13735" r="64250" b="78826"/>
+          <a:stretch/>
+        </p:blipFill>
+        <p:spPr bwMode="auto">
+          <a:xfrm>
+            <a:off x="9378349" y="4282267"/>
+            <a:ext cx="1907965" cy="364451"/>
+          </a:xfrm>
+          <a:prstGeom prst="rect">
+            <a:avLst/>
+          </a:prstGeom>
+          <a:noFill/>
+          <a:extLst>
+            <a:ext uri="{909E8E84-426E-40DD-AFC4-6F175D3DCCD1}">
+              <a14:hiddenFill xmlns:a14="http://schemas.microsoft.com/office/drawing/2010/main">
+                <a:solidFill>
+                  <a:srgbClr val="FFFFFF"/>
+                </a:solidFill>
+              </a14:hiddenFill>
+            </a:ext>
+          </a:extLst>
+        </p:spPr>
+      </p:pic>
+      <p:pic>
+        <p:nvPicPr>
+          <p:cNvPr id="11" name="Picture 10">
+            <a:extLst>
+              <a:ext uri="{FF2B5EF4-FFF2-40B4-BE49-F238E27FC236}">
+                <a16:creationId xmlns:a16="http://schemas.microsoft.com/office/drawing/2014/main" id="{B0A1AEA4-EC69-EEA4-F905-EBC2551B4116}"/>
+              </a:ext>
+            </a:extLst>
+          </p:cNvPr>
+          <p:cNvPicPr>
+            <a:picLocks noChangeAspect="1" noChangeArrowheads="1"/>
+          </p:cNvPicPr>
+          <p:nvPr/>
+        </p:nvPicPr>
+        <p:blipFill rotWithShape="1">
+          <a:blip r:embed="rId4">
             <a:extLst>
               <a:ext uri="{28A0092B-C50C-407E-A947-70E740481C1C}">
                 <a14:useLocalDpi xmlns:a14="http://schemas.microsoft.com/office/drawing/2010/main" val="0"/>
@@ -10681,7 +11346,7 @@
           <p:nvPr/>
         </p:nvPicPr>
         <p:blipFill rotWithShape="1">
-          <a:blip r:embed="rId5">
+          <a:blip r:embed="rId4">
             <a:extLst>
               <a:ext uri="{28A0092B-C50C-407E-A947-70E740481C1C}">
                 <a14:useLocalDpi xmlns:a14="http://schemas.microsoft.com/office/drawing/2010/main" val="0"/>
@@ -10693,7 +11358,7 @@
         </p:blipFill>
         <p:spPr bwMode="auto">
           <a:xfrm>
-            <a:off x="8711697" y="1724812"/>
+            <a:off x="8622492" y="1587992"/>
             <a:ext cx="304800" cy="1980225"/>
           </a:xfrm>
           <a:prstGeom prst="rect">
@@ -10711,12 +11376,141 @@
           </a:extLst>
         </p:spPr>
       </p:pic>
+      <p:sp>
+        <p:nvSpPr>
+          <p:cNvPr id="17" name="TextBox 16">
+            <a:extLst>
+              <a:ext uri="{FF2B5EF4-FFF2-40B4-BE49-F238E27FC236}">
+                <a16:creationId xmlns:a16="http://schemas.microsoft.com/office/drawing/2014/main" id="{13EA565D-C510-F5B7-067E-0FD1C7005329}"/>
+              </a:ext>
+            </a:extLst>
+          </p:cNvPr>
+          <p:cNvSpPr txBox="1"/>
+          <p:nvPr/>
+        </p:nvSpPr>
+        <p:spPr>
+          <a:xfrm>
+            <a:off x="5945335" y="4745289"/>
+            <a:ext cx="1250663" cy="646331"/>
+          </a:xfrm>
+          <a:prstGeom prst="rect">
+            <a:avLst/>
+          </a:prstGeom>
+          <a:noFill/>
+        </p:spPr>
+        <p:txBody>
+          <a:bodyPr wrap="none" rtlCol="0">
+            <a:spAutoFit/>
+          </a:bodyPr>
+          <a:lstStyle/>
+          <a:p>
+            <a:pPr algn="ctr"/>
+            <a:r>
+              <a:rPr lang="en-US" i="1" dirty="0"/>
+              <a:t>historical</a:t>
+            </a:r>
+          </a:p>
+          <a:p>
+            <a:pPr algn="ctr"/>
+            <a:r>
+              <a:rPr lang="en-US" i="1" dirty="0"/>
+              <a:t>1950-2000</a:t>
+            </a:r>
+          </a:p>
+        </p:txBody>
+      </p:sp>
+      <p:sp>
+        <p:nvSpPr>
+          <p:cNvPr id="18" name="TextBox 17">
+            <a:extLst>
+              <a:ext uri="{FF2B5EF4-FFF2-40B4-BE49-F238E27FC236}">
+                <a16:creationId xmlns:a16="http://schemas.microsoft.com/office/drawing/2014/main" id="{F3817C94-4853-75B4-C5E1-462643E1F87F}"/>
+              </a:ext>
+            </a:extLst>
+          </p:cNvPr>
+          <p:cNvSpPr txBox="1"/>
+          <p:nvPr/>
+        </p:nvSpPr>
+        <p:spPr>
+          <a:xfrm>
+            <a:off x="9573520" y="1911708"/>
+            <a:ext cx="1250663" cy="646331"/>
+          </a:xfrm>
+          <a:prstGeom prst="rect">
+            <a:avLst/>
+          </a:prstGeom>
+          <a:noFill/>
+        </p:spPr>
+        <p:txBody>
+          <a:bodyPr wrap="none" rtlCol="0">
+            <a:spAutoFit/>
+          </a:bodyPr>
+          <a:lstStyle/>
+          <a:p>
+            <a:pPr algn="ctr"/>
+            <a:r>
+              <a:rPr lang="en-US" i="1" dirty="0"/>
+              <a:t>SSP3</a:t>
+            </a:r>
+          </a:p>
+          <a:p>
+            <a:pPr algn="ctr"/>
+            <a:r>
+              <a:rPr lang="en-US" i="1" dirty="0"/>
+              <a:t>2050-2100</a:t>
+            </a:r>
+          </a:p>
+        </p:txBody>
+      </p:sp>
+      <p:sp>
+        <p:nvSpPr>
+          <p:cNvPr id="19" name="TextBox 18">
+            <a:extLst>
+              <a:ext uri="{FF2B5EF4-FFF2-40B4-BE49-F238E27FC236}">
+                <a16:creationId xmlns:a16="http://schemas.microsoft.com/office/drawing/2014/main" id="{41E5DAE3-E09A-E654-D8BF-D581040D1861}"/>
+              </a:ext>
+            </a:extLst>
+          </p:cNvPr>
+          <p:cNvSpPr txBox="1"/>
+          <p:nvPr/>
+        </p:nvSpPr>
+        <p:spPr>
+          <a:xfrm>
+            <a:off x="9619078" y="4734853"/>
+            <a:ext cx="1250663" cy="646331"/>
+          </a:xfrm>
+          <a:prstGeom prst="rect">
+            <a:avLst/>
+          </a:prstGeom>
+          <a:noFill/>
+        </p:spPr>
+        <p:txBody>
+          <a:bodyPr wrap="none" rtlCol="0">
+            <a:spAutoFit/>
+          </a:bodyPr>
+          <a:lstStyle/>
+          <a:p>
+            <a:pPr algn="ctr"/>
+            <a:r>
+              <a:rPr lang="en-US" i="1" dirty="0"/>
+              <a:t>SSP1</a:t>
+            </a:r>
+          </a:p>
+          <a:p>
+            <a:pPr algn="ctr"/>
+            <a:r>
+              <a:rPr lang="en-US" i="1" dirty="0"/>
+              <a:t>2050-2100</a:t>
+            </a:r>
+          </a:p>
+        </p:txBody>
+      </p:sp>
       <p:pic>
         <p:nvPicPr>
-          <p:cNvPr id="9" name="Picture 4">
-            <a:extLst>
-              <a:ext uri="{FF2B5EF4-FFF2-40B4-BE49-F238E27FC236}">
-                <a16:creationId xmlns:a16="http://schemas.microsoft.com/office/drawing/2014/main" id="{E62FFE50-C2C1-2B46-F019-563C1846A798}"/>
+          <p:cNvPr id="22" name="Picture 4">
+            <a:extLst>
+              <a:ext uri="{FF2B5EF4-FFF2-40B4-BE49-F238E27FC236}">
+                <a16:creationId xmlns:a16="http://schemas.microsoft.com/office/drawing/2014/main" id="{88A34D05-162C-B925-9761-1CF850225FD9}"/>
               </a:ext>
             </a:extLst>
           </p:cNvPr>
@@ -10726,52 +11520,7 @@
           <p:nvPr/>
         </p:nvPicPr>
         <p:blipFill rotWithShape="1">
-          <a:blip r:embed="rId3">
-            <a:extLst>
-              <a:ext uri="{28A0092B-C50C-407E-A947-70E740481C1C}">
-                <a14:useLocalDpi xmlns:a14="http://schemas.microsoft.com/office/drawing/2010/main" val="0"/>
-              </a:ext>
-            </a:extLst>
-          </a:blip>
-          <a:srcRect l="4085" t="13577" r="64234" b="47482"/>
-          <a:stretch/>
-        </p:blipFill>
-        <p:spPr bwMode="auto">
-          <a:xfrm>
-            <a:off x="5410230" y="2779060"/>
-            <a:ext cx="2320871" cy="1869589"/>
-          </a:xfrm>
-          <a:prstGeom prst="rect">
-            <a:avLst/>
-          </a:prstGeom>
-          <a:noFill/>
-          <a:extLst>
-            <a:ext uri="{909E8E84-426E-40DD-AFC4-6F175D3DCCD1}">
-              <a14:hiddenFill xmlns:a14="http://schemas.microsoft.com/office/drawing/2010/main">
-                <a:solidFill>
-                  <a:srgbClr val="FFFFFF"/>
-                </a:solidFill>
-              </a14:hiddenFill>
-            </a:ext>
-          </a:extLst>
-        </p:spPr>
-      </p:pic>
-      <p:pic>
-        <p:nvPicPr>
-          <p:cNvPr id="22" name="Picture 4">
-            <a:extLst>
-              <a:ext uri="{FF2B5EF4-FFF2-40B4-BE49-F238E27FC236}">
-                <a16:creationId xmlns:a16="http://schemas.microsoft.com/office/drawing/2014/main" id="{2AA9B15B-AC59-27C8-2FFF-6009453173C1}"/>
-              </a:ext>
-            </a:extLst>
-          </p:cNvPr>
-          <p:cNvPicPr>
-            <a:picLocks noChangeAspect="1" noChangeArrowheads="1"/>
-          </p:cNvPicPr>
-          <p:nvPr/>
-        </p:nvPicPr>
-        <p:blipFill rotWithShape="1">
-          <a:blip r:embed="rId6">
+          <a:blip r:embed="rId5">
             <a:extLst>
               <a:ext uri="{28A0092B-C50C-407E-A947-70E740481C1C}">
                 <a14:useLocalDpi xmlns:a14="http://schemas.microsoft.com/office/drawing/2010/main" val="0"/>
@@ -10806,7 +11555,7 @@
           <p:cNvPr id="23" name="TextBox 22">
             <a:extLst>
               <a:ext uri="{FF2B5EF4-FFF2-40B4-BE49-F238E27FC236}">
-                <a16:creationId xmlns:a16="http://schemas.microsoft.com/office/drawing/2014/main" id="{7653589D-55B1-369E-882F-B830FEA4934F}"/>
+                <a16:creationId xmlns:a16="http://schemas.microsoft.com/office/drawing/2014/main" id="{CBFA0F10-3685-218C-1E39-B6E5F60B4E1B}"/>
               </a:ext>
             </a:extLst>
           </p:cNvPr>
@@ -10844,139 +11593,10 @@
           </a:p>
         </p:txBody>
       </p:sp>
-      <p:sp>
-        <p:nvSpPr>
-          <p:cNvPr id="24" name="TextBox 23">
-            <a:extLst>
-              <a:ext uri="{FF2B5EF4-FFF2-40B4-BE49-F238E27FC236}">
-                <a16:creationId xmlns:a16="http://schemas.microsoft.com/office/drawing/2014/main" id="{65BC5D4C-67F2-9879-588C-3DEB722F6ACA}"/>
-              </a:ext>
-            </a:extLst>
-          </p:cNvPr>
-          <p:cNvSpPr txBox="1"/>
-          <p:nvPr/>
-        </p:nvSpPr>
-        <p:spPr>
-          <a:xfrm>
-            <a:off x="5945335" y="4745289"/>
-            <a:ext cx="1250663" cy="646331"/>
-          </a:xfrm>
-          <a:prstGeom prst="rect">
-            <a:avLst/>
-          </a:prstGeom>
-          <a:noFill/>
-        </p:spPr>
-        <p:txBody>
-          <a:bodyPr wrap="none" rtlCol="0">
-            <a:spAutoFit/>
-          </a:bodyPr>
-          <a:lstStyle/>
-          <a:p>
-            <a:pPr algn="ctr"/>
-            <a:r>
-              <a:rPr lang="en-US" i="1" dirty="0"/>
-              <a:t>historical</a:t>
-            </a:r>
-          </a:p>
-          <a:p>
-            <a:pPr algn="ctr"/>
-            <a:r>
-              <a:rPr lang="en-US" i="1" dirty="0"/>
-              <a:t>1950-2000</a:t>
-            </a:r>
-          </a:p>
-        </p:txBody>
-      </p:sp>
-      <p:sp>
-        <p:nvSpPr>
-          <p:cNvPr id="25" name="TextBox 24">
-            <a:extLst>
-              <a:ext uri="{FF2B5EF4-FFF2-40B4-BE49-F238E27FC236}">
-                <a16:creationId xmlns:a16="http://schemas.microsoft.com/office/drawing/2014/main" id="{8072D573-AD32-DCE1-74AC-D4F120621F39}"/>
-              </a:ext>
-            </a:extLst>
-          </p:cNvPr>
-          <p:cNvSpPr txBox="1"/>
-          <p:nvPr/>
-        </p:nvSpPr>
-        <p:spPr>
-          <a:xfrm>
-            <a:off x="9573520" y="1911708"/>
-            <a:ext cx="1250663" cy="646331"/>
-          </a:xfrm>
-          <a:prstGeom prst="rect">
-            <a:avLst/>
-          </a:prstGeom>
-          <a:noFill/>
-        </p:spPr>
-        <p:txBody>
-          <a:bodyPr wrap="none" rtlCol="0">
-            <a:spAutoFit/>
-          </a:bodyPr>
-          <a:lstStyle/>
-          <a:p>
-            <a:pPr algn="ctr"/>
-            <a:r>
-              <a:rPr lang="en-US" i="1" dirty="0"/>
-              <a:t>SSP3</a:t>
-            </a:r>
-          </a:p>
-          <a:p>
-            <a:pPr algn="ctr"/>
-            <a:r>
-              <a:rPr lang="en-US" i="1" dirty="0"/>
-              <a:t>2050-2100</a:t>
-            </a:r>
-          </a:p>
-        </p:txBody>
-      </p:sp>
-      <p:sp>
-        <p:nvSpPr>
-          <p:cNvPr id="26" name="TextBox 25">
-            <a:extLst>
-              <a:ext uri="{FF2B5EF4-FFF2-40B4-BE49-F238E27FC236}">
-                <a16:creationId xmlns:a16="http://schemas.microsoft.com/office/drawing/2014/main" id="{39AAD14E-B6FB-3032-9F95-439B9A2F8314}"/>
-              </a:ext>
-            </a:extLst>
-          </p:cNvPr>
-          <p:cNvSpPr txBox="1"/>
-          <p:nvPr/>
-        </p:nvSpPr>
-        <p:spPr>
-          <a:xfrm>
-            <a:off x="9619078" y="4734853"/>
-            <a:ext cx="1250663" cy="646331"/>
-          </a:xfrm>
-          <a:prstGeom prst="rect">
-            <a:avLst/>
-          </a:prstGeom>
-          <a:noFill/>
-        </p:spPr>
-        <p:txBody>
-          <a:bodyPr wrap="none" rtlCol="0">
-            <a:spAutoFit/>
-          </a:bodyPr>
-          <a:lstStyle/>
-          <a:p>
-            <a:pPr algn="ctr"/>
-            <a:r>
-              <a:rPr lang="en-US" i="1" dirty="0"/>
-              <a:t>SSP1</a:t>
-            </a:r>
-          </a:p>
-          <a:p>
-            <a:pPr algn="ctr"/>
-            <a:r>
-              <a:rPr lang="en-US" i="1" dirty="0"/>
-              <a:t>2050-2100</a:t>
-            </a:r>
-          </a:p>
-        </p:txBody>
-      </p:sp>
     </p:spTree>
     <p:extLst>
       <p:ext uri="{BB962C8B-B14F-4D97-AF65-F5344CB8AC3E}">
-        <p14:creationId xmlns:p14="http://schemas.microsoft.com/office/powerpoint/2010/main" val="2216730215"/>
+        <p14:creationId xmlns:p14="http://schemas.microsoft.com/office/powerpoint/2010/main" val="3820219229"/>
       </p:ext>
     </p:extLst>
   </p:cSld>
@@ -11629,181 +12249,10 @@
           </a:p>
         </p:txBody>
       </p:sp>
-      <p:sp>
-        <p:nvSpPr>
-          <p:cNvPr id="5" name="TextBox 4">
-            <a:extLst>
-              <a:ext uri="{FF2B5EF4-FFF2-40B4-BE49-F238E27FC236}">
-                <a16:creationId xmlns:a16="http://schemas.microsoft.com/office/drawing/2014/main" id="{BB9A1153-02FD-9BCF-FF73-B255FC250088}"/>
-              </a:ext>
-            </a:extLst>
-          </p:cNvPr>
-          <p:cNvSpPr txBox="1"/>
-          <p:nvPr/>
-        </p:nvSpPr>
-        <p:spPr>
-          <a:xfrm>
-            <a:off x="5127440" y="1528250"/>
-            <a:ext cx="6450044" cy="5632311"/>
-          </a:xfrm>
-          <a:prstGeom prst="rect">
-            <a:avLst/>
-          </a:prstGeom>
-          <a:solidFill>
-            <a:schemeClr val="bg1"/>
-          </a:solidFill>
-        </p:spPr>
-        <p:txBody>
-          <a:bodyPr wrap="square">
-            <a:spAutoFit/>
-          </a:bodyPr>
-          <a:lstStyle/>
-          <a:p>
-            <a:pPr algn="ctr"/>
-            <a:endParaRPr lang="en-CA" sz="2400" dirty="0">
-              <a:solidFill>
-                <a:srgbClr val="000000"/>
-              </a:solidFill>
-              <a:latin typeface="Georgia" panose="02040502050405020303" pitchFamily="18" charset="0"/>
-              <a:cs typeface="Gill Sans" panose="020B0502020104020203" pitchFamily="34" charset="-79"/>
-            </a:endParaRPr>
-          </a:p>
-          <a:p>
-            <a:pPr algn="ctr"/>
-            <a:endParaRPr lang="en-CA" sz="2400" dirty="0">
-              <a:solidFill>
-                <a:srgbClr val="000000"/>
-              </a:solidFill>
-              <a:latin typeface="Georgia" panose="02040502050405020303" pitchFamily="18" charset="0"/>
-              <a:cs typeface="Gill Sans" panose="020B0502020104020203" pitchFamily="34" charset="-79"/>
-            </a:endParaRPr>
-          </a:p>
-          <a:p>
-            <a:pPr marL="457200" indent="-457200" algn="ctr">
-              <a:buAutoNum type="arabicPeriod"/>
-            </a:pPr>
-            <a:r>
-              <a:rPr lang="en-CA" sz="2400" dirty="0">
-                <a:solidFill>
-                  <a:srgbClr val="000000"/>
-                </a:solidFill>
-                <a:latin typeface="Georgia" panose="02040502050405020303" pitchFamily="18" charset="0"/>
-                <a:cs typeface="Gill Sans" panose="020B0502020104020203" pitchFamily="34" charset="-79"/>
-              </a:rPr>
-              <a:t>Both ozone and GHG act to modulate the winds and physical oceanographic conditions</a:t>
-            </a:r>
-          </a:p>
-          <a:p>
-            <a:pPr marL="457200" indent="-457200" algn="ctr">
-              <a:buAutoNum type="arabicPeriod"/>
-            </a:pPr>
-            <a:r>
-              <a:rPr lang="en-CA" sz="2400" dirty="0">
-                <a:solidFill>
-                  <a:srgbClr val="000000"/>
-                </a:solidFill>
-                <a:latin typeface="Georgia" panose="02040502050405020303" pitchFamily="18" charset="0"/>
-                <a:cs typeface="Gill Sans" panose="020B0502020104020203" pitchFamily="34" charset="-79"/>
-              </a:rPr>
-              <a:t>Controls shift from ozone to GHG dominance over the course of the 21</a:t>
-            </a:r>
-            <a:r>
-              <a:rPr lang="en-CA" sz="2400" baseline="30000" dirty="0">
-                <a:solidFill>
-                  <a:srgbClr val="000000"/>
-                </a:solidFill>
-                <a:latin typeface="Georgia" panose="02040502050405020303" pitchFamily="18" charset="0"/>
-                <a:cs typeface="Gill Sans" panose="020B0502020104020203" pitchFamily="34" charset="-79"/>
-              </a:rPr>
-              <a:t>st</a:t>
-            </a:r>
-            <a:r>
-              <a:rPr lang="en-CA" sz="2400" dirty="0">
-                <a:solidFill>
-                  <a:srgbClr val="000000"/>
-                </a:solidFill>
-                <a:latin typeface="Georgia" panose="02040502050405020303" pitchFamily="18" charset="0"/>
-                <a:cs typeface="Gill Sans" panose="020B0502020104020203" pitchFamily="34" charset="-79"/>
-              </a:rPr>
-              <a:t> century</a:t>
-            </a:r>
-            <a:endParaRPr lang="en-CA" sz="2400" b="0" dirty="0">
-              <a:solidFill>
-                <a:srgbClr val="000000"/>
-              </a:solidFill>
-              <a:effectLst/>
-              <a:latin typeface="Georgia" panose="02040502050405020303" pitchFamily="18" charset="0"/>
-              <a:cs typeface="Gill Sans" panose="020B0502020104020203" pitchFamily="34" charset="-79"/>
-            </a:endParaRPr>
-          </a:p>
-          <a:p>
-            <a:pPr marL="457200" indent="-457200" algn="ctr">
-              <a:buAutoNum type="arabicPeriod"/>
-            </a:pPr>
-            <a:r>
-              <a:rPr lang="en-CA" sz="2400" b="0" dirty="0">
-                <a:solidFill>
-                  <a:srgbClr val="000000"/>
-                </a:solidFill>
-                <a:effectLst/>
-                <a:latin typeface="Georgia" panose="02040502050405020303" pitchFamily="18" charset="0"/>
-                <a:cs typeface="Gill Sans" panose="020B0502020104020203" pitchFamily="34" charset="-79"/>
-              </a:rPr>
-              <a:t>Climate feedbacks, especially temperature, are important, but for the CO2 sink are secondary to the atmospheric CO2 effect </a:t>
-            </a:r>
-          </a:p>
-          <a:p>
-            <a:pPr marL="457200" indent="-457200" algn="ctr">
-              <a:buAutoNum type="arabicPeriod"/>
-            </a:pPr>
-            <a:endParaRPr lang="en-CA" sz="2400" dirty="0">
-              <a:solidFill>
-                <a:srgbClr val="000000"/>
-              </a:solidFill>
-              <a:latin typeface="Georgia" panose="02040502050405020303" pitchFamily="18" charset="0"/>
-              <a:cs typeface="Gill Sans" panose="020B0502020104020203" pitchFamily="34" charset="-79"/>
-            </a:endParaRPr>
-          </a:p>
-          <a:p>
-            <a:pPr marL="457200" indent="-457200" algn="ctr">
-              <a:buAutoNum type="arabicPeriod"/>
-            </a:pPr>
-            <a:endParaRPr lang="en-CA" sz="2400" dirty="0">
-              <a:solidFill>
-                <a:srgbClr val="000000"/>
-              </a:solidFill>
-              <a:latin typeface="Georgia" panose="02040502050405020303" pitchFamily="18" charset="0"/>
-              <a:cs typeface="Gill Sans" panose="020B0502020104020203" pitchFamily="34" charset="-79"/>
-            </a:endParaRPr>
-          </a:p>
-          <a:p>
-            <a:pPr marL="457200" indent="-457200" algn="ctr">
-              <a:buAutoNum type="arabicPeriod"/>
-            </a:pPr>
-            <a:endParaRPr lang="en-CA" sz="2400" dirty="0">
-              <a:solidFill>
-                <a:srgbClr val="000000"/>
-              </a:solidFill>
-              <a:latin typeface="Georgia" panose="02040502050405020303" pitchFamily="18" charset="0"/>
-              <a:cs typeface="Gill Sans" panose="020B0502020104020203" pitchFamily="34" charset="-79"/>
-            </a:endParaRPr>
-          </a:p>
-          <a:p>
-            <a:pPr algn="ctr"/>
-            <a:endParaRPr lang="en-CA" sz="2400" b="0" dirty="0">
-              <a:solidFill>
-                <a:srgbClr val="000000"/>
-              </a:solidFill>
-              <a:effectLst/>
-              <a:latin typeface="Georgia" panose="02040502050405020303" pitchFamily="18" charset="0"/>
-            </a:endParaRPr>
-          </a:p>
-        </p:txBody>
-      </p:sp>
     </p:spTree>
     <p:extLst>
       <p:ext uri="{BB962C8B-B14F-4D97-AF65-F5344CB8AC3E}">
-        <p14:creationId xmlns:p14="http://schemas.microsoft.com/office/powerpoint/2010/main" val="4136194199"/>
+        <p14:creationId xmlns:p14="http://schemas.microsoft.com/office/powerpoint/2010/main" val="2216730215"/>
       </p:ext>
     </p:extLst>
   </p:cSld>
@@ -11830,6 +12279,96 @@
           <a:chExt cx="0" cy="0"/>
         </a:xfrm>
       </p:grpSpPr>
+      <p:pic>
+        <p:nvPicPr>
+          <p:cNvPr id="15" name="Picture 4">
+            <a:extLst>
+              <a:ext uri="{FF2B5EF4-FFF2-40B4-BE49-F238E27FC236}">
+                <a16:creationId xmlns:a16="http://schemas.microsoft.com/office/drawing/2014/main" id="{BF17A13B-6CB6-358A-7694-D280629D0762}"/>
+              </a:ext>
+            </a:extLst>
+          </p:cNvPr>
+          <p:cNvPicPr>
+            <a:picLocks noChangeAspect="1" noChangeArrowheads="1"/>
+          </p:cNvPicPr>
+          <p:nvPr/>
+        </p:nvPicPr>
+        <p:blipFill rotWithShape="1">
+          <a:blip r:embed="rId3">
+            <a:extLst>
+              <a:ext uri="{28A0092B-C50C-407E-A947-70E740481C1C}">
+                <a14:useLocalDpi xmlns:a14="http://schemas.microsoft.com/office/drawing/2010/main" val="0"/>
+              </a:ext>
+            </a:extLst>
+          </a:blip>
+          <a:srcRect l="67440" t="58219"/>
+          <a:stretch/>
+        </p:blipFill>
+        <p:spPr bwMode="auto">
+          <a:xfrm>
+            <a:off x="8813121" y="4095708"/>
+            <a:ext cx="2588834" cy="2177071"/>
+          </a:xfrm>
+          <a:prstGeom prst="rect">
+            <a:avLst/>
+          </a:prstGeom>
+          <a:noFill/>
+          <a:extLst>
+            <a:ext uri="{909E8E84-426E-40DD-AFC4-6F175D3DCCD1}">
+              <a14:hiddenFill xmlns:a14="http://schemas.microsoft.com/office/drawing/2010/main">
+                <a:solidFill>
+                  <a:srgbClr val="FFFFFF"/>
+                </a:solidFill>
+              </a14:hiddenFill>
+            </a:ext>
+          </a:extLst>
+        </p:spPr>
+      </p:pic>
+      <p:pic>
+        <p:nvPicPr>
+          <p:cNvPr id="14" name="Picture 4">
+            <a:extLst>
+              <a:ext uri="{FF2B5EF4-FFF2-40B4-BE49-F238E27FC236}">
+                <a16:creationId xmlns:a16="http://schemas.microsoft.com/office/drawing/2014/main" id="{331CF7CE-46B1-82E8-60CE-29FE1AFC031F}"/>
+              </a:ext>
+            </a:extLst>
+          </p:cNvPr>
+          <p:cNvPicPr>
+            <a:picLocks noChangeAspect="1" noChangeArrowheads="1"/>
+          </p:cNvPicPr>
+          <p:nvPr/>
+        </p:nvPicPr>
+        <p:blipFill rotWithShape="1">
+          <a:blip r:embed="rId3">
+            <a:extLst>
+              <a:ext uri="{28A0092B-C50C-407E-A947-70E740481C1C}">
+                <a14:useLocalDpi xmlns:a14="http://schemas.microsoft.com/office/drawing/2010/main" val="0"/>
+              </a:ext>
+            </a:extLst>
+          </a:blip>
+          <a:srcRect l="67634" t="13380" r="-438" b="47679"/>
+          <a:stretch/>
+        </p:blipFill>
+        <p:spPr bwMode="auto">
+          <a:xfrm>
+            <a:off x="8864097" y="1639340"/>
+            <a:ext cx="2545286" cy="1980225"/>
+          </a:xfrm>
+          <a:prstGeom prst="rect">
+            <a:avLst/>
+          </a:prstGeom>
+          <a:noFill/>
+          <a:extLst>
+            <a:ext uri="{909E8E84-426E-40DD-AFC4-6F175D3DCCD1}">
+              <a14:hiddenFill xmlns:a14="http://schemas.microsoft.com/office/drawing/2010/main">
+                <a:solidFill>
+                  <a:srgbClr val="FFFFFF"/>
+                </a:solidFill>
+              </a14:hiddenFill>
+            </a:ext>
+          </a:extLst>
+        </p:spPr>
+      </p:pic>
       <p:sp>
         <p:nvSpPr>
           <p:cNvPr id="4" name="TextBox 3">
@@ -11880,7 +12419,7 @@
         </p:nvSpPr>
         <p:spPr>
           <a:xfrm>
-            <a:off x="1805262" y="3429000"/>
+            <a:off x="3344718" y="365125"/>
             <a:ext cx="8009082" cy="1325563"/>
           </a:xfrm>
         </p:spPr>
@@ -11898,16 +12437,790 @@
                 </a:solidFill>
                 <a:latin typeface="Gill Sans MT" panose="020B0502020104020203" pitchFamily="34" charset="77"/>
               </a:rPr>
-              <a:t>RANDOM OTHER SLIDES BEGIN HERE</a:t>
+              <a:t>Ok, but what does it mean </a:t>
+            </a:r>
+            <a:br>
+              <a:rPr lang="en-US" sz="3600" dirty="0">
+                <a:solidFill>
+                  <a:srgbClr val="0C13E4"/>
+                </a:solidFill>
+                <a:latin typeface="Gill Sans MT" panose="020B0502020104020203" pitchFamily="34" charset="77"/>
+              </a:rPr>
+            </a:br>
+            <a:r>
+              <a:rPr lang="en-US" sz="3600" dirty="0">
+                <a:solidFill>
+                  <a:srgbClr val="0C13E4"/>
+                </a:solidFill>
+                <a:latin typeface="Gill Sans MT" panose="020B0502020104020203" pitchFamily="34" charset="77"/>
+              </a:rPr>
+              <a:t>for the CO</a:t>
+            </a:r>
+            <a:r>
+              <a:rPr lang="en-US" sz="3600" baseline="-25000" dirty="0">
+                <a:solidFill>
+                  <a:srgbClr val="0C13E4"/>
+                </a:solidFill>
+                <a:latin typeface="Gill Sans MT" panose="020B0502020104020203" pitchFamily="34" charset="77"/>
+              </a:rPr>
+              <a:t>2</a:t>
+            </a:r>
+            <a:r>
+              <a:rPr lang="en-US" sz="3600" dirty="0">
+                <a:solidFill>
+                  <a:srgbClr val="0C13E4"/>
+                </a:solidFill>
+                <a:latin typeface="Gill Sans MT" panose="020B0502020104020203" pitchFamily="34" charset="77"/>
+              </a:rPr>
+              <a:t> sink?</a:t>
             </a:r>
             <a:endParaRPr lang="en-US" sz="3600" dirty="0"/>
+          </a:p>
+        </p:txBody>
+      </p:sp>
+      <p:pic>
+        <p:nvPicPr>
+          <p:cNvPr id="2" name="Picture 1">
+            <a:extLst>
+              <a:ext uri="{FF2B5EF4-FFF2-40B4-BE49-F238E27FC236}">
+                <a16:creationId xmlns:a16="http://schemas.microsoft.com/office/drawing/2014/main" id="{03E20780-4D18-6493-5929-3563A8BA5111}"/>
+              </a:ext>
+            </a:extLst>
+          </p:cNvPr>
+          <p:cNvPicPr>
+            <a:picLocks noChangeAspect="1"/>
+          </p:cNvPicPr>
+          <p:nvPr/>
+        </p:nvPicPr>
+        <p:blipFill>
+          <a:blip r:embed="rId4"/>
+          <a:stretch>
+            <a:fillRect/>
+          </a:stretch>
+        </p:blipFill>
+        <p:spPr>
+          <a:xfrm>
+            <a:off x="186553" y="137161"/>
+            <a:ext cx="2739242" cy="1325563"/>
+          </a:xfrm>
+          <a:prstGeom prst="rect">
+            <a:avLst/>
+          </a:prstGeom>
+        </p:spPr>
+      </p:pic>
+      <p:pic>
+        <p:nvPicPr>
+          <p:cNvPr id="3" name="Picture 2">
+            <a:extLst>
+              <a:ext uri="{FF2B5EF4-FFF2-40B4-BE49-F238E27FC236}">
+                <a16:creationId xmlns:a16="http://schemas.microsoft.com/office/drawing/2014/main" id="{5D1BD610-4322-B781-F0B2-C0BC4A8EC7DB}"/>
+              </a:ext>
+            </a:extLst>
+          </p:cNvPr>
+          <p:cNvPicPr>
+            <a:picLocks noChangeAspect="1" noChangeArrowheads="1"/>
+          </p:cNvPicPr>
+          <p:nvPr/>
+        </p:nvPicPr>
+        <p:blipFill rotWithShape="1">
+          <a:blip r:embed="rId5">
+            <a:extLst>
+              <a:ext uri="{28A0092B-C50C-407E-A947-70E740481C1C}">
+                <a14:useLocalDpi xmlns:a14="http://schemas.microsoft.com/office/drawing/2010/main" val="0"/>
+              </a:ext>
+            </a:extLst>
+          </a:blip>
+          <a:srcRect t="13735" r="64250" b="45849"/>
+          <a:stretch/>
+        </p:blipFill>
+        <p:spPr bwMode="auto">
+          <a:xfrm>
+            <a:off x="5127440" y="2779060"/>
+            <a:ext cx="2670630" cy="1980225"/>
+          </a:xfrm>
+          <a:prstGeom prst="rect">
+            <a:avLst/>
+          </a:prstGeom>
+          <a:noFill/>
+          <a:extLst>
+            <a:ext uri="{909E8E84-426E-40DD-AFC4-6F175D3DCCD1}">
+              <a14:hiddenFill xmlns:a14="http://schemas.microsoft.com/office/drawing/2010/main">
+                <a:solidFill>
+                  <a:srgbClr val="FFFFFF"/>
+                </a:solidFill>
+              </a14:hiddenFill>
+            </a:ext>
+          </a:extLst>
+        </p:spPr>
+      </p:pic>
+      <p:pic>
+        <p:nvPicPr>
+          <p:cNvPr id="11" name="Picture 10">
+            <a:extLst>
+              <a:ext uri="{FF2B5EF4-FFF2-40B4-BE49-F238E27FC236}">
+                <a16:creationId xmlns:a16="http://schemas.microsoft.com/office/drawing/2014/main" id="{B0A1AEA4-EC69-EEA4-F905-EBC2551B4116}"/>
+              </a:ext>
+            </a:extLst>
+          </p:cNvPr>
+          <p:cNvPicPr>
+            <a:picLocks noChangeAspect="1" noChangeArrowheads="1"/>
+          </p:cNvPicPr>
+          <p:nvPr/>
+        </p:nvPicPr>
+        <p:blipFill rotWithShape="1">
+          <a:blip r:embed="rId5">
+            <a:extLst>
+              <a:ext uri="{28A0092B-C50C-407E-A947-70E740481C1C}">
+                <a14:useLocalDpi xmlns:a14="http://schemas.microsoft.com/office/drawing/2010/main" val="0"/>
+              </a:ext>
+            </a:extLst>
+          </a:blip>
+          <a:srcRect t="13735" r="95920" b="45849"/>
+          <a:stretch/>
+        </p:blipFill>
+        <p:spPr bwMode="auto">
+          <a:xfrm>
+            <a:off x="8666847" y="4194132"/>
+            <a:ext cx="304800" cy="1980225"/>
+          </a:xfrm>
+          <a:prstGeom prst="rect">
+            <a:avLst/>
+          </a:prstGeom>
+          <a:noFill/>
+          <a:extLst>
+            <a:ext uri="{909E8E84-426E-40DD-AFC4-6F175D3DCCD1}">
+              <a14:hiddenFill xmlns:a14="http://schemas.microsoft.com/office/drawing/2010/main">
+                <a:solidFill>
+                  <a:srgbClr val="FFFFFF"/>
+                </a:solidFill>
+              </a14:hiddenFill>
+            </a:ext>
+          </a:extLst>
+        </p:spPr>
+      </p:pic>
+      <p:pic>
+        <p:nvPicPr>
+          <p:cNvPr id="13" name="Picture 12">
+            <a:extLst>
+              <a:ext uri="{FF2B5EF4-FFF2-40B4-BE49-F238E27FC236}">
+                <a16:creationId xmlns:a16="http://schemas.microsoft.com/office/drawing/2014/main" id="{8D45632C-5632-3BF9-7B15-C53C57D46658}"/>
+              </a:ext>
+            </a:extLst>
+          </p:cNvPr>
+          <p:cNvPicPr>
+            <a:picLocks noChangeAspect="1" noChangeArrowheads="1"/>
+          </p:cNvPicPr>
+          <p:nvPr/>
+        </p:nvPicPr>
+        <p:blipFill rotWithShape="1">
+          <a:blip r:embed="rId5">
+            <a:extLst>
+              <a:ext uri="{28A0092B-C50C-407E-A947-70E740481C1C}">
+                <a14:useLocalDpi xmlns:a14="http://schemas.microsoft.com/office/drawing/2010/main" val="0"/>
+              </a:ext>
+            </a:extLst>
+          </a:blip>
+          <a:srcRect t="13735" r="95920" b="45849"/>
+          <a:stretch/>
+        </p:blipFill>
+        <p:spPr bwMode="auto">
+          <a:xfrm>
+            <a:off x="8711697" y="1724812"/>
+            <a:ext cx="304800" cy="1980225"/>
+          </a:xfrm>
+          <a:prstGeom prst="rect">
+            <a:avLst/>
+          </a:prstGeom>
+          <a:noFill/>
+          <a:extLst>
+            <a:ext uri="{909E8E84-426E-40DD-AFC4-6F175D3DCCD1}">
+              <a14:hiddenFill xmlns:a14="http://schemas.microsoft.com/office/drawing/2010/main">
+                <a:solidFill>
+                  <a:srgbClr val="FFFFFF"/>
+                </a:solidFill>
+              </a14:hiddenFill>
+            </a:ext>
+          </a:extLst>
+        </p:spPr>
+      </p:pic>
+      <p:pic>
+        <p:nvPicPr>
+          <p:cNvPr id="9" name="Picture 4">
+            <a:extLst>
+              <a:ext uri="{FF2B5EF4-FFF2-40B4-BE49-F238E27FC236}">
+                <a16:creationId xmlns:a16="http://schemas.microsoft.com/office/drawing/2014/main" id="{E62FFE50-C2C1-2B46-F019-563C1846A798}"/>
+              </a:ext>
+            </a:extLst>
+          </p:cNvPr>
+          <p:cNvPicPr>
+            <a:picLocks noChangeAspect="1" noChangeArrowheads="1"/>
+          </p:cNvPicPr>
+          <p:nvPr/>
+        </p:nvPicPr>
+        <p:blipFill rotWithShape="1">
+          <a:blip r:embed="rId3">
+            <a:extLst>
+              <a:ext uri="{28A0092B-C50C-407E-A947-70E740481C1C}">
+                <a14:useLocalDpi xmlns:a14="http://schemas.microsoft.com/office/drawing/2010/main" val="0"/>
+              </a:ext>
+            </a:extLst>
+          </a:blip>
+          <a:srcRect l="4085" t="13577" r="64234" b="47482"/>
+          <a:stretch/>
+        </p:blipFill>
+        <p:spPr bwMode="auto">
+          <a:xfrm>
+            <a:off x="5410230" y="2779060"/>
+            <a:ext cx="2320871" cy="1869589"/>
+          </a:xfrm>
+          <a:prstGeom prst="rect">
+            <a:avLst/>
+          </a:prstGeom>
+          <a:noFill/>
+          <a:extLst>
+            <a:ext uri="{909E8E84-426E-40DD-AFC4-6F175D3DCCD1}">
+              <a14:hiddenFill xmlns:a14="http://schemas.microsoft.com/office/drawing/2010/main">
+                <a:solidFill>
+                  <a:srgbClr val="FFFFFF"/>
+                </a:solidFill>
+              </a14:hiddenFill>
+            </a:ext>
+          </a:extLst>
+        </p:spPr>
+      </p:pic>
+      <p:pic>
+        <p:nvPicPr>
+          <p:cNvPr id="22" name="Picture 4">
+            <a:extLst>
+              <a:ext uri="{FF2B5EF4-FFF2-40B4-BE49-F238E27FC236}">
+                <a16:creationId xmlns:a16="http://schemas.microsoft.com/office/drawing/2014/main" id="{2AA9B15B-AC59-27C8-2FFF-6009453173C1}"/>
+              </a:ext>
+            </a:extLst>
+          </p:cNvPr>
+          <p:cNvPicPr>
+            <a:picLocks noChangeAspect="1" noChangeArrowheads="1"/>
+          </p:cNvPicPr>
+          <p:nvPr/>
+        </p:nvPicPr>
+        <p:blipFill rotWithShape="1">
+          <a:blip r:embed="rId6">
+            <a:extLst>
+              <a:ext uri="{28A0092B-C50C-407E-A947-70E740481C1C}">
+                <a14:useLocalDpi xmlns:a14="http://schemas.microsoft.com/office/drawing/2010/main" val="0"/>
+              </a:ext>
+            </a:extLst>
+          </a:blip>
+          <a:srcRect b="51913"/>
+          <a:stretch/>
+        </p:blipFill>
+        <p:spPr bwMode="auto">
+          <a:xfrm>
+            <a:off x="57437" y="2357976"/>
+            <a:ext cx="4785037" cy="3036098"/>
+          </a:xfrm>
+          <a:prstGeom prst="rect">
+            <a:avLst/>
+          </a:prstGeom>
+          <a:noFill/>
+          <a:extLst>
+            <a:ext uri="{909E8E84-426E-40DD-AFC4-6F175D3DCCD1}">
+              <a14:hiddenFill xmlns:a14="http://schemas.microsoft.com/office/drawing/2010/main">
+                <a:solidFill>
+                  <a:srgbClr val="FFFFFF"/>
+                </a:solidFill>
+              </a14:hiddenFill>
+            </a:ext>
+          </a:extLst>
+        </p:spPr>
+      </p:pic>
+      <p:sp>
+        <p:nvSpPr>
+          <p:cNvPr id="23" name="TextBox 22">
+            <a:extLst>
+              <a:ext uri="{FF2B5EF4-FFF2-40B4-BE49-F238E27FC236}">
+                <a16:creationId xmlns:a16="http://schemas.microsoft.com/office/drawing/2014/main" id="{7653589D-55B1-369E-882F-B830FEA4934F}"/>
+              </a:ext>
+            </a:extLst>
+          </p:cNvPr>
+          <p:cNvSpPr txBox="1"/>
+          <p:nvPr/>
+        </p:nvSpPr>
+        <p:spPr>
+          <a:xfrm>
+            <a:off x="-287510" y="6446293"/>
+            <a:ext cx="2737466" cy="369332"/>
+          </a:xfrm>
+          <a:prstGeom prst="rect">
+            <a:avLst/>
+          </a:prstGeom>
+          <a:noFill/>
+        </p:spPr>
+        <p:txBody>
+          <a:bodyPr wrap="square">
+            <a:spAutoFit/>
+          </a:bodyPr>
+          <a:lstStyle/>
+          <a:p>
+            <a:pPr algn="ctr"/>
+            <a:r>
+              <a:rPr lang="en-CA" i="1" dirty="0">
+                <a:solidFill>
+                  <a:srgbClr val="000000"/>
+                </a:solidFill>
+                <a:latin typeface="Georgia" panose="02040502050405020303" pitchFamily="18" charset="0"/>
+                <a:cs typeface="Gill Sans" panose="020B0502020104020203" pitchFamily="34" charset="-79"/>
+              </a:rPr>
+              <a:t>year average</a:t>
+            </a:r>
+            <a:endParaRPr lang="en-US" i="1" dirty="0"/>
+          </a:p>
+        </p:txBody>
+      </p:sp>
+      <p:sp>
+        <p:nvSpPr>
+          <p:cNvPr id="24" name="TextBox 23">
+            <a:extLst>
+              <a:ext uri="{FF2B5EF4-FFF2-40B4-BE49-F238E27FC236}">
+                <a16:creationId xmlns:a16="http://schemas.microsoft.com/office/drawing/2014/main" id="{65BC5D4C-67F2-9879-588C-3DEB722F6ACA}"/>
+              </a:ext>
+            </a:extLst>
+          </p:cNvPr>
+          <p:cNvSpPr txBox="1"/>
+          <p:nvPr/>
+        </p:nvSpPr>
+        <p:spPr>
+          <a:xfrm>
+            <a:off x="5945335" y="4745289"/>
+            <a:ext cx="1250663" cy="646331"/>
+          </a:xfrm>
+          <a:prstGeom prst="rect">
+            <a:avLst/>
+          </a:prstGeom>
+          <a:noFill/>
+        </p:spPr>
+        <p:txBody>
+          <a:bodyPr wrap="none" rtlCol="0">
+            <a:spAutoFit/>
+          </a:bodyPr>
+          <a:lstStyle/>
+          <a:p>
+            <a:pPr algn="ctr"/>
+            <a:r>
+              <a:rPr lang="en-US" i="1" dirty="0"/>
+              <a:t>historical</a:t>
+            </a:r>
+          </a:p>
+          <a:p>
+            <a:pPr algn="ctr"/>
+            <a:r>
+              <a:rPr lang="en-US" i="1" dirty="0"/>
+              <a:t>1950-2000</a:t>
+            </a:r>
+          </a:p>
+        </p:txBody>
+      </p:sp>
+      <p:sp>
+        <p:nvSpPr>
+          <p:cNvPr id="25" name="TextBox 24">
+            <a:extLst>
+              <a:ext uri="{FF2B5EF4-FFF2-40B4-BE49-F238E27FC236}">
+                <a16:creationId xmlns:a16="http://schemas.microsoft.com/office/drawing/2014/main" id="{8072D573-AD32-DCE1-74AC-D4F120621F39}"/>
+              </a:ext>
+            </a:extLst>
+          </p:cNvPr>
+          <p:cNvSpPr txBox="1"/>
+          <p:nvPr/>
+        </p:nvSpPr>
+        <p:spPr>
+          <a:xfrm>
+            <a:off x="9573520" y="1911708"/>
+            <a:ext cx="1250663" cy="646331"/>
+          </a:xfrm>
+          <a:prstGeom prst="rect">
+            <a:avLst/>
+          </a:prstGeom>
+          <a:noFill/>
+        </p:spPr>
+        <p:txBody>
+          <a:bodyPr wrap="none" rtlCol="0">
+            <a:spAutoFit/>
+          </a:bodyPr>
+          <a:lstStyle/>
+          <a:p>
+            <a:pPr algn="ctr"/>
+            <a:r>
+              <a:rPr lang="en-US" i="1" dirty="0"/>
+              <a:t>SSP3</a:t>
+            </a:r>
+          </a:p>
+          <a:p>
+            <a:pPr algn="ctr"/>
+            <a:r>
+              <a:rPr lang="en-US" i="1" dirty="0"/>
+              <a:t>2050-2100</a:t>
+            </a:r>
+          </a:p>
+        </p:txBody>
+      </p:sp>
+      <p:sp>
+        <p:nvSpPr>
+          <p:cNvPr id="26" name="TextBox 25">
+            <a:extLst>
+              <a:ext uri="{FF2B5EF4-FFF2-40B4-BE49-F238E27FC236}">
+                <a16:creationId xmlns:a16="http://schemas.microsoft.com/office/drawing/2014/main" id="{39AAD14E-B6FB-3032-9F95-439B9A2F8314}"/>
+              </a:ext>
+            </a:extLst>
+          </p:cNvPr>
+          <p:cNvSpPr txBox="1"/>
+          <p:nvPr/>
+        </p:nvSpPr>
+        <p:spPr>
+          <a:xfrm>
+            <a:off x="9619078" y="4734853"/>
+            <a:ext cx="1250663" cy="646331"/>
+          </a:xfrm>
+          <a:prstGeom prst="rect">
+            <a:avLst/>
+          </a:prstGeom>
+          <a:noFill/>
+        </p:spPr>
+        <p:txBody>
+          <a:bodyPr wrap="none" rtlCol="0">
+            <a:spAutoFit/>
+          </a:bodyPr>
+          <a:lstStyle/>
+          <a:p>
+            <a:pPr algn="ctr"/>
+            <a:r>
+              <a:rPr lang="en-US" i="1" dirty="0"/>
+              <a:t>SSP1</a:t>
+            </a:r>
+          </a:p>
+          <a:p>
+            <a:pPr algn="ctr"/>
+            <a:r>
+              <a:rPr lang="en-US" i="1" dirty="0"/>
+              <a:t>2050-2100</a:t>
+            </a:r>
+          </a:p>
+        </p:txBody>
+      </p:sp>
+      <p:sp>
+        <p:nvSpPr>
+          <p:cNvPr id="5" name="TextBox 4">
+            <a:extLst>
+              <a:ext uri="{FF2B5EF4-FFF2-40B4-BE49-F238E27FC236}">
+                <a16:creationId xmlns:a16="http://schemas.microsoft.com/office/drawing/2014/main" id="{BB9A1153-02FD-9BCF-FF73-B255FC250088}"/>
+              </a:ext>
+            </a:extLst>
+          </p:cNvPr>
+          <p:cNvSpPr txBox="1"/>
+          <p:nvPr/>
+        </p:nvSpPr>
+        <p:spPr>
+          <a:xfrm>
+            <a:off x="5127440" y="1528250"/>
+            <a:ext cx="6450044" cy="5632311"/>
+          </a:xfrm>
+          <a:prstGeom prst="rect">
+            <a:avLst/>
+          </a:prstGeom>
+          <a:solidFill>
+            <a:schemeClr val="bg1"/>
+          </a:solidFill>
+        </p:spPr>
+        <p:txBody>
+          <a:bodyPr wrap="square">
+            <a:spAutoFit/>
+          </a:bodyPr>
+          <a:lstStyle/>
+          <a:p>
+            <a:pPr algn="ctr"/>
+            <a:endParaRPr lang="en-CA" sz="2400" dirty="0">
+              <a:solidFill>
+                <a:srgbClr val="000000"/>
+              </a:solidFill>
+              <a:latin typeface="Georgia" panose="02040502050405020303" pitchFamily="18" charset="0"/>
+              <a:cs typeface="Gill Sans" panose="020B0502020104020203" pitchFamily="34" charset="-79"/>
+            </a:endParaRPr>
+          </a:p>
+          <a:p>
+            <a:pPr algn="ctr"/>
+            <a:endParaRPr lang="en-CA" sz="2400" dirty="0">
+              <a:solidFill>
+                <a:srgbClr val="000000"/>
+              </a:solidFill>
+              <a:latin typeface="Georgia" panose="02040502050405020303" pitchFamily="18" charset="0"/>
+              <a:cs typeface="Gill Sans" panose="020B0502020104020203" pitchFamily="34" charset="-79"/>
+            </a:endParaRPr>
+          </a:p>
+          <a:p>
+            <a:pPr marL="457200" indent="-457200" algn="ctr">
+              <a:buAutoNum type="arabicPeriod"/>
+            </a:pPr>
+            <a:r>
+              <a:rPr lang="en-CA" sz="2400" dirty="0">
+                <a:solidFill>
+                  <a:srgbClr val="000000"/>
+                </a:solidFill>
+                <a:latin typeface="Georgia" panose="02040502050405020303" pitchFamily="18" charset="0"/>
+                <a:cs typeface="Gill Sans" panose="020B0502020104020203" pitchFamily="34" charset="-79"/>
+              </a:rPr>
+              <a:t>Both ozone and GHG act to modulate the winds and physical oceanographic conditions</a:t>
+            </a:r>
+          </a:p>
+          <a:p>
+            <a:pPr marL="457200" indent="-457200" algn="ctr">
+              <a:buAutoNum type="arabicPeriod"/>
+            </a:pPr>
+            <a:r>
+              <a:rPr lang="en-CA" sz="2400" dirty="0">
+                <a:solidFill>
+                  <a:srgbClr val="000000"/>
+                </a:solidFill>
+                <a:latin typeface="Georgia" panose="02040502050405020303" pitchFamily="18" charset="0"/>
+                <a:cs typeface="Gill Sans" panose="020B0502020104020203" pitchFamily="34" charset="-79"/>
+              </a:rPr>
+              <a:t>Controls shift from ozone to GHG dominance over the course of the 21</a:t>
+            </a:r>
+            <a:r>
+              <a:rPr lang="en-CA" sz="2400" baseline="30000" dirty="0">
+                <a:solidFill>
+                  <a:srgbClr val="000000"/>
+                </a:solidFill>
+                <a:latin typeface="Georgia" panose="02040502050405020303" pitchFamily="18" charset="0"/>
+                <a:cs typeface="Gill Sans" panose="020B0502020104020203" pitchFamily="34" charset="-79"/>
+              </a:rPr>
+              <a:t>st</a:t>
+            </a:r>
+            <a:r>
+              <a:rPr lang="en-CA" sz="2400" dirty="0">
+                <a:solidFill>
+                  <a:srgbClr val="000000"/>
+                </a:solidFill>
+                <a:latin typeface="Georgia" panose="02040502050405020303" pitchFamily="18" charset="0"/>
+                <a:cs typeface="Gill Sans" panose="020B0502020104020203" pitchFamily="34" charset="-79"/>
+              </a:rPr>
+              <a:t> century</a:t>
+            </a:r>
+            <a:endParaRPr lang="en-CA" sz="2400" b="0" dirty="0">
+              <a:solidFill>
+                <a:srgbClr val="000000"/>
+              </a:solidFill>
+              <a:effectLst/>
+              <a:latin typeface="Georgia" panose="02040502050405020303" pitchFamily="18" charset="0"/>
+              <a:cs typeface="Gill Sans" panose="020B0502020104020203" pitchFamily="34" charset="-79"/>
+            </a:endParaRPr>
+          </a:p>
+          <a:p>
+            <a:pPr marL="457200" indent="-457200" algn="ctr">
+              <a:buAutoNum type="arabicPeriod"/>
+            </a:pPr>
+            <a:r>
+              <a:rPr lang="en-CA" sz="2400" b="0" dirty="0">
+                <a:solidFill>
+                  <a:srgbClr val="000000"/>
+                </a:solidFill>
+                <a:effectLst/>
+                <a:latin typeface="Georgia" panose="02040502050405020303" pitchFamily="18" charset="0"/>
+                <a:cs typeface="Gill Sans" panose="020B0502020104020203" pitchFamily="34" charset="-79"/>
+              </a:rPr>
+              <a:t>Climate feedbacks, especially temperature, are important, but for the CO</a:t>
+            </a:r>
+            <a:r>
+              <a:rPr lang="en-CA" sz="2000" b="0" dirty="0">
+                <a:solidFill>
+                  <a:srgbClr val="000000"/>
+                </a:solidFill>
+                <a:effectLst/>
+                <a:latin typeface="Georgia" panose="02040502050405020303" pitchFamily="18" charset="0"/>
+                <a:cs typeface="Gill Sans" panose="020B0502020104020203" pitchFamily="34" charset="-79"/>
+              </a:rPr>
+              <a:t>2</a:t>
+            </a:r>
+            <a:r>
+              <a:rPr lang="en-CA" sz="2400" b="0" dirty="0">
+                <a:solidFill>
+                  <a:srgbClr val="000000"/>
+                </a:solidFill>
+                <a:effectLst/>
+                <a:latin typeface="Georgia" panose="02040502050405020303" pitchFamily="18" charset="0"/>
+                <a:cs typeface="Gill Sans" panose="020B0502020104020203" pitchFamily="34" charset="-79"/>
+              </a:rPr>
+              <a:t> sink are secondary to the atmospheric CO</a:t>
+            </a:r>
+            <a:r>
+              <a:rPr lang="en-CA" b="0" dirty="0">
+                <a:solidFill>
+                  <a:srgbClr val="000000"/>
+                </a:solidFill>
+                <a:effectLst/>
+                <a:latin typeface="Georgia" panose="02040502050405020303" pitchFamily="18" charset="0"/>
+                <a:cs typeface="Gill Sans" panose="020B0502020104020203" pitchFamily="34" charset="-79"/>
+              </a:rPr>
+              <a:t>2</a:t>
+            </a:r>
+            <a:r>
+              <a:rPr lang="en-CA" sz="2400" b="0" dirty="0">
+                <a:solidFill>
+                  <a:srgbClr val="000000"/>
+                </a:solidFill>
+                <a:effectLst/>
+                <a:latin typeface="Georgia" panose="02040502050405020303" pitchFamily="18" charset="0"/>
+                <a:cs typeface="Gill Sans" panose="020B0502020104020203" pitchFamily="34" charset="-79"/>
+              </a:rPr>
+              <a:t> effect </a:t>
+            </a:r>
+          </a:p>
+          <a:p>
+            <a:pPr marL="457200" indent="-457200" algn="ctr">
+              <a:buAutoNum type="arabicPeriod"/>
+            </a:pPr>
+            <a:endParaRPr lang="en-CA" sz="2400" dirty="0">
+              <a:solidFill>
+                <a:srgbClr val="000000"/>
+              </a:solidFill>
+              <a:latin typeface="Georgia" panose="02040502050405020303" pitchFamily="18" charset="0"/>
+              <a:cs typeface="Gill Sans" panose="020B0502020104020203" pitchFamily="34" charset="-79"/>
+            </a:endParaRPr>
+          </a:p>
+          <a:p>
+            <a:pPr marL="457200" indent="-457200" algn="ctr">
+              <a:buAutoNum type="arabicPeriod"/>
+            </a:pPr>
+            <a:endParaRPr lang="en-CA" sz="2400" dirty="0">
+              <a:solidFill>
+                <a:srgbClr val="000000"/>
+              </a:solidFill>
+              <a:latin typeface="Georgia" panose="02040502050405020303" pitchFamily="18" charset="0"/>
+              <a:cs typeface="Gill Sans" panose="020B0502020104020203" pitchFamily="34" charset="-79"/>
+            </a:endParaRPr>
+          </a:p>
+          <a:p>
+            <a:pPr marL="457200" indent="-457200" algn="ctr">
+              <a:buAutoNum type="arabicPeriod"/>
+            </a:pPr>
+            <a:endParaRPr lang="en-CA" sz="2400" dirty="0">
+              <a:solidFill>
+                <a:srgbClr val="000000"/>
+              </a:solidFill>
+              <a:latin typeface="Georgia" panose="02040502050405020303" pitchFamily="18" charset="0"/>
+              <a:cs typeface="Gill Sans" panose="020B0502020104020203" pitchFamily="34" charset="-79"/>
+            </a:endParaRPr>
+          </a:p>
+          <a:p>
+            <a:pPr algn="ctr"/>
+            <a:endParaRPr lang="en-CA" sz="2400" b="0" dirty="0">
+              <a:solidFill>
+                <a:srgbClr val="000000"/>
+              </a:solidFill>
+              <a:effectLst/>
+              <a:latin typeface="Georgia" panose="02040502050405020303" pitchFamily="18" charset="0"/>
+            </a:endParaRPr>
+          </a:p>
+        </p:txBody>
+      </p:sp>
+      <p:sp>
+        <p:nvSpPr>
+          <p:cNvPr id="6" name="TextBox 5">
+            <a:extLst>
+              <a:ext uri="{FF2B5EF4-FFF2-40B4-BE49-F238E27FC236}">
+                <a16:creationId xmlns:a16="http://schemas.microsoft.com/office/drawing/2014/main" id="{01C8E620-0D87-1DBA-42FA-F3E5FD0E393E}"/>
+              </a:ext>
+            </a:extLst>
+          </p:cNvPr>
+          <p:cNvSpPr txBox="1"/>
+          <p:nvPr/>
+        </p:nvSpPr>
+        <p:spPr>
+          <a:xfrm>
+            <a:off x="5410230" y="5793844"/>
+            <a:ext cx="6450044" cy="830997"/>
+          </a:xfrm>
+          <a:prstGeom prst="rect">
+            <a:avLst/>
+          </a:prstGeom>
+          <a:solidFill>
+            <a:schemeClr val="bg1"/>
+          </a:solidFill>
+        </p:spPr>
+        <p:txBody>
+          <a:bodyPr wrap="square">
+            <a:spAutoFit/>
+          </a:bodyPr>
+          <a:lstStyle/>
+          <a:p>
+            <a:pPr algn="ctr"/>
+            <a:r>
+              <a:rPr lang="en-CA" sz="2400" dirty="0">
+                <a:solidFill>
+                  <a:srgbClr val="0C13E4"/>
+                </a:solidFill>
+                <a:latin typeface="Menlo" panose="020B0609030804020204" pitchFamily="49" charset="0"/>
+                <a:ea typeface="Menlo" panose="020B0609030804020204" pitchFamily="49" charset="0"/>
+                <a:cs typeface="Menlo" panose="020B0609030804020204" pitchFamily="49" charset="0"/>
+              </a:rPr>
+              <a:t>Tereza </a:t>
+            </a:r>
+            <a:r>
+              <a:rPr lang="en-CA" sz="2400" dirty="0" err="1">
+                <a:solidFill>
+                  <a:srgbClr val="0C13E4"/>
+                </a:solidFill>
+                <a:latin typeface="Menlo" panose="020B0609030804020204" pitchFamily="49" charset="0"/>
+                <a:ea typeface="Menlo" panose="020B0609030804020204" pitchFamily="49" charset="0"/>
+                <a:cs typeface="Menlo" panose="020B0609030804020204" pitchFamily="49" charset="0"/>
+              </a:rPr>
+              <a:t>Jarníková</a:t>
+            </a:r>
+            <a:r>
+              <a:rPr lang="en-CA" sz="2400" dirty="0">
+                <a:solidFill>
+                  <a:srgbClr val="0C13E4"/>
+                </a:solidFill>
+                <a:latin typeface="Menlo" panose="020B0609030804020204" pitchFamily="49" charset="0"/>
+                <a:ea typeface="Menlo" panose="020B0609030804020204" pitchFamily="49" charset="0"/>
+                <a:cs typeface="Menlo" panose="020B0609030804020204" pitchFamily="49" charset="0"/>
+              </a:rPr>
+              <a:t> </a:t>
+            </a:r>
+            <a:br>
+              <a:rPr lang="en-CA" sz="2400" dirty="0">
+                <a:solidFill>
+                  <a:srgbClr val="0C13E4"/>
+                </a:solidFill>
+                <a:latin typeface="Menlo" panose="020B0609030804020204" pitchFamily="49" charset="0"/>
+                <a:ea typeface="Menlo" panose="020B0609030804020204" pitchFamily="49" charset="0"/>
+                <a:cs typeface="Menlo" panose="020B0609030804020204" pitchFamily="49" charset="0"/>
+              </a:rPr>
+            </a:br>
+            <a:r>
+              <a:rPr lang="en-CA" sz="2400" dirty="0" err="1">
+                <a:solidFill>
+                  <a:srgbClr val="0C13E4"/>
+                </a:solidFill>
+                <a:latin typeface="Menlo" panose="020B0609030804020204" pitchFamily="49" charset="0"/>
+                <a:ea typeface="Menlo" panose="020B0609030804020204" pitchFamily="49" charset="0"/>
+                <a:cs typeface="Menlo" panose="020B0609030804020204" pitchFamily="49" charset="0"/>
+              </a:rPr>
+              <a:t>T.Jarnikova@uea.ac.uk</a:t>
+            </a:r>
+            <a:endParaRPr lang="en-CA" sz="2400" b="0" dirty="0">
+              <a:solidFill>
+                <a:srgbClr val="0C13E4"/>
+              </a:solidFill>
+              <a:effectLst/>
+              <a:latin typeface="Menlo" panose="020B0609030804020204" pitchFamily="49" charset="0"/>
+              <a:ea typeface="Menlo" panose="020B0609030804020204" pitchFamily="49" charset="0"/>
+              <a:cs typeface="Menlo" panose="020B0609030804020204" pitchFamily="49" charset="0"/>
+            </a:endParaRPr>
           </a:p>
         </p:txBody>
       </p:sp>
     </p:spTree>
     <p:extLst>
       <p:ext uri="{BB962C8B-B14F-4D97-AF65-F5344CB8AC3E}">
-        <p14:creationId xmlns:p14="http://schemas.microsoft.com/office/powerpoint/2010/main" val="2640135095"/>
+        <p14:creationId xmlns:p14="http://schemas.microsoft.com/office/powerpoint/2010/main" val="4136194199"/>
       </p:ext>
     </p:extLst>
   </p:cSld>
@@ -11934,6 +13247,110 @@
           <a:chExt cx="0" cy="0"/>
         </a:xfrm>
       </p:grpSpPr>
+      <p:sp>
+        <p:nvSpPr>
+          <p:cNvPr id="4" name="TextBox 3">
+            <a:extLst>
+              <a:ext uri="{FF2B5EF4-FFF2-40B4-BE49-F238E27FC236}">
+                <a16:creationId xmlns:a16="http://schemas.microsoft.com/office/drawing/2014/main" id="{AF9B623E-CAA3-C5B5-DDF7-8248BD1B4033}"/>
+              </a:ext>
+            </a:extLst>
+          </p:cNvPr>
+          <p:cNvSpPr txBox="1"/>
+          <p:nvPr/>
+        </p:nvSpPr>
+        <p:spPr>
+          <a:xfrm>
+            <a:off x="2377656" y="2999399"/>
+            <a:ext cx="144601" cy="241470"/>
+          </a:xfrm>
+          <a:prstGeom prst="rect">
+            <a:avLst/>
+          </a:prstGeom>
+          <a:noFill/>
+        </p:spPr>
+        <p:txBody>
+          <a:bodyPr wrap="square" rtlCol="0">
+            <a:spAutoFit/>
+          </a:bodyPr>
+          <a:lstStyle/>
+          <a:p>
+            <a:endParaRPr lang="en-US" dirty="0"/>
+          </a:p>
+        </p:txBody>
+      </p:sp>
+      <p:sp>
+        <p:nvSpPr>
+          <p:cNvPr id="10" name="Title 1">
+            <a:extLst>
+              <a:ext uri="{FF2B5EF4-FFF2-40B4-BE49-F238E27FC236}">
+                <a16:creationId xmlns:a16="http://schemas.microsoft.com/office/drawing/2014/main" id="{F4861A18-A84B-ED60-DBA4-21D77706193F}"/>
+              </a:ext>
+            </a:extLst>
+          </p:cNvPr>
+          <p:cNvSpPr>
+            <a:spLocks noGrp="1"/>
+          </p:cNvSpPr>
+          <p:nvPr>
+            <p:ph type="title"/>
+          </p:nvPr>
+        </p:nvSpPr>
+        <p:spPr>
+          <a:xfrm>
+            <a:off x="1805262" y="3429000"/>
+            <a:ext cx="8009082" cy="1325563"/>
+          </a:xfrm>
+        </p:spPr>
+        <p:txBody>
+          <a:bodyPr>
+            <a:normAutofit/>
+          </a:bodyPr>
+          <a:lstStyle/>
+          <a:p>
+            <a:pPr algn="ctr"/>
+            <a:r>
+              <a:rPr lang="en-US" sz="3600" dirty="0">
+                <a:solidFill>
+                  <a:srgbClr val="0C13E4"/>
+                </a:solidFill>
+                <a:latin typeface="Gill Sans MT" panose="020B0502020104020203" pitchFamily="34" charset="77"/>
+              </a:rPr>
+              <a:t>RANDOM OTHER SLIDES BEGIN HERE</a:t>
+            </a:r>
+            <a:endParaRPr lang="en-US" sz="3600" dirty="0"/>
+          </a:p>
+        </p:txBody>
+      </p:sp>
+    </p:spTree>
+    <p:extLst>
+      <p:ext uri="{BB962C8B-B14F-4D97-AF65-F5344CB8AC3E}">
+        <p14:creationId xmlns:p14="http://schemas.microsoft.com/office/powerpoint/2010/main" val="2640135095"/>
+      </p:ext>
+    </p:extLst>
+  </p:cSld>
+  <p:clrMapOvr>
+    <a:masterClrMapping/>
+  </p:clrMapOvr>
+</p:sld>
+</file>
+
+<file path=ppt/slides/slide25.xml><?xml version="1.0" encoding="utf-8"?>
+<p:sld xmlns:a="http://schemas.openxmlformats.org/drawingml/2006/main" xmlns:r="http://schemas.openxmlformats.org/officeDocument/2006/relationships" xmlns:p="http://schemas.openxmlformats.org/presentationml/2006/main">
+  <p:cSld>
+    <p:spTree>
+      <p:nvGrpSpPr>
+        <p:cNvPr id="1" name=""/>
+        <p:cNvGrpSpPr/>
+        <p:nvPr/>
+      </p:nvGrpSpPr>
+      <p:grpSpPr>
+        <a:xfrm>
+          <a:off x="0" y="0"/>
+          <a:ext cx="0" cy="0"/>
+          <a:chOff x="0" y="0"/>
+          <a:chExt cx="0" cy="0"/>
+        </a:xfrm>
+      </p:grpSpPr>
       <p:pic>
         <p:nvPicPr>
           <p:cNvPr id="15" name="Picture 4">
@@ -12691,7 +14108,7 @@
 </p:sld>
 </file>
 
-<file path=ppt/slides/slide25.xml><?xml version="1.0" encoding="utf-8"?>
+<file path=ppt/slides/slide26.xml><?xml version="1.0" encoding="utf-8"?>
 <p:sld xmlns:a="http://schemas.openxmlformats.org/drawingml/2006/main" xmlns:r="http://schemas.openxmlformats.org/officeDocument/2006/relationships" xmlns:p="http://schemas.openxmlformats.org/presentationml/2006/main">
   <p:cSld>
     <p:spTree>
@@ -12954,7 +14371,7 @@
 </p:sld>
 </file>
 
-<file path=ppt/slides/slide26.xml><?xml version="1.0" encoding="utf-8"?>
+<file path=ppt/slides/slide27.xml><?xml version="1.0" encoding="utf-8"?>
 <p:sld xmlns:a="http://schemas.openxmlformats.org/drawingml/2006/main" xmlns:r="http://schemas.openxmlformats.org/officeDocument/2006/relationships" xmlns:p="http://schemas.openxmlformats.org/presentationml/2006/main">
   <p:cSld>
     <p:spTree>
@@ -13338,7 +14755,7 @@
 </p:sld>
 </file>
 
-<file path=ppt/slides/slide27.xml><?xml version="1.0" encoding="utf-8"?>
+<file path=ppt/slides/slide28.xml><?xml version="1.0" encoding="utf-8"?>
 <p:sld xmlns:a="http://schemas.openxmlformats.org/drawingml/2006/main" xmlns:r="http://schemas.openxmlformats.org/officeDocument/2006/relationships" xmlns:p="http://schemas.openxmlformats.org/presentationml/2006/main">
   <p:cSld>
     <p:spTree>
@@ -13629,7 +15046,7 @@
 </p:sld>
 </file>
 
-<file path=ppt/slides/slide28.xml><?xml version="1.0" encoding="utf-8"?>
+<file path=ppt/slides/slide29.xml><?xml version="1.0" encoding="utf-8"?>
 <p:sld xmlns:a="http://schemas.openxmlformats.org/drawingml/2006/main" xmlns:r="http://schemas.openxmlformats.org/officeDocument/2006/relationships" xmlns:p="http://schemas.openxmlformats.org/presentationml/2006/main">
   <p:cSld>
     <p:spTree>
@@ -13920,7 +15337,249 @@
 </p:sld>
 </file>
 
-<file path=ppt/slides/slide29.xml><?xml version="1.0" encoding="utf-8"?>
+<file path=ppt/slides/slide3.xml><?xml version="1.0" encoding="utf-8"?>
+<p:sld xmlns:a="http://schemas.openxmlformats.org/drawingml/2006/main" xmlns:r="http://schemas.openxmlformats.org/officeDocument/2006/relationships" xmlns:p="http://schemas.openxmlformats.org/presentationml/2006/main">
+  <p:cSld>
+    <p:spTree>
+      <p:nvGrpSpPr>
+        <p:cNvPr id="1" name=""/>
+        <p:cNvGrpSpPr/>
+        <p:nvPr/>
+      </p:nvGrpSpPr>
+      <p:grpSpPr>
+        <a:xfrm>
+          <a:off x="0" y="0"/>
+          <a:ext cx="0" cy="0"/>
+          <a:chOff x="0" y="0"/>
+          <a:chExt cx="0" cy="0"/>
+        </a:xfrm>
+      </p:grpSpPr>
+      <p:sp>
+        <p:nvSpPr>
+          <p:cNvPr id="2" name="Title 1">
+            <a:extLst>
+              <a:ext uri="{FF2B5EF4-FFF2-40B4-BE49-F238E27FC236}">
+                <a16:creationId xmlns:a16="http://schemas.microsoft.com/office/drawing/2014/main" id="{743D13F2-7090-696A-A0F6-3CB169034685}"/>
+              </a:ext>
+            </a:extLst>
+          </p:cNvPr>
+          <p:cNvSpPr>
+            <a:spLocks noGrp="1"/>
+          </p:cNvSpPr>
+          <p:nvPr>
+            <p:ph type="title"/>
+          </p:nvPr>
+        </p:nvSpPr>
+        <p:spPr/>
+        <p:txBody>
+          <a:bodyPr>
+            <a:normAutofit/>
+          </a:bodyPr>
+          <a:lstStyle/>
+          <a:p>
+            <a:pPr algn="ctr"/>
+            <a:r>
+              <a:rPr lang="en-US" sz="3600" dirty="0">
+                <a:solidFill>
+                  <a:srgbClr val="0C13E4"/>
+                </a:solidFill>
+                <a:latin typeface="Gill Sans MT" panose="020B0502020104020203" pitchFamily="34" charset="77"/>
+              </a:rPr>
+              <a:t>Changing polar climate due to ozone depletion</a:t>
+            </a:r>
+            <a:br>
+              <a:rPr lang="en-US" sz="3600" dirty="0">
+                <a:solidFill>
+                  <a:srgbClr val="0C13E4"/>
+                </a:solidFill>
+                <a:latin typeface="Gill Sans MT" panose="020B0502020104020203" pitchFamily="34" charset="77"/>
+              </a:rPr>
+            </a:br>
+            <a:r>
+              <a:rPr lang="en-US" sz="3600" dirty="0">
+                <a:solidFill>
+                  <a:srgbClr val="0C13E4"/>
+                </a:solidFill>
+                <a:latin typeface="Gill Sans MT" panose="020B0502020104020203" pitchFamily="34" charset="77"/>
+              </a:rPr>
+              <a:t> and greenhouse gas emissions</a:t>
+            </a:r>
+            <a:endParaRPr lang="en-US" sz="3600" dirty="0"/>
+          </a:p>
+        </p:txBody>
+      </p:sp>
+      <p:sp>
+        <p:nvSpPr>
+          <p:cNvPr id="4" name="TextBox 3">
+            <a:extLst>
+              <a:ext uri="{FF2B5EF4-FFF2-40B4-BE49-F238E27FC236}">
+                <a16:creationId xmlns:a16="http://schemas.microsoft.com/office/drawing/2014/main" id="{785FC3DF-0E2A-7393-3FD8-BAC9350778DF}"/>
+              </a:ext>
+            </a:extLst>
+          </p:cNvPr>
+          <p:cNvSpPr txBox="1"/>
+          <p:nvPr/>
+        </p:nvSpPr>
+        <p:spPr>
+          <a:xfrm>
+            <a:off x="5827204" y="2000311"/>
+            <a:ext cx="5598459" cy="1569660"/>
+          </a:xfrm>
+          <a:prstGeom prst="rect">
+            <a:avLst/>
+          </a:prstGeom>
+          <a:noFill/>
+        </p:spPr>
+        <p:txBody>
+          <a:bodyPr wrap="square">
+            <a:spAutoFit/>
+          </a:bodyPr>
+          <a:lstStyle/>
+          <a:p>
+            <a:pPr marL="342900" indent="-342900" algn="ctr">
+              <a:buFontTx/>
+              <a:buChar char="-"/>
+            </a:pPr>
+            <a:r>
+              <a:rPr lang="en-CA" sz="2400" b="0" dirty="0">
+                <a:solidFill>
+                  <a:srgbClr val="000000"/>
+                </a:solidFill>
+                <a:effectLst/>
+                <a:latin typeface="Georgia" panose="02040502050405020303" pitchFamily="18" charset="0"/>
+              </a:rPr>
+              <a:t>Historically, ozone depletion increased the SAM index </a:t>
+            </a:r>
+            <a:r>
+              <a:rPr lang="en-CA" sz="2400" b="0" i="0" dirty="0">
+                <a:solidFill>
+                  <a:srgbClr val="040C28"/>
+                </a:solidFill>
+                <a:effectLst/>
+                <a:latin typeface="Google Sans"/>
+              </a:rPr>
+              <a:t>→ </a:t>
+            </a:r>
+          </a:p>
+          <a:p>
+            <a:pPr algn="ctr"/>
+            <a:r>
+              <a:rPr lang="en-CA" sz="2400" b="0" dirty="0">
+                <a:solidFill>
+                  <a:srgbClr val="000000"/>
+                </a:solidFill>
+                <a:effectLst/>
+                <a:latin typeface="Georgia" panose="02040502050405020303" pitchFamily="18" charset="0"/>
+              </a:rPr>
+              <a:t>stronger and more southerly winds, especially in summer</a:t>
+            </a:r>
+          </a:p>
+        </p:txBody>
+      </p:sp>
+      <p:pic>
+        <p:nvPicPr>
+          <p:cNvPr id="11" name="Picture 10" descr="A line of a person with a white background&#10;&#10;Description automatically generated with medium confidence">
+            <a:extLst>
+              <a:ext uri="{FF2B5EF4-FFF2-40B4-BE49-F238E27FC236}">
+                <a16:creationId xmlns:a16="http://schemas.microsoft.com/office/drawing/2014/main" id="{6CCBD081-1B5D-05D5-8114-29AF192B5B25}"/>
+              </a:ext>
+            </a:extLst>
+          </p:cNvPr>
+          <p:cNvPicPr>
+            <a:picLocks noChangeAspect="1"/>
+          </p:cNvPicPr>
+          <p:nvPr/>
+        </p:nvPicPr>
+        <p:blipFill>
+          <a:blip r:embed="rId3"/>
+          <a:stretch>
+            <a:fillRect/>
+          </a:stretch>
+        </p:blipFill>
+        <p:spPr>
+          <a:xfrm>
+            <a:off x="1093886" y="2171699"/>
+            <a:ext cx="4828116" cy="3621087"/>
+          </a:xfrm>
+          <a:prstGeom prst="rect">
+            <a:avLst/>
+          </a:prstGeom>
+        </p:spPr>
+      </p:pic>
+      <p:pic>
+        <p:nvPicPr>
+          <p:cNvPr id="8" name="Picture 7" descr="A graph showing the effect of an oxygen&#10;&#10;Description automatically generated">
+            <a:extLst>
+              <a:ext uri="{FF2B5EF4-FFF2-40B4-BE49-F238E27FC236}">
+                <a16:creationId xmlns:a16="http://schemas.microsoft.com/office/drawing/2014/main" id="{A71DFE58-19FC-44E9-A92F-CA1BFA1DFF08}"/>
+              </a:ext>
+            </a:extLst>
+          </p:cNvPr>
+          <p:cNvPicPr>
+            <a:picLocks noChangeAspect="1"/>
+          </p:cNvPicPr>
+          <p:nvPr/>
+        </p:nvPicPr>
+        <p:blipFill>
+          <a:blip r:embed="rId4"/>
+          <a:stretch>
+            <a:fillRect/>
+          </a:stretch>
+        </p:blipFill>
+        <p:spPr>
+          <a:xfrm>
+            <a:off x="1093886" y="2171186"/>
+            <a:ext cx="4828800" cy="3621600"/>
+          </a:xfrm>
+          <a:prstGeom prst="rect">
+            <a:avLst/>
+          </a:prstGeom>
+        </p:spPr>
+      </p:pic>
+      <p:pic>
+        <p:nvPicPr>
+          <p:cNvPr id="5" name="Picture 4" descr="A globe with a map of the earth&#10;&#10;Description automatically generated">
+            <a:extLst>
+              <a:ext uri="{FF2B5EF4-FFF2-40B4-BE49-F238E27FC236}">
+                <a16:creationId xmlns:a16="http://schemas.microsoft.com/office/drawing/2014/main" id="{A2F6DEB7-743B-0B37-A546-3B0F75EFDEA0}"/>
+              </a:ext>
+            </a:extLst>
+          </p:cNvPr>
+          <p:cNvPicPr>
+            <a:picLocks noChangeAspect="1"/>
+          </p:cNvPicPr>
+          <p:nvPr/>
+        </p:nvPicPr>
+        <p:blipFill>
+          <a:blip r:embed="rId5"/>
+          <a:stretch>
+            <a:fillRect/>
+          </a:stretch>
+        </p:blipFill>
+        <p:spPr>
+          <a:xfrm>
+            <a:off x="463533" y="1171566"/>
+            <a:ext cx="1167377" cy="1167377"/>
+          </a:xfrm>
+          <a:prstGeom prst="rect">
+            <a:avLst/>
+          </a:prstGeom>
+        </p:spPr>
+      </p:pic>
+    </p:spTree>
+    <p:extLst>
+      <p:ext uri="{BB962C8B-B14F-4D97-AF65-F5344CB8AC3E}">
+        <p14:creationId xmlns:p14="http://schemas.microsoft.com/office/powerpoint/2010/main" val="2469946936"/>
+      </p:ext>
+    </p:extLst>
+  </p:cSld>
+  <p:clrMapOvr>
+    <a:masterClrMapping/>
+  </p:clrMapOvr>
+</p:sld>
+</file>
+
+<file path=ppt/slides/slide30.xml><?xml version="1.0" encoding="utf-8"?>
 <p:sld xmlns:a="http://schemas.openxmlformats.org/drawingml/2006/main" xmlns:r="http://schemas.openxmlformats.org/officeDocument/2006/relationships" xmlns:p="http://schemas.openxmlformats.org/presentationml/2006/main">
   <p:cSld>
     <p:spTree>
@@ -14810,249 +16469,7 @@
 </p:sld>
 </file>
 
-<file path=ppt/slides/slide3.xml><?xml version="1.0" encoding="utf-8"?>
-<p:sld xmlns:a="http://schemas.openxmlformats.org/drawingml/2006/main" xmlns:r="http://schemas.openxmlformats.org/officeDocument/2006/relationships" xmlns:p="http://schemas.openxmlformats.org/presentationml/2006/main">
-  <p:cSld>
-    <p:spTree>
-      <p:nvGrpSpPr>
-        <p:cNvPr id="1" name=""/>
-        <p:cNvGrpSpPr/>
-        <p:nvPr/>
-      </p:nvGrpSpPr>
-      <p:grpSpPr>
-        <a:xfrm>
-          <a:off x="0" y="0"/>
-          <a:ext cx="0" cy="0"/>
-          <a:chOff x="0" y="0"/>
-          <a:chExt cx="0" cy="0"/>
-        </a:xfrm>
-      </p:grpSpPr>
-      <p:sp>
-        <p:nvSpPr>
-          <p:cNvPr id="2" name="Title 1">
-            <a:extLst>
-              <a:ext uri="{FF2B5EF4-FFF2-40B4-BE49-F238E27FC236}">
-                <a16:creationId xmlns:a16="http://schemas.microsoft.com/office/drawing/2014/main" id="{743D13F2-7090-696A-A0F6-3CB169034685}"/>
-              </a:ext>
-            </a:extLst>
-          </p:cNvPr>
-          <p:cNvSpPr>
-            <a:spLocks noGrp="1"/>
-          </p:cNvSpPr>
-          <p:nvPr>
-            <p:ph type="title"/>
-          </p:nvPr>
-        </p:nvSpPr>
-        <p:spPr/>
-        <p:txBody>
-          <a:bodyPr>
-            <a:normAutofit/>
-          </a:bodyPr>
-          <a:lstStyle/>
-          <a:p>
-            <a:pPr algn="ctr"/>
-            <a:r>
-              <a:rPr lang="en-US" sz="3600" dirty="0">
-                <a:solidFill>
-                  <a:srgbClr val="0C13E4"/>
-                </a:solidFill>
-                <a:latin typeface="Gill Sans MT" panose="020B0502020104020203" pitchFamily="34" charset="77"/>
-              </a:rPr>
-              <a:t>Changing polar climate due to ozone depletion</a:t>
-            </a:r>
-            <a:br>
-              <a:rPr lang="en-US" sz="3600" dirty="0">
-                <a:solidFill>
-                  <a:srgbClr val="0C13E4"/>
-                </a:solidFill>
-                <a:latin typeface="Gill Sans MT" panose="020B0502020104020203" pitchFamily="34" charset="77"/>
-              </a:rPr>
-            </a:br>
-            <a:r>
-              <a:rPr lang="en-US" sz="3600" dirty="0">
-                <a:solidFill>
-                  <a:srgbClr val="0C13E4"/>
-                </a:solidFill>
-                <a:latin typeface="Gill Sans MT" panose="020B0502020104020203" pitchFamily="34" charset="77"/>
-              </a:rPr>
-              <a:t> and greenhouse gas emissions</a:t>
-            </a:r>
-            <a:endParaRPr lang="en-US" sz="3600" dirty="0"/>
-          </a:p>
-        </p:txBody>
-      </p:sp>
-      <p:sp>
-        <p:nvSpPr>
-          <p:cNvPr id="4" name="TextBox 3">
-            <a:extLst>
-              <a:ext uri="{FF2B5EF4-FFF2-40B4-BE49-F238E27FC236}">
-                <a16:creationId xmlns:a16="http://schemas.microsoft.com/office/drawing/2014/main" id="{785FC3DF-0E2A-7393-3FD8-BAC9350778DF}"/>
-              </a:ext>
-            </a:extLst>
-          </p:cNvPr>
-          <p:cNvSpPr txBox="1"/>
-          <p:nvPr/>
-        </p:nvSpPr>
-        <p:spPr>
-          <a:xfrm>
-            <a:off x="5827204" y="2000311"/>
-            <a:ext cx="5598459" cy="1569660"/>
-          </a:xfrm>
-          <a:prstGeom prst="rect">
-            <a:avLst/>
-          </a:prstGeom>
-          <a:noFill/>
-        </p:spPr>
-        <p:txBody>
-          <a:bodyPr wrap="square">
-            <a:spAutoFit/>
-          </a:bodyPr>
-          <a:lstStyle/>
-          <a:p>
-            <a:pPr marL="342900" indent="-342900" algn="ctr">
-              <a:buFontTx/>
-              <a:buChar char="-"/>
-            </a:pPr>
-            <a:r>
-              <a:rPr lang="en-CA" sz="2400" b="0" dirty="0">
-                <a:solidFill>
-                  <a:srgbClr val="000000"/>
-                </a:solidFill>
-                <a:effectLst/>
-                <a:latin typeface="Georgia" panose="02040502050405020303" pitchFamily="18" charset="0"/>
-              </a:rPr>
-              <a:t>Historically, ozone depletion increased the SAM index </a:t>
-            </a:r>
-            <a:r>
-              <a:rPr lang="en-CA" sz="2400" b="0" i="0" dirty="0">
-                <a:solidFill>
-                  <a:srgbClr val="040C28"/>
-                </a:solidFill>
-                <a:effectLst/>
-                <a:latin typeface="Google Sans"/>
-              </a:rPr>
-              <a:t>→ </a:t>
-            </a:r>
-          </a:p>
-          <a:p>
-            <a:pPr algn="ctr"/>
-            <a:r>
-              <a:rPr lang="en-CA" sz="2400" b="0" dirty="0">
-                <a:solidFill>
-                  <a:srgbClr val="000000"/>
-                </a:solidFill>
-                <a:effectLst/>
-                <a:latin typeface="Georgia" panose="02040502050405020303" pitchFamily="18" charset="0"/>
-              </a:rPr>
-              <a:t>stronger and more southerly winds, especially in summer</a:t>
-            </a:r>
-          </a:p>
-        </p:txBody>
-      </p:sp>
-      <p:pic>
-        <p:nvPicPr>
-          <p:cNvPr id="11" name="Picture 10" descr="A line of a person with a white background&#10;&#10;Description automatically generated with medium confidence">
-            <a:extLst>
-              <a:ext uri="{FF2B5EF4-FFF2-40B4-BE49-F238E27FC236}">
-                <a16:creationId xmlns:a16="http://schemas.microsoft.com/office/drawing/2014/main" id="{6CCBD081-1B5D-05D5-8114-29AF192B5B25}"/>
-              </a:ext>
-            </a:extLst>
-          </p:cNvPr>
-          <p:cNvPicPr>
-            <a:picLocks noChangeAspect="1"/>
-          </p:cNvPicPr>
-          <p:nvPr/>
-        </p:nvPicPr>
-        <p:blipFill>
-          <a:blip r:embed="rId3"/>
-          <a:stretch>
-            <a:fillRect/>
-          </a:stretch>
-        </p:blipFill>
-        <p:spPr>
-          <a:xfrm>
-            <a:off x="1093886" y="2171699"/>
-            <a:ext cx="4828116" cy="3621087"/>
-          </a:xfrm>
-          <a:prstGeom prst="rect">
-            <a:avLst/>
-          </a:prstGeom>
-        </p:spPr>
-      </p:pic>
-      <p:pic>
-        <p:nvPicPr>
-          <p:cNvPr id="8" name="Picture 7" descr="A graph showing the effect of an oxygen&#10;&#10;Description automatically generated">
-            <a:extLst>
-              <a:ext uri="{FF2B5EF4-FFF2-40B4-BE49-F238E27FC236}">
-                <a16:creationId xmlns:a16="http://schemas.microsoft.com/office/drawing/2014/main" id="{A71DFE58-19FC-44E9-A92F-CA1BFA1DFF08}"/>
-              </a:ext>
-            </a:extLst>
-          </p:cNvPr>
-          <p:cNvPicPr>
-            <a:picLocks noChangeAspect="1"/>
-          </p:cNvPicPr>
-          <p:nvPr/>
-        </p:nvPicPr>
-        <p:blipFill>
-          <a:blip r:embed="rId4"/>
-          <a:stretch>
-            <a:fillRect/>
-          </a:stretch>
-        </p:blipFill>
-        <p:spPr>
-          <a:xfrm>
-            <a:off x="1093886" y="2171186"/>
-            <a:ext cx="4828800" cy="3621600"/>
-          </a:xfrm>
-          <a:prstGeom prst="rect">
-            <a:avLst/>
-          </a:prstGeom>
-        </p:spPr>
-      </p:pic>
-      <p:pic>
-        <p:nvPicPr>
-          <p:cNvPr id="5" name="Picture 4" descr="A globe with a map of the earth&#10;&#10;Description automatically generated">
-            <a:extLst>
-              <a:ext uri="{FF2B5EF4-FFF2-40B4-BE49-F238E27FC236}">
-                <a16:creationId xmlns:a16="http://schemas.microsoft.com/office/drawing/2014/main" id="{A2F6DEB7-743B-0B37-A546-3B0F75EFDEA0}"/>
-              </a:ext>
-            </a:extLst>
-          </p:cNvPr>
-          <p:cNvPicPr>
-            <a:picLocks noChangeAspect="1"/>
-          </p:cNvPicPr>
-          <p:nvPr/>
-        </p:nvPicPr>
-        <p:blipFill>
-          <a:blip r:embed="rId5"/>
-          <a:stretch>
-            <a:fillRect/>
-          </a:stretch>
-        </p:blipFill>
-        <p:spPr>
-          <a:xfrm>
-            <a:off x="463533" y="1171566"/>
-            <a:ext cx="1167377" cy="1167377"/>
-          </a:xfrm>
-          <a:prstGeom prst="rect">
-            <a:avLst/>
-          </a:prstGeom>
-        </p:spPr>
-      </p:pic>
-    </p:spTree>
-    <p:extLst>
-      <p:ext uri="{BB962C8B-B14F-4D97-AF65-F5344CB8AC3E}">
-        <p14:creationId xmlns:p14="http://schemas.microsoft.com/office/powerpoint/2010/main" val="2469946936"/>
-      </p:ext>
-    </p:extLst>
-  </p:cSld>
-  <p:clrMapOvr>
-    <a:masterClrMapping/>
-  </p:clrMapOvr>
-</p:sld>
-</file>
-
-<file path=ppt/slides/slide30.xml><?xml version="1.0" encoding="utf-8"?>
+<file path=ppt/slides/slide31.xml><?xml version="1.0" encoding="utf-8"?>
 <p:sld xmlns:a="http://schemas.openxmlformats.org/drawingml/2006/main" xmlns:r="http://schemas.openxmlformats.org/officeDocument/2006/relationships" xmlns:p="http://schemas.openxmlformats.org/presentationml/2006/main">
   <p:cSld>
     <p:spTree>
@@ -15239,7 +16656,7 @@
 </p:sld>
 </file>
 
-<file path=ppt/slides/slide31.xml><?xml version="1.0" encoding="utf-8"?>
+<file path=ppt/slides/slide32.xml><?xml version="1.0" encoding="utf-8"?>
 <p:sld xmlns:a="http://schemas.openxmlformats.org/drawingml/2006/main" xmlns:r="http://schemas.openxmlformats.org/officeDocument/2006/relationships" xmlns:p="http://schemas.openxmlformats.org/presentationml/2006/main">
   <p:cSld>
     <p:spTree>
@@ -16982,7 +18399,7 @@
 </p:sld>
 </file>
 
-<file path=ppt/slides/slide32.xml><?xml version="1.0" encoding="utf-8"?>
+<file path=ppt/slides/slide33.xml><?xml version="1.0" encoding="utf-8"?>
 <p:sld xmlns:a="http://schemas.openxmlformats.org/drawingml/2006/main" xmlns:r="http://schemas.openxmlformats.org/officeDocument/2006/relationships" xmlns:p="http://schemas.openxmlformats.org/presentationml/2006/main">
   <p:cSld>
     <p:spTree>
@@ -17143,7 +18560,7 @@
 </p:sld>
 </file>
 
-<file path=ppt/slides/slide33.xml><?xml version="1.0" encoding="utf-8"?>
+<file path=ppt/slides/slide34.xml><?xml version="1.0" encoding="utf-8"?>
 <p:sld xmlns:a="http://schemas.openxmlformats.org/drawingml/2006/main" xmlns:r="http://schemas.openxmlformats.org/officeDocument/2006/relationships" xmlns:p="http://schemas.openxmlformats.org/presentationml/2006/main">
   <p:cSld>
     <p:spTree>
@@ -17309,7 +18726,7 @@
 </p:sld>
 </file>
 
-<file path=ppt/slides/slide34.xml><?xml version="1.0" encoding="utf-8"?>
+<file path=ppt/slides/slide35.xml><?xml version="1.0" encoding="utf-8"?>
 <p:sld xmlns:a="http://schemas.openxmlformats.org/drawingml/2006/main" xmlns:r="http://schemas.openxmlformats.org/officeDocument/2006/relationships" xmlns:p="http://schemas.openxmlformats.org/presentationml/2006/main">
   <p:cSld>
     <p:spTree>
@@ -17475,7 +18892,7 @@
 </p:sld>
 </file>
 
-<file path=ppt/slides/slide35.xml><?xml version="1.0" encoding="utf-8"?>
+<file path=ppt/slides/slide36.xml><?xml version="1.0" encoding="utf-8"?>
 <p:sld xmlns:a="http://schemas.openxmlformats.org/drawingml/2006/main" xmlns:r="http://schemas.openxmlformats.org/officeDocument/2006/relationships" xmlns:p="http://schemas.openxmlformats.org/presentationml/2006/main">
   <p:cSld>
     <p:spTree>
@@ -19218,7 +20635,7 @@
 </p:sld>
 </file>
 
-<file path=ppt/slides/slide36.xml><?xml version="1.0" encoding="utf-8"?>
+<file path=ppt/slides/slide37.xml><?xml version="1.0" encoding="utf-8"?>
 <p:sld xmlns:a="http://schemas.openxmlformats.org/drawingml/2006/main" xmlns:r="http://schemas.openxmlformats.org/officeDocument/2006/relationships" xmlns:p="http://schemas.openxmlformats.org/presentationml/2006/main">
   <p:cSld>
     <p:spTree>
@@ -20693,6 +22110,90 @@
 </file>
 
 <file path=ppt/slides/slide7.xml><?xml version="1.0" encoding="utf-8"?>
+<p:sld xmlns:a="http://schemas.openxmlformats.org/drawingml/2006/main" xmlns:r="http://schemas.openxmlformats.org/officeDocument/2006/relationships" xmlns:p="http://schemas.openxmlformats.org/presentationml/2006/main">
+  <p:cSld>
+    <p:spTree>
+      <p:nvGrpSpPr>
+        <p:cNvPr id="1" name=""/>
+        <p:cNvGrpSpPr/>
+        <p:nvPr/>
+      </p:nvGrpSpPr>
+      <p:grpSpPr>
+        <a:xfrm>
+          <a:off x="0" y="0"/>
+          <a:ext cx="0" cy="0"/>
+          <a:chOff x="0" y="0"/>
+          <a:chExt cx="0" cy="0"/>
+        </a:xfrm>
+      </p:grpSpPr>
+      <p:sp>
+        <p:nvSpPr>
+          <p:cNvPr id="2" name="Title 1">
+            <a:extLst>
+              <a:ext uri="{FF2B5EF4-FFF2-40B4-BE49-F238E27FC236}">
+                <a16:creationId xmlns:a16="http://schemas.microsoft.com/office/drawing/2014/main" id="{743D13F2-7090-696A-A0F6-3CB169034685}"/>
+              </a:ext>
+            </a:extLst>
+          </p:cNvPr>
+          <p:cNvSpPr>
+            <a:spLocks noGrp="1"/>
+          </p:cNvSpPr>
+          <p:nvPr>
+            <p:ph type="title"/>
+          </p:nvPr>
+        </p:nvSpPr>
+        <p:spPr/>
+        <p:txBody>
+          <a:bodyPr>
+            <a:normAutofit fontScale="90000"/>
+          </a:bodyPr>
+          <a:lstStyle/>
+          <a:p>
+            <a:pPr algn="ctr"/>
+            <a:r>
+              <a:rPr lang="en-US" sz="3600" dirty="0">
+                <a:solidFill>
+                  <a:srgbClr val="0C13E4"/>
+                </a:solidFill>
+                <a:latin typeface="Gill Sans MT" panose="020B0502020104020203" pitchFamily="34" charset="77"/>
+              </a:rPr>
+              <a:t>What are the major physical controls </a:t>
+            </a:r>
+            <a:br>
+              <a:rPr lang="en-US" sz="3600" dirty="0">
+                <a:solidFill>
+                  <a:srgbClr val="0C13E4"/>
+                </a:solidFill>
+                <a:latin typeface="Gill Sans MT" panose="020B0502020104020203" pitchFamily="34" charset="77"/>
+              </a:rPr>
+            </a:br>
+            <a:r>
+              <a:rPr lang="en-US" sz="3600" dirty="0">
+                <a:solidFill>
+                  <a:srgbClr val="0C13E4"/>
+                </a:solidFill>
+                <a:latin typeface="Gill Sans MT" panose="020B0502020104020203" pitchFamily="34" charset="77"/>
+              </a:rPr>
+              <a:t>on the Southern Ocean carbon sink, and how will they change due to GHG emissions and ozone depletion?</a:t>
+            </a:r>
+            <a:endParaRPr lang="en-US" sz="3600" dirty="0"/>
+          </a:p>
+        </p:txBody>
+      </p:sp>
+    </p:spTree>
+    <p:extLst>
+      <p:ext uri="{BB962C8B-B14F-4D97-AF65-F5344CB8AC3E}">
+        <p14:creationId xmlns:p14="http://schemas.microsoft.com/office/powerpoint/2010/main" val="337377144"/>
+      </p:ext>
+    </p:extLst>
+  </p:cSld>
+  <p:clrMapOvr>
+    <a:masterClrMapping/>
+  </p:clrMapOvr>
+</p:sld>
+</file>
+
+<file path=ppt/slides/slide8.xml><?xml version="1.0" encoding="utf-8"?>
 <p:sld xmlns:a="http://schemas.openxmlformats.org/drawingml/2006/main" xmlns:r="http://schemas.openxmlformats.org/officeDocument/2006/relationships" xmlns:p="http://schemas.openxmlformats.org/presentationml/2006/main">
   <p:cSld>
     <p:spTree>
@@ -21060,7 +22561,7 @@
     </p:spTree>
     <p:extLst>
       <p:ext uri="{BB962C8B-B14F-4D97-AF65-F5344CB8AC3E}">
-        <p14:creationId xmlns:p14="http://schemas.microsoft.com/office/powerpoint/2010/main" val="337377144"/>
+        <p14:creationId xmlns:p14="http://schemas.microsoft.com/office/powerpoint/2010/main" val="635791682"/>
       </p:ext>
     </p:extLst>
   </p:cSld>
@@ -21070,7 +22571,7 @@
 </p:sld>
 </file>
 
-<file path=ppt/slides/slide8.xml><?xml version="1.0" encoding="utf-8"?>
+<file path=ppt/slides/slide9.xml><?xml version="1.0" encoding="utf-8"?>
 <p:sld xmlns:a="http://schemas.openxmlformats.org/drawingml/2006/main" xmlns:r="http://schemas.openxmlformats.org/officeDocument/2006/relationships" xmlns:p="http://schemas.openxmlformats.org/presentationml/2006/main">
   <p:cSld>
     <p:spTree>
@@ -21822,1197 +23323,6 @@
     <p:extLst>
       <p:ext uri="{BB962C8B-B14F-4D97-AF65-F5344CB8AC3E}">
         <p14:creationId xmlns:p14="http://schemas.microsoft.com/office/powerpoint/2010/main" val="2246957727"/>
-      </p:ext>
-    </p:extLst>
-  </p:cSld>
-  <p:clrMapOvr>
-    <a:masterClrMapping/>
-  </p:clrMapOvr>
-</p:sld>
-</file>
-
-<file path=ppt/slides/slide9.xml><?xml version="1.0" encoding="utf-8"?>
-<p:sld xmlns:a="http://schemas.openxmlformats.org/drawingml/2006/main" xmlns:r="http://schemas.openxmlformats.org/officeDocument/2006/relationships" xmlns:p="http://schemas.openxmlformats.org/presentationml/2006/main">
-  <p:cSld>
-    <p:spTree>
-      <p:nvGrpSpPr>
-        <p:cNvPr id="1" name=""/>
-        <p:cNvGrpSpPr/>
-        <p:nvPr/>
-      </p:nvGrpSpPr>
-      <p:grpSpPr>
-        <a:xfrm>
-          <a:off x="0" y="0"/>
-          <a:ext cx="0" cy="0"/>
-          <a:chOff x="0" y="0"/>
-          <a:chExt cx="0" cy="0"/>
-        </a:xfrm>
-      </p:grpSpPr>
-      <p:sp>
-        <p:nvSpPr>
-          <p:cNvPr id="2" name="Title 1">
-            <a:extLst>
-              <a:ext uri="{FF2B5EF4-FFF2-40B4-BE49-F238E27FC236}">
-                <a16:creationId xmlns:a16="http://schemas.microsoft.com/office/drawing/2014/main" id="{743D13F2-7090-696A-A0F6-3CB169034685}"/>
-              </a:ext>
-            </a:extLst>
-          </p:cNvPr>
-          <p:cNvSpPr>
-            <a:spLocks noGrp="1"/>
-          </p:cNvSpPr>
-          <p:nvPr>
-            <p:ph type="title"/>
-          </p:nvPr>
-        </p:nvSpPr>
-        <p:spPr/>
-        <p:txBody>
-          <a:bodyPr>
-            <a:normAutofit fontScale="90000"/>
-          </a:bodyPr>
-          <a:lstStyle/>
-          <a:p>
-            <a:pPr algn="ctr"/>
-            <a:r>
-              <a:rPr lang="en-US" sz="3600" dirty="0">
-                <a:solidFill>
-                  <a:srgbClr val="0C13E4"/>
-                </a:solidFill>
-                <a:latin typeface="Gill Sans MT" panose="020B0502020104020203" pitchFamily="34" charset="77"/>
-              </a:rPr>
-              <a:t>What are the major physical controls </a:t>
-            </a:r>
-            <a:br>
-              <a:rPr lang="en-US" sz="3600" dirty="0">
-                <a:solidFill>
-                  <a:srgbClr val="0C13E4"/>
-                </a:solidFill>
-                <a:latin typeface="Gill Sans MT" panose="020B0502020104020203" pitchFamily="34" charset="77"/>
-              </a:rPr>
-            </a:br>
-            <a:r>
-              <a:rPr lang="en-US" sz="3600" dirty="0">
-                <a:solidFill>
-                  <a:srgbClr val="0C13E4"/>
-                </a:solidFill>
-                <a:latin typeface="Gill Sans MT" panose="020B0502020104020203" pitchFamily="34" charset="77"/>
-              </a:rPr>
-              <a:t>on the Southern Ocean carbon sink, and how will they change due to GHG emissions and ozone depletion?</a:t>
-            </a:r>
-            <a:endParaRPr lang="en-US" sz="3600" dirty="0"/>
-          </a:p>
-        </p:txBody>
-      </p:sp>
-      <p:sp>
-        <p:nvSpPr>
-          <p:cNvPr id="4" name="TextBox 3">
-            <a:extLst>
-              <a:ext uri="{FF2B5EF4-FFF2-40B4-BE49-F238E27FC236}">
-                <a16:creationId xmlns:a16="http://schemas.microsoft.com/office/drawing/2014/main" id="{12DF8619-896C-4440-9534-287F7012DECF}"/>
-              </a:ext>
-            </a:extLst>
-          </p:cNvPr>
-          <p:cNvSpPr txBox="1"/>
-          <p:nvPr/>
-        </p:nvSpPr>
-        <p:spPr>
-          <a:xfrm>
-            <a:off x="1155816" y="1906137"/>
-            <a:ext cx="2743788" cy="1200329"/>
-          </a:xfrm>
-          <a:prstGeom prst="rect">
-            <a:avLst/>
-          </a:prstGeom>
-          <a:noFill/>
-        </p:spPr>
-        <p:txBody>
-          <a:bodyPr wrap="square">
-            <a:spAutoFit/>
-          </a:bodyPr>
-          <a:lstStyle/>
-          <a:p>
-            <a:pPr algn="ctr"/>
-            <a:r>
-              <a:rPr lang="en-CA" sz="2400" b="1" dirty="0">
-                <a:solidFill>
-                  <a:srgbClr val="000000"/>
-                </a:solidFill>
-                <a:latin typeface="Georgia" panose="02040502050405020303" pitchFamily="18" charset="0"/>
-                <a:cs typeface="Gill Sans" panose="020B0502020104020203" pitchFamily="34" charset="-79"/>
-              </a:rPr>
-              <a:t>sea surface temperature</a:t>
-            </a:r>
-          </a:p>
-          <a:p>
-            <a:pPr algn="ctr"/>
-            <a:r>
-              <a:rPr lang="en-CA" sz="2400" b="1" dirty="0">
-                <a:solidFill>
-                  <a:srgbClr val="000000"/>
-                </a:solidFill>
-                <a:latin typeface="Georgia" panose="02040502050405020303" pitchFamily="18" charset="0"/>
-                <a:cs typeface="Gill Sans" panose="020B0502020104020203" pitchFamily="34" charset="-79"/>
-              </a:rPr>
-              <a:t>(SST)</a:t>
-            </a:r>
-            <a:endParaRPr lang="en-US" sz="2400" b="1" dirty="0"/>
-          </a:p>
-        </p:txBody>
-      </p:sp>
-      <p:sp>
-        <p:nvSpPr>
-          <p:cNvPr id="5" name="TextBox 4">
-            <a:extLst>
-              <a:ext uri="{FF2B5EF4-FFF2-40B4-BE49-F238E27FC236}">
-                <a16:creationId xmlns:a16="http://schemas.microsoft.com/office/drawing/2014/main" id="{2348D4B2-B94B-0F69-593E-9DCD4FE479BB}"/>
-              </a:ext>
-            </a:extLst>
-          </p:cNvPr>
-          <p:cNvSpPr txBox="1"/>
-          <p:nvPr/>
-        </p:nvSpPr>
-        <p:spPr>
-          <a:xfrm>
-            <a:off x="4994460" y="1906136"/>
-            <a:ext cx="2203080" cy="1200329"/>
-          </a:xfrm>
-          <a:prstGeom prst="rect">
-            <a:avLst/>
-          </a:prstGeom>
-          <a:noFill/>
-        </p:spPr>
-        <p:txBody>
-          <a:bodyPr wrap="square">
-            <a:spAutoFit/>
-          </a:bodyPr>
-          <a:lstStyle/>
-          <a:p>
-            <a:pPr algn="ctr"/>
-            <a:r>
-              <a:rPr lang="en-CA" sz="2400" b="1" dirty="0">
-                <a:solidFill>
-                  <a:srgbClr val="000000"/>
-                </a:solidFill>
-                <a:latin typeface="Georgia" panose="02040502050405020303" pitchFamily="18" charset="0"/>
-                <a:cs typeface="Gill Sans" panose="020B0502020104020203" pitchFamily="34" charset="-79"/>
-              </a:rPr>
-              <a:t>mixed layer </a:t>
-            </a:r>
-          </a:p>
-          <a:p>
-            <a:pPr algn="ctr"/>
-            <a:r>
-              <a:rPr lang="en-CA" sz="2400" b="1" dirty="0">
-                <a:solidFill>
-                  <a:srgbClr val="000000"/>
-                </a:solidFill>
-                <a:latin typeface="Georgia" panose="02040502050405020303" pitchFamily="18" charset="0"/>
-                <a:cs typeface="Gill Sans" panose="020B0502020104020203" pitchFamily="34" charset="-79"/>
-              </a:rPr>
-              <a:t>depth </a:t>
-            </a:r>
-          </a:p>
-          <a:p>
-            <a:pPr algn="ctr"/>
-            <a:r>
-              <a:rPr lang="en-CA" sz="2400" b="1" dirty="0">
-                <a:solidFill>
-                  <a:srgbClr val="000000"/>
-                </a:solidFill>
-                <a:latin typeface="Georgia" panose="02040502050405020303" pitchFamily="18" charset="0"/>
-                <a:cs typeface="Gill Sans" panose="020B0502020104020203" pitchFamily="34" charset="-79"/>
-              </a:rPr>
-              <a:t>(MLD)</a:t>
-            </a:r>
-          </a:p>
-        </p:txBody>
-      </p:sp>
-      <p:sp>
-        <p:nvSpPr>
-          <p:cNvPr id="6" name="TextBox 5">
-            <a:extLst>
-              <a:ext uri="{FF2B5EF4-FFF2-40B4-BE49-F238E27FC236}">
-                <a16:creationId xmlns:a16="http://schemas.microsoft.com/office/drawing/2014/main" id="{256DDB4B-4437-434D-72B5-B631BFD2DBC5}"/>
-              </a:ext>
-            </a:extLst>
-          </p:cNvPr>
-          <p:cNvSpPr txBox="1"/>
-          <p:nvPr/>
-        </p:nvSpPr>
-        <p:spPr>
-          <a:xfrm>
-            <a:off x="8548428" y="2090801"/>
-            <a:ext cx="2203080" cy="830997"/>
-          </a:xfrm>
-          <a:prstGeom prst="rect">
-            <a:avLst/>
-          </a:prstGeom>
-          <a:noFill/>
-        </p:spPr>
-        <p:txBody>
-          <a:bodyPr wrap="square">
-            <a:spAutoFit/>
-          </a:bodyPr>
-          <a:lstStyle/>
-          <a:p>
-            <a:pPr algn="ctr"/>
-            <a:r>
-              <a:rPr lang="en-CA" sz="2400" b="1" dirty="0">
-                <a:solidFill>
-                  <a:srgbClr val="000000"/>
-                </a:solidFill>
-                <a:latin typeface="Georgia" panose="02040502050405020303" pitchFamily="18" charset="0"/>
-                <a:cs typeface="Gill Sans" panose="020B0502020104020203" pitchFamily="34" charset="-79"/>
-              </a:rPr>
-              <a:t>overturning</a:t>
-            </a:r>
-          </a:p>
-          <a:p>
-            <a:pPr algn="ctr"/>
-            <a:r>
-              <a:rPr lang="en-CA" sz="2400" b="1" dirty="0">
-                <a:solidFill>
-                  <a:srgbClr val="000000"/>
-                </a:solidFill>
-                <a:latin typeface="Georgia" panose="02040502050405020303" pitchFamily="18" charset="0"/>
-                <a:cs typeface="Gill Sans" panose="020B0502020104020203" pitchFamily="34" charset="-79"/>
-              </a:rPr>
-              <a:t>(OT)</a:t>
-            </a:r>
-            <a:endParaRPr lang="en-US" sz="2400" b="1" dirty="0"/>
-          </a:p>
-        </p:txBody>
-      </p:sp>
-      <p:grpSp>
-        <p:nvGrpSpPr>
-          <p:cNvPr id="47" name="Group 46">
-            <a:extLst>
-              <a:ext uri="{FF2B5EF4-FFF2-40B4-BE49-F238E27FC236}">
-                <a16:creationId xmlns:a16="http://schemas.microsoft.com/office/drawing/2014/main" id="{42BE6AA8-AFE0-8689-DDF8-373B6DBBCCEE}"/>
-              </a:ext>
-            </a:extLst>
-          </p:cNvPr>
-          <p:cNvGrpSpPr/>
-          <p:nvPr/>
-        </p:nvGrpSpPr>
-        <p:grpSpPr>
-          <a:xfrm>
-            <a:off x="1543092" y="3275472"/>
-            <a:ext cx="2095200" cy="895320"/>
-            <a:chOff x="1540944" y="3811608"/>
-            <a:chExt cx="2095200" cy="895320"/>
-          </a:xfrm>
-        </p:grpSpPr>
-        <mc:AlternateContent xmlns:mc="http://schemas.openxmlformats.org/markup-compatibility/2006" xmlns:p14="http://schemas.microsoft.com/office/powerpoint/2010/main">
-          <mc:Choice Requires="p14">
-            <p:contentPart p14:bwMode="auto" r:id="rId3">
-              <p14:nvContentPartPr>
-                <p14:cNvPr id="9" name="Ink 8">
-                  <a:extLst>
-                    <a:ext uri="{FF2B5EF4-FFF2-40B4-BE49-F238E27FC236}">
-                      <a16:creationId xmlns:a16="http://schemas.microsoft.com/office/drawing/2014/main" id="{FC80510C-4050-8669-4226-DB6A9E9D90CF}"/>
-                    </a:ext>
-                  </a:extLst>
-                </p14:cNvPr>
-                <p14:cNvContentPartPr/>
-                <p14:nvPr/>
-              </p14:nvContentPartPr>
-              <p14:xfrm>
-                <a:off x="1540944" y="4233888"/>
-                <a:ext cx="2095200" cy="223560"/>
-              </p14:xfrm>
-            </p:contentPart>
-          </mc:Choice>
-          <mc:Fallback xmlns="">
-            <p:pic>
-              <p:nvPicPr>
-                <p:cNvPr id="9" name="Ink 8">
-                  <a:extLst>
-                    <a:ext uri="{FF2B5EF4-FFF2-40B4-BE49-F238E27FC236}">
-                      <a16:creationId xmlns:a16="http://schemas.microsoft.com/office/drawing/2014/main" id="{FC80510C-4050-8669-4226-DB6A9E9D90CF}"/>
-                    </a:ext>
-                  </a:extLst>
-                </p:cNvPr>
-                <p:cNvPicPr/>
-                <p:nvPr/>
-              </p:nvPicPr>
-              <p:blipFill>
-                <a:blip r:embed="rId4"/>
-                <a:stretch>
-                  <a:fillRect/>
-                </a:stretch>
-              </p:blipFill>
-              <p:spPr>
-                <a:xfrm>
-                  <a:off x="1522944" y="4215888"/>
-                  <a:ext cx="2130840" cy="259200"/>
-                </a:xfrm>
-                <a:prstGeom prst="rect">
-                  <a:avLst/>
-                </a:prstGeom>
-              </p:spPr>
-            </p:pic>
-          </mc:Fallback>
-        </mc:AlternateContent>
-        <p:grpSp>
-          <p:nvGrpSpPr>
-            <p:cNvPr id="35" name="Group 34">
-              <a:extLst>
-                <a:ext uri="{FF2B5EF4-FFF2-40B4-BE49-F238E27FC236}">
-                  <a16:creationId xmlns:a16="http://schemas.microsoft.com/office/drawing/2014/main" id="{9A47C0ED-1DCA-19AB-6E06-0031244AF319}"/>
-                </a:ext>
-              </a:extLst>
-            </p:cNvPr>
-            <p:cNvGrpSpPr/>
-            <p:nvPr/>
-          </p:nvGrpSpPr>
-          <p:grpSpPr>
-            <a:xfrm>
-              <a:off x="2594664" y="3811608"/>
-              <a:ext cx="400320" cy="895320"/>
-              <a:chOff x="2258424" y="4817808"/>
-              <a:chExt cx="400320" cy="895320"/>
-            </a:xfrm>
-          </p:grpSpPr>
-          <mc:AlternateContent xmlns:mc="http://schemas.openxmlformats.org/markup-compatibility/2006" xmlns:p14="http://schemas.microsoft.com/office/powerpoint/2010/main">
-            <mc:Choice Requires="p14">
-              <p:contentPart p14:bwMode="auto" r:id="rId5">
-                <p14:nvContentPartPr>
-                  <p14:cNvPr id="33" name="Ink 32">
-                    <a:extLst>
-                      <a:ext uri="{FF2B5EF4-FFF2-40B4-BE49-F238E27FC236}">
-                        <a16:creationId xmlns:a16="http://schemas.microsoft.com/office/drawing/2014/main" id="{59DDF7AF-5BF7-9D89-56C1-415AAD31535F}"/>
-                      </a:ext>
-                    </a:extLst>
-                  </p14:cNvPr>
-                  <p14:cNvContentPartPr/>
-                  <p14:nvPr/>
-                </p14:nvContentPartPr>
-                <p14:xfrm>
-                  <a:off x="2404224" y="4905648"/>
-                  <a:ext cx="34200" cy="807480"/>
-                </p14:xfrm>
-              </p:contentPart>
-            </mc:Choice>
-            <mc:Fallback xmlns="">
-              <p:pic>
-                <p:nvPicPr>
-                  <p:cNvPr id="33" name="Ink 32">
-                    <a:extLst>
-                      <a:ext uri="{FF2B5EF4-FFF2-40B4-BE49-F238E27FC236}">
-                        <a16:creationId xmlns:a16="http://schemas.microsoft.com/office/drawing/2014/main" id="{59DDF7AF-5BF7-9D89-56C1-415AAD31535F}"/>
-                      </a:ext>
-                    </a:extLst>
-                  </p:cNvPr>
-                  <p:cNvPicPr/>
-                  <p:nvPr/>
-                </p:nvPicPr>
-                <p:blipFill>
-                  <a:blip r:embed="rId6"/>
-                  <a:stretch>
-                    <a:fillRect/>
-                  </a:stretch>
-                </p:blipFill>
-                <p:spPr>
-                  <a:xfrm>
-                    <a:off x="2386224" y="4887648"/>
-                    <a:ext cx="69840" cy="843120"/>
-                  </a:xfrm>
-                  <a:prstGeom prst="rect">
-                    <a:avLst/>
-                  </a:prstGeom>
-                </p:spPr>
-              </p:pic>
-            </mc:Fallback>
-          </mc:AlternateContent>
-          <mc:AlternateContent xmlns:mc="http://schemas.openxmlformats.org/markup-compatibility/2006" xmlns:p14="http://schemas.microsoft.com/office/powerpoint/2010/main">
-            <mc:Choice Requires="p14">
-              <p:contentPart p14:bwMode="auto" r:id="rId7">
-                <p14:nvContentPartPr>
-                  <p14:cNvPr id="34" name="Ink 33">
-                    <a:extLst>
-                      <a:ext uri="{FF2B5EF4-FFF2-40B4-BE49-F238E27FC236}">
-                        <a16:creationId xmlns:a16="http://schemas.microsoft.com/office/drawing/2014/main" id="{05C30469-965C-772A-D37C-D178DC2DFFE9}"/>
-                      </a:ext>
-                    </a:extLst>
-                  </p14:cNvPr>
-                  <p14:cNvContentPartPr/>
-                  <p14:nvPr/>
-                </p14:nvContentPartPr>
-                <p14:xfrm>
-                  <a:off x="2258424" y="4817808"/>
-                  <a:ext cx="400320" cy="367920"/>
-                </p14:xfrm>
-              </p:contentPart>
-            </mc:Choice>
-            <mc:Fallback xmlns="">
-              <p:pic>
-                <p:nvPicPr>
-                  <p:cNvPr id="34" name="Ink 33">
-                    <a:extLst>
-                      <a:ext uri="{FF2B5EF4-FFF2-40B4-BE49-F238E27FC236}">
-                        <a16:creationId xmlns:a16="http://schemas.microsoft.com/office/drawing/2014/main" id="{05C30469-965C-772A-D37C-D178DC2DFFE9}"/>
-                      </a:ext>
-                    </a:extLst>
-                  </p:cNvPr>
-                  <p:cNvPicPr/>
-                  <p:nvPr/>
-                </p:nvPicPr>
-                <p:blipFill>
-                  <a:blip r:embed="rId8"/>
-                  <a:stretch>
-                    <a:fillRect/>
-                  </a:stretch>
-                </p:blipFill>
-                <p:spPr>
-                  <a:xfrm>
-                    <a:off x="2240784" y="4800168"/>
-                    <a:ext cx="435960" cy="403560"/>
-                  </a:xfrm>
-                  <a:prstGeom prst="rect">
-                    <a:avLst/>
-                  </a:prstGeom>
-                </p:spPr>
-              </p:pic>
-            </mc:Fallback>
-          </mc:AlternateContent>
-        </p:grpSp>
-      </p:grpSp>
-      <p:grpSp>
-        <p:nvGrpSpPr>
-          <p:cNvPr id="46" name="Group 45">
-            <a:extLst>
-              <a:ext uri="{FF2B5EF4-FFF2-40B4-BE49-F238E27FC236}">
-                <a16:creationId xmlns:a16="http://schemas.microsoft.com/office/drawing/2014/main" id="{69DEC568-168A-7BA1-0572-75CFC17B69A3}"/>
-              </a:ext>
-            </a:extLst>
-          </p:cNvPr>
-          <p:cNvGrpSpPr/>
-          <p:nvPr/>
-        </p:nvGrpSpPr>
-        <p:grpSpPr>
-          <a:xfrm>
-            <a:off x="8656308" y="3643392"/>
-            <a:ext cx="2095200" cy="1656252"/>
-            <a:chOff x="8656308" y="4231116"/>
-            <a:chExt cx="2095200" cy="1656252"/>
-          </a:xfrm>
-        </p:grpSpPr>
-        <mc:AlternateContent xmlns:mc="http://schemas.openxmlformats.org/markup-compatibility/2006" xmlns:p14="http://schemas.microsoft.com/office/powerpoint/2010/main">
-          <mc:Choice Requires="p14">
-            <p:contentPart p14:bwMode="auto" r:id="rId9">
-              <p14:nvContentPartPr>
-                <p14:cNvPr id="12" name="Ink 11">
-                  <a:extLst>
-                    <a:ext uri="{FF2B5EF4-FFF2-40B4-BE49-F238E27FC236}">
-                      <a16:creationId xmlns:a16="http://schemas.microsoft.com/office/drawing/2014/main" id="{C7F376EC-D88B-6915-B734-9451B95165F8}"/>
-                    </a:ext>
-                  </a:extLst>
-                </p14:cNvPr>
-                <p14:cNvContentPartPr/>
-                <p14:nvPr/>
-              </p14:nvContentPartPr>
-              <p14:xfrm>
-                <a:off x="8656308" y="4231116"/>
-                <a:ext cx="2095200" cy="223560"/>
-              </p14:xfrm>
-            </p:contentPart>
-          </mc:Choice>
-          <mc:Fallback xmlns="">
-            <p:pic>
-              <p:nvPicPr>
-                <p:cNvPr id="12" name="Ink 11">
-                  <a:extLst>
-                    <a:ext uri="{FF2B5EF4-FFF2-40B4-BE49-F238E27FC236}">
-                      <a16:creationId xmlns:a16="http://schemas.microsoft.com/office/drawing/2014/main" id="{C7F376EC-D88B-6915-B734-9451B95165F8}"/>
-                    </a:ext>
-                  </a:extLst>
-                </p:cNvPr>
-                <p:cNvPicPr/>
-                <p:nvPr/>
-              </p:nvPicPr>
-              <p:blipFill>
-                <a:blip r:embed="rId4"/>
-                <a:stretch>
-                  <a:fillRect/>
-                </a:stretch>
-              </p:blipFill>
-              <p:spPr>
-                <a:xfrm>
-                  <a:off x="8638308" y="4213116"/>
-                  <a:ext cx="2130840" cy="259200"/>
-                </a:xfrm>
-                <a:prstGeom prst="rect">
-                  <a:avLst/>
-                </a:prstGeom>
-              </p:spPr>
-            </p:pic>
-          </mc:Fallback>
-        </mc:AlternateContent>
-        <p:grpSp>
-          <p:nvGrpSpPr>
-            <p:cNvPr id="16" name="Group 15">
-              <a:extLst>
-                <a:ext uri="{FF2B5EF4-FFF2-40B4-BE49-F238E27FC236}">
-                  <a16:creationId xmlns:a16="http://schemas.microsoft.com/office/drawing/2014/main" id="{2EA058A1-511D-E672-BE2D-45D9D4066D6D}"/>
-                </a:ext>
-              </a:extLst>
-            </p:cNvPr>
-            <p:cNvGrpSpPr/>
-            <p:nvPr/>
-          </p:nvGrpSpPr>
-          <p:grpSpPr>
-            <a:xfrm>
-              <a:off x="9107784" y="4687488"/>
-              <a:ext cx="1369800" cy="997920"/>
-              <a:chOff x="9107784" y="4687488"/>
-              <a:chExt cx="1369800" cy="997920"/>
-            </a:xfrm>
-          </p:grpSpPr>
-          <mc:AlternateContent xmlns:mc="http://schemas.openxmlformats.org/markup-compatibility/2006" xmlns:p14="http://schemas.microsoft.com/office/powerpoint/2010/main">
-            <mc:Choice Requires="p14">
-              <p:contentPart p14:bwMode="auto" r:id="rId10">
-                <p14:nvContentPartPr>
-                  <p14:cNvPr id="14" name="Ink 13">
-                    <a:extLst>
-                      <a:ext uri="{FF2B5EF4-FFF2-40B4-BE49-F238E27FC236}">
-                        <a16:creationId xmlns:a16="http://schemas.microsoft.com/office/drawing/2014/main" id="{0A6DEC9F-4144-7A2F-A675-2AAEC4AE2ABE}"/>
-                      </a:ext>
-                    </a:extLst>
-                  </p14:cNvPr>
-                  <p14:cNvContentPartPr/>
-                  <p14:nvPr/>
-                </p14:nvContentPartPr>
-                <p14:xfrm>
-                  <a:off x="9107784" y="4706928"/>
-                  <a:ext cx="1369800" cy="978480"/>
-                </p14:xfrm>
-              </p:contentPart>
-            </mc:Choice>
-            <mc:Fallback xmlns="">
-              <p:pic>
-                <p:nvPicPr>
-                  <p:cNvPr id="14" name="Ink 13">
-                    <a:extLst>
-                      <a:ext uri="{FF2B5EF4-FFF2-40B4-BE49-F238E27FC236}">
-                        <a16:creationId xmlns:a16="http://schemas.microsoft.com/office/drawing/2014/main" id="{0A6DEC9F-4144-7A2F-A675-2AAEC4AE2ABE}"/>
-                      </a:ext>
-                    </a:extLst>
-                  </p:cNvPr>
-                  <p:cNvPicPr/>
-                  <p:nvPr/>
-                </p:nvPicPr>
-                <p:blipFill>
-                  <a:blip r:embed="rId11"/>
-                  <a:stretch>
-                    <a:fillRect/>
-                  </a:stretch>
-                </p:blipFill>
-                <p:spPr>
-                  <a:xfrm>
-                    <a:off x="9090144" y="4689288"/>
-                    <a:ext cx="1405440" cy="1014120"/>
-                  </a:xfrm>
-                  <a:prstGeom prst="rect">
-                    <a:avLst/>
-                  </a:prstGeom>
-                </p:spPr>
-              </p:pic>
-            </mc:Fallback>
-          </mc:AlternateContent>
-          <mc:AlternateContent xmlns:mc="http://schemas.openxmlformats.org/markup-compatibility/2006" xmlns:p14="http://schemas.microsoft.com/office/powerpoint/2010/main">
-            <mc:Choice Requires="p14">
-              <p:contentPart p14:bwMode="auto" r:id="rId12">
-                <p14:nvContentPartPr>
-                  <p14:cNvPr id="15" name="Ink 14">
-                    <a:extLst>
-                      <a:ext uri="{FF2B5EF4-FFF2-40B4-BE49-F238E27FC236}">
-                        <a16:creationId xmlns:a16="http://schemas.microsoft.com/office/drawing/2014/main" id="{8EF86E93-0E7D-0EB2-C009-883A1793FA16}"/>
-                      </a:ext>
-                    </a:extLst>
-                  </p14:cNvPr>
-                  <p14:cNvContentPartPr/>
-                  <p14:nvPr/>
-                </p14:nvContentPartPr>
-                <p14:xfrm>
-                  <a:off x="9797904" y="4687488"/>
-                  <a:ext cx="177840" cy="307080"/>
-                </p14:xfrm>
-              </p:contentPart>
-            </mc:Choice>
-            <mc:Fallback xmlns="">
-              <p:pic>
-                <p:nvPicPr>
-                  <p:cNvPr id="15" name="Ink 14">
-                    <a:extLst>
-                      <a:ext uri="{FF2B5EF4-FFF2-40B4-BE49-F238E27FC236}">
-                        <a16:creationId xmlns:a16="http://schemas.microsoft.com/office/drawing/2014/main" id="{8EF86E93-0E7D-0EB2-C009-883A1793FA16}"/>
-                      </a:ext>
-                    </a:extLst>
-                  </p:cNvPr>
-                  <p:cNvPicPr/>
-                  <p:nvPr/>
-                </p:nvPicPr>
-                <p:blipFill>
-                  <a:blip r:embed="rId13"/>
-                  <a:stretch>
-                    <a:fillRect/>
-                  </a:stretch>
-                </p:blipFill>
-                <p:spPr>
-                  <a:xfrm>
-                    <a:off x="9779904" y="4669848"/>
-                    <a:ext cx="213480" cy="342720"/>
-                  </a:xfrm>
-                  <a:prstGeom prst="rect">
-                    <a:avLst/>
-                  </a:prstGeom>
-                </p:spPr>
-              </p:pic>
-            </mc:Fallback>
-          </mc:AlternateContent>
-        </p:grpSp>
-        <p:grpSp>
-          <p:nvGrpSpPr>
-            <p:cNvPr id="39" name="Group 38">
-              <a:extLst>
-                <a:ext uri="{FF2B5EF4-FFF2-40B4-BE49-F238E27FC236}">
-                  <a16:creationId xmlns:a16="http://schemas.microsoft.com/office/drawing/2014/main" id="{D4C72199-28F1-01E0-DD45-263503647CDC}"/>
-                </a:ext>
-              </a:extLst>
-            </p:cNvPr>
-            <p:cNvGrpSpPr/>
-            <p:nvPr/>
-          </p:nvGrpSpPr>
-          <p:grpSpPr>
-            <a:xfrm>
-              <a:off x="9399984" y="4992048"/>
-              <a:ext cx="400320" cy="895320"/>
-              <a:chOff x="2258424" y="4817808"/>
-              <a:chExt cx="400320" cy="895320"/>
-            </a:xfrm>
-          </p:grpSpPr>
-          <mc:AlternateContent xmlns:mc="http://schemas.openxmlformats.org/markup-compatibility/2006" xmlns:p14="http://schemas.microsoft.com/office/powerpoint/2010/main">
-            <mc:Choice Requires="p14">
-              <p:contentPart p14:bwMode="auto" r:id="rId14">
-                <p14:nvContentPartPr>
-                  <p14:cNvPr id="40" name="Ink 39">
-                    <a:extLst>
-                      <a:ext uri="{FF2B5EF4-FFF2-40B4-BE49-F238E27FC236}">
-                        <a16:creationId xmlns:a16="http://schemas.microsoft.com/office/drawing/2014/main" id="{9E27D847-382F-DAE4-6748-383264C14F96}"/>
-                      </a:ext>
-                    </a:extLst>
-                  </p14:cNvPr>
-                  <p14:cNvContentPartPr/>
-                  <p14:nvPr/>
-                </p14:nvContentPartPr>
-                <p14:xfrm>
-                  <a:off x="2404224" y="4905648"/>
-                  <a:ext cx="34200" cy="807480"/>
-                </p14:xfrm>
-              </p:contentPart>
-            </mc:Choice>
-            <mc:Fallback xmlns="">
-              <p:pic>
-                <p:nvPicPr>
-                  <p:cNvPr id="40" name="Ink 39">
-                    <a:extLst>
-                      <a:ext uri="{FF2B5EF4-FFF2-40B4-BE49-F238E27FC236}">
-                        <a16:creationId xmlns:a16="http://schemas.microsoft.com/office/drawing/2014/main" id="{9E27D847-382F-DAE4-6748-383264C14F96}"/>
-                      </a:ext>
-                    </a:extLst>
-                  </p:cNvPr>
-                  <p:cNvPicPr/>
-                  <p:nvPr/>
-                </p:nvPicPr>
-                <p:blipFill>
-                  <a:blip r:embed="rId6"/>
-                  <a:stretch>
-                    <a:fillRect/>
-                  </a:stretch>
-                </p:blipFill>
-                <p:spPr>
-                  <a:xfrm>
-                    <a:off x="2386224" y="4887648"/>
-                    <a:ext cx="69840" cy="843120"/>
-                  </a:xfrm>
-                  <a:prstGeom prst="rect">
-                    <a:avLst/>
-                  </a:prstGeom>
-                </p:spPr>
-              </p:pic>
-            </mc:Fallback>
-          </mc:AlternateContent>
-          <mc:AlternateContent xmlns:mc="http://schemas.openxmlformats.org/markup-compatibility/2006" xmlns:p14="http://schemas.microsoft.com/office/powerpoint/2010/main">
-            <mc:Choice Requires="p14">
-              <p:contentPart p14:bwMode="auto" r:id="rId15">
-                <p14:nvContentPartPr>
-                  <p14:cNvPr id="41" name="Ink 40">
-                    <a:extLst>
-                      <a:ext uri="{FF2B5EF4-FFF2-40B4-BE49-F238E27FC236}">
-                        <a16:creationId xmlns:a16="http://schemas.microsoft.com/office/drawing/2014/main" id="{2BD54CD0-DFB3-8816-ACB8-8ED8C4DDB567}"/>
-                      </a:ext>
-                    </a:extLst>
-                  </p14:cNvPr>
-                  <p14:cNvContentPartPr/>
-                  <p14:nvPr/>
-                </p14:nvContentPartPr>
-                <p14:xfrm>
-                  <a:off x="2258424" y="4817808"/>
-                  <a:ext cx="400320" cy="367920"/>
-                </p14:xfrm>
-              </p:contentPart>
-            </mc:Choice>
-            <mc:Fallback xmlns="">
-              <p:pic>
-                <p:nvPicPr>
-                  <p:cNvPr id="41" name="Ink 40">
-                    <a:extLst>
-                      <a:ext uri="{FF2B5EF4-FFF2-40B4-BE49-F238E27FC236}">
-                        <a16:creationId xmlns:a16="http://schemas.microsoft.com/office/drawing/2014/main" id="{2BD54CD0-DFB3-8816-ACB8-8ED8C4DDB567}"/>
-                      </a:ext>
-                    </a:extLst>
-                  </p:cNvPr>
-                  <p:cNvPicPr/>
-                  <p:nvPr/>
-                </p:nvPicPr>
-                <p:blipFill>
-                  <a:blip r:embed="rId8"/>
-                  <a:stretch>
-                    <a:fillRect/>
-                  </a:stretch>
-                </p:blipFill>
-                <p:spPr>
-                  <a:xfrm>
-                    <a:off x="2240784" y="4800168"/>
-                    <a:ext cx="435960" cy="403560"/>
-                  </a:xfrm>
-                  <a:prstGeom prst="rect">
-                    <a:avLst/>
-                  </a:prstGeom>
-                </p:spPr>
-              </p:pic>
-            </mc:Fallback>
-          </mc:AlternateContent>
-        </p:grpSp>
-      </p:grpSp>
-      <p:grpSp>
-        <p:nvGrpSpPr>
-          <p:cNvPr id="45" name="Group 44">
-            <a:extLst>
-              <a:ext uri="{FF2B5EF4-FFF2-40B4-BE49-F238E27FC236}">
-                <a16:creationId xmlns:a16="http://schemas.microsoft.com/office/drawing/2014/main" id="{8B42C2C8-8BF4-A372-ACF5-0A80E0E5D405}"/>
-              </a:ext>
-            </a:extLst>
-          </p:cNvPr>
-          <p:cNvGrpSpPr/>
-          <p:nvPr/>
-        </p:nvGrpSpPr>
-        <p:grpSpPr>
-          <a:xfrm>
-            <a:off x="5048400" y="3634248"/>
-            <a:ext cx="2095200" cy="1535604"/>
-            <a:chOff x="5048400" y="4231116"/>
-            <a:chExt cx="2095200" cy="1535604"/>
-          </a:xfrm>
-        </p:grpSpPr>
-        <mc:AlternateContent xmlns:mc="http://schemas.openxmlformats.org/markup-compatibility/2006" xmlns:p14="http://schemas.microsoft.com/office/powerpoint/2010/main">
-          <mc:Choice Requires="p14">
-            <p:contentPart p14:bwMode="auto" r:id="rId16">
-              <p14:nvContentPartPr>
-                <p14:cNvPr id="11" name="Ink 10">
-                  <a:extLst>
-                    <a:ext uri="{FF2B5EF4-FFF2-40B4-BE49-F238E27FC236}">
-                      <a16:creationId xmlns:a16="http://schemas.microsoft.com/office/drawing/2014/main" id="{A578C256-DEEB-8885-C4DD-BAEDFEE5328C}"/>
-                    </a:ext>
-                  </a:extLst>
-                </p14:cNvPr>
-                <p14:cNvContentPartPr/>
-                <p14:nvPr/>
-              </p14:nvContentPartPr>
-              <p14:xfrm>
-                <a:off x="5048400" y="4231116"/>
-                <a:ext cx="2095200" cy="223560"/>
-              </p14:xfrm>
-            </p:contentPart>
-          </mc:Choice>
-          <mc:Fallback xmlns="">
-            <p:pic>
-              <p:nvPicPr>
-                <p:cNvPr id="11" name="Ink 10">
-                  <a:extLst>
-                    <a:ext uri="{FF2B5EF4-FFF2-40B4-BE49-F238E27FC236}">
-                      <a16:creationId xmlns:a16="http://schemas.microsoft.com/office/drawing/2014/main" id="{A578C256-DEEB-8885-C4DD-BAEDFEE5328C}"/>
-                    </a:ext>
-                  </a:extLst>
-                </p:cNvPr>
-                <p:cNvPicPr/>
-                <p:nvPr/>
-              </p:nvPicPr>
-              <p:blipFill>
-                <a:blip r:embed="rId4"/>
-                <a:stretch>
-                  <a:fillRect/>
-                </a:stretch>
-              </p:blipFill>
-              <p:spPr>
-                <a:xfrm>
-                  <a:off x="5030400" y="4213116"/>
-                  <a:ext cx="2130840" cy="259200"/>
-                </a:xfrm>
-                <a:prstGeom prst="rect">
-                  <a:avLst/>
-                </a:prstGeom>
-              </p:spPr>
-            </p:pic>
-          </mc:Fallback>
-        </mc:AlternateContent>
-        <mc:AlternateContent xmlns:mc="http://schemas.openxmlformats.org/markup-compatibility/2006" xmlns:p14="http://schemas.microsoft.com/office/powerpoint/2010/main">
-          <mc:Choice Requires="p14">
-            <p:contentPart p14:bwMode="auto" r:id="rId17">
-              <p14:nvContentPartPr>
-                <p14:cNvPr id="13" name="Ink 12">
-                  <a:extLst>
-                    <a:ext uri="{FF2B5EF4-FFF2-40B4-BE49-F238E27FC236}">
-                      <a16:creationId xmlns:a16="http://schemas.microsoft.com/office/drawing/2014/main" id="{F9E6BEF6-96C6-3E9D-2F1B-B08AE3B665F7}"/>
-                    </a:ext>
-                  </a:extLst>
-                </p14:cNvPr>
-                <p14:cNvContentPartPr/>
-                <p14:nvPr/>
-              </p14:nvContentPartPr>
-              <p14:xfrm>
-                <a:off x="5273784" y="4992048"/>
-                <a:ext cx="1863720" cy="430560"/>
-              </p14:xfrm>
-            </p:contentPart>
-          </mc:Choice>
-          <mc:Fallback xmlns="">
-            <p:pic>
-              <p:nvPicPr>
-                <p:cNvPr id="13" name="Ink 12">
-                  <a:extLst>
-                    <a:ext uri="{FF2B5EF4-FFF2-40B4-BE49-F238E27FC236}">
-                      <a16:creationId xmlns:a16="http://schemas.microsoft.com/office/drawing/2014/main" id="{F9E6BEF6-96C6-3E9D-2F1B-B08AE3B665F7}"/>
-                    </a:ext>
-                  </a:extLst>
-                </p:cNvPr>
-                <p:cNvPicPr/>
-                <p:nvPr/>
-              </p:nvPicPr>
-              <p:blipFill>
-                <a:blip r:embed="rId18"/>
-                <a:stretch>
-                  <a:fillRect/>
-                </a:stretch>
-              </p:blipFill>
-              <p:spPr>
-                <a:xfrm>
-                  <a:off x="5255784" y="4974048"/>
-                  <a:ext cx="1899360" cy="466200"/>
-                </a:xfrm>
-                <a:prstGeom prst="rect">
-                  <a:avLst/>
-                </a:prstGeom>
-              </p:spPr>
-            </p:pic>
-          </mc:Fallback>
-        </mc:AlternateContent>
-        <p:grpSp>
-          <p:nvGrpSpPr>
-            <p:cNvPr id="42" name="Group 41">
-              <a:extLst>
-                <a:ext uri="{FF2B5EF4-FFF2-40B4-BE49-F238E27FC236}">
-                  <a16:creationId xmlns:a16="http://schemas.microsoft.com/office/drawing/2014/main" id="{CE3FFF03-827D-85E6-157A-A21F6BDC3307}"/>
-                </a:ext>
-              </a:extLst>
-            </p:cNvPr>
-            <p:cNvGrpSpPr/>
-            <p:nvPr/>
-          </p:nvGrpSpPr>
-          <p:grpSpPr>
-            <a:xfrm>
-              <a:off x="5936064" y="4871400"/>
-              <a:ext cx="400320" cy="895320"/>
-              <a:chOff x="2258424" y="4817808"/>
-              <a:chExt cx="400320" cy="895320"/>
-            </a:xfrm>
-          </p:grpSpPr>
-          <mc:AlternateContent xmlns:mc="http://schemas.openxmlformats.org/markup-compatibility/2006" xmlns:p14="http://schemas.microsoft.com/office/powerpoint/2010/main">
-            <mc:Choice Requires="p14">
-              <p:contentPart p14:bwMode="auto" r:id="rId19">
-                <p14:nvContentPartPr>
-                  <p14:cNvPr id="43" name="Ink 42">
-                    <a:extLst>
-                      <a:ext uri="{FF2B5EF4-FFF2-40B4-BE49-F238E27FC236}">
-                        <a16:creationId xmlns:a16="http://schemas.microsoft.com/office/drawing/2014/main" id="{63F1BD97-8BD8-ED78-7ACF-B705B8B7D055}"/>
-                      </a:ext>
-                    </a:extLst>
-                  </p14:cNvPr>
-                  <p14:cNvContentPartPr/>
-                  <p14:nvPr/>
-                </p14:nvContentPartPr>
-                <p14:xfrm>
-                  <a:off x="2404224" y="4905648"/>
-                  <a:ext cx="34200" cy="807480"/>
-                </p14:xfrm>
-              </p:contentPart>
-            </mc:Choice>
-            <mc:Fallback xmlns="">
-              <p:pic>
-                <p:nvPicPr>
-                  <p:cNvPr id="43" name="Ink 42">
-                    <a:extLst>
-                      <a:ext uri="{FF2B5EF4-FFF2-40B4-BE49-F238E27FC236}">
-                        <a16:creationId xmlns:a16="http://schemas.microsoft.com/office/drawing/2014/main" id="{63F1BD97-8BD8-ED78-7ACF-B705B8B7D055}"/>
-                      </a:ext>
-                    </a:extLst>
-                  </p:cNvPr>
-                  <p:cNvPicPr/>
-                  <p:nvPr/>
-                </p:nvPicPr>
-                <p:blipFill>
-                  <a:blip r:embed="rId6"/>
-                  <a:stretch>
-                    <a:fillRect/>
-                  </a:stretch>
-                </p:blipFill>
-                <p:spPr>
-                  <a:xfrm>
-                    <a:off x="2386224" y="4887648"/>
-                    <a:ext cx="69840" cy="843120"/>
-                  </a:xfrm>
-                  <a:prstGeom prst="rect">
-                    <a:avLst/>
-                  </a:prstGeom>
-                </p:spPr>
-              </p:pic>
-            </mc:Fallback>
-          </mc:AlternateContent>
-          <mc:AlternateContent xmlns:mc="http://schemas.openxmlformats.org/markup-compatibility/2006" xmlns:p14="http://schemas.microsoft.com/office/powerpoint/2010/main">
-            <mc:Choice Requires="p14">
-              <p:contentPart p14:bwMode="auto" r:id="rId20">
-                <p14:nvContentPartPr>
-                  <p14:cNvPr id="44" name="Ink 43">
-                    <a:extLst>
-                      <a:ext uri="{FF2B5EF4-FFF2-40B4-BE49-F238E27FC236}">
-                        <a16:creationId xmlns:a16="http://schemas.microsoft.com/office/drawing/2014/main" id="{B44B10D1-DC49-F07C-5709-39370C270719}"/>
-                      </a:ext>
-                    </a:extLst>
-                  </p14:cNvPr>
-                  <p14:cNvContentPartPr/>
-                  <p14:nvPr/>
-                </p14:nvContentPartPr>
-                <p14:xfrm>
-                  <a:off x="2258424" y="4817808"/>
-                  <a:ext cx="400320" cy="367920"/>
-                </p14:xfrm>
-              </p:contentPart>
-            </mc:Choice>
-            <mc:Fallback xmlns="">
-              <p:pic>
-                <p:nvPicPr>
-                  <p:cNvPr id="44" name="Ink 43">
-                    <a:extLst>
-                      <a:ext uri="{FF2B5EF4-FFF2-40B4-BE49-F238E27FC236}">
-                        <a16:creationId xmlns:a16="http://schemas.microsoft.com/office/drawing/2014/main" id="{B44B10D1-DC49-F07C-5709-39370C270719}"/>
-                      </a:ext>
-                    </a:extLst>
-                  </p:cNvPr>
-                  <p:cNvPicPr/>
-                  <p:nvPr/>
-                </p:nvPicPr>
-                <p:blipFill>
-                  <a:blip r:embed="rId8"/>
-                  <a:stretch>
-                    <a:fillRect/>
-                  </a:stretch>
-                </p:blipFill>
-                <p:spPr>
-                  <a:xfrm>
-                    <a:off x="2240784" y="4800168"/>
-                    <a:ext cx="435960" cy="403560"/>
-                  </a:xfrm>
-                  <a:prstGeom prst="rect">
-                    <a:avLst/>
-                  </a:prstGeom>
-                </p:spPr>
-              </p:pic>
-            </mc:Fallback>
-          </mc:AlternateContent>
-        </p:grpSp>
-      </p:grpSp>
-      <p:sp>
-        <p:nvSpPr>
-          <p:cNvPr id="48" name="TextBox 47">
-            <a:extLst>
-              <a:ext uri="{FF2B5EF4-FFF2-40B4-BE49-F238E27FC236}">
-                <a16:creationId xmlns:a16="http://schemas.microsoft.com/office/drawing/2014/main" id="{C11A5924-53E8-4685-97F4-FE25E064CCC5}"/>
-              </a:ext>
-            </a:extLst>
-          </p:cNvPr>
-          <p:cNvSpPr txBox="1"/>
-          <p:nvPr/>
-        </p:nvSpPr>
-        <p:spPr>
-          <a:xfrm>
-            <a:off x="1221959" y="5708044"/>
-            <a:ext cx="2737466" cy="646331"/>
-          </a:xfrm>
-          <a:prstGeom prst="rect">
-            <a:avLst/>
-          </a:prstGeom>
-          <a:noFill/>
-        </p:spPr>
-        <p:txBody>
-          <a:bodyPr wrap="square">
-            <a:spAutoFit/>
-          </a:bodyPr>
-          <a:lstStyle/>
-          <a:p>
-            <a:pPr algn="ctr"/>
-            <a:r>
-              <a:rPr lang="en-CA" i="1" dirty="0">
-                <a:solidFill>
-                  <a:srgbClr val="000000"/>
-                </a:solidFill>
-                <a:latin typeface="Georgia" panose="02040502050405020303" pitchFamily="18" charset="0"/>
-                <a:cs typeface="Gill Sans" panose="020B0502020104020203" pitchFamily="34" charset="-79"/>
-              </a:rPr>
-              <a:t>solubility decrease with increasing SST</a:t>
-            </a:r>
-            <a:endParaRPr lang="en-US" i="1" dirty="0"/>
-          </a:p>
-        </p:txBody>
-      </p:sp>
-      <p:sp>
-        <p:nvSpPr>
-          <p:cNvPr id="49" name="TextBox 48">
-            <a:extLst>
-              <a:ext uri="{FF2B5EF4-FFF2-40B4-BE49-F238E27FC236}">
-                <a16:creationId xmlns:a16="http://schemas.microsoft.com/office/drawing/2014/main" id="{21D4564A-2716-175C-053C-346DD4B1A31A}"/>
-              </a:ext>
-            </a:extLst>
-          </p:cNvPr>
-          <p:cNvSpPr txBox="1"/>
-          <p:nvPr/>
-        </p:nvSpPr>
-        <p:spPr>
-          <a:xfrm>
-            <a:off x="4727267" y="5569545"/>
-            <a:ext cx="2864628" cy="923330"/>
-          </a:xfrm>
-          <a:prstGeom prst="rect">
-            <a:avLst/>
-          </a:prstGeom>
-          <a:noFill/>
-        </p:spPr>
-        <p:txBody>
-          <a:bodyPr wrap="square">
-            <a:spAutoFit/>
-          </a:bodyPr>
-          <a:lstStyle/>
-          <a:p>
-            <a:pPr algn="ctr"/>
-            <a:r>
-              <a:rPr lang="en-CA" i="1" dirty="0">
-                <a:solidFill>
-                  <a:srgbClr val="000000"/>
-                </a:solidFill>
-                <a:latin typeface="Georgia" panose="02040502050405020303" pitchFamily="18" charset="0"/>
-                <a:cs typeface="Gill Sans" panose="020B0502020104020203" pitchFamily="34" charset="-79"/>
-              </a:rPr>
-              <a:t>MLD deepening brings up </a:t>
-            </a:r>
-          </a:p>
-          <a:p>
-            <a:pPr algn="ctr"/>
-            <a:r>
-              <a:rPr lang="en-CA" i="1" dirty="0">
-                <a:solidFill>
-                  <a:srgbClr val="000000"/>
-                </a:solidFill>
-                <a:latin typeface="Georgia" panose="02040502050405020303" pitchFamily="18" charset="0"/>
-                <a:cs typeface="Gill Sans" panose="020B0502020104020203" pitchFamily="34" charset="-79"/>
-              </a:rPr>
-              <a:t>high-carbon water </a:t>
-            </a:r>
-          </a:p>
-          <a:p>
-            <a:pPr algn="ctr"/>
-            <a:r>
-              <a:rPr lang="en-CA" i="1" dirty="0">
-                <a:solidFill>
-                  <a:srgbClr val="000000"/>
-                </a:solidFill>
-                <a:latin typeface="Georgia" panose="02040502050405020303" pitchFamily="18" charset="0"/>
-                <a:cs typeface="Gill Sans" panose="020B0502020104020203" pitchFamily="34" charset="-79"/>
-              </a:rPr>
-              <a:t>and nutrients</a:t>
-            </a:r>
-            <a:endParaRPr lang="en-US" i="1" dirty="0"/>
-          </a:p>
-        </p:txBody>
-      </p:sp>
-      <p:sp>
-        <p:nvSpPr>
-          <p:cNvPr id="50" name="TextBox 49">
-            <a:extLst>
-              <a:ext uri="{FF2B5EF4-FFF2-40B4-BE49-F238E27FC236}">
-                <a16:creationId xmlns:a16="http://schemas.microsoft.com/office/drawing/2014/main" id="{7DE2811E-C8F7-AB6E-0C7F-BDAE2118EBB0}"/>
-              </a:ext>
-            </a:extLst>
-          </p:cNvPr>
-          <p:cNvSpPr txBox="1"/>
-          <p:nvPr/>
-        </p:nvSpPr>
-        <p:spPr>
-          <a:xfrm>
-            <a:off x="8281235" y="5569545"/>
-            <a:ext cx="2737466" cy="923330"/>
-          </a:xfrm>
-          <a:prstGeom prst="rect">
-            <a:avLst/>
-          </a:prstGeom>
-          <a:noFill/>
-        </p:spPr>
-        <p:txBody>
-          <a:bodyPr wrap="square">
-            <a:spAutoFit/>
-          </a:bodyPr>
-          <a:lstStyle/>
-          <a:p>
-            <a:pPr algn="ctr"/>
-            <a:r>
-              <a:rPr lang="en-CA" i="1" dirty="0">
-                <a:solidFill>
-                  <a:srgbClr val="000000"/>
-                </a:solidFill>
-                <a:latin typeface="Georgia" panose="02040502050405020303" pitchFamily="18" charset="0"/>
-                <a:cs typeface="Gill Sans" panose="020B0502020104020203" pitchFamily="34" charset="-79"/>
-              </a:rPr>
-              <a:t>enhanced OT brings up high-carbon water </a:t>
-            </a:r>
-          </a:p>
-          <a:p>
-            <a:pPr algn="ctr"/>
-            <a:r>
-              <a:rPr lang="en-CA" i="1" dirty="0">
-                <a:solidFill>
-                  <a:srgbClr val="000000"/>
-                </a:solidFill>
-                <a:latin typeface="Georgia" panose="02040502050405020303" pitchFamily="18" charset="0"/>
-                <a:cs typeface="Gill Sans" panose="020B0502020104020203" pitchFamily="34" charset="-79"/>
-              </a:rPr>
-              <a:t>and nutrients</a:t>
-            </a:r>
-            <a:endParaRPr lang="en-US" i="1" dirty="0"/>
-          </a:p>
-        </p:txBody>
-      </p:sp>
-    </p:spTree>
-    <p:extLst>
-      <p:ext uri="{BB962C8B-B14F-4D97-AF65-F5344CB8AC3E}">
-        <p14:creationId xmlns:p14="http://schemas.microsoft.com/office/powerpoint/2010/main" val="2679288869"/>
       </p:ext>
     </p:extLst>
   </p:cSld>
